--- a/examples/intel-rats/to-deck-prose-v2/final/structural/intel-tdx-attestation-prose-structural.pptx
+++ b/examples/intel-rats/to-deck-prose-v2/final/structural/intel-tdx-attestation-prose-structural.pptx
@@ -20,9 +20,10 @@
     <p:sldId id="268" r:id="rId14"/>
     <p:sldId id="269" r:id="rId15"/>
     <p:sldId id="270" r:id="rId16"/>
+    <p:sldId id="271" r:id="rId17"/>
   </p:sldIdLst>
   <p:notesMasterIdLst>
-    <p:notesMasterId r:id="rId17"/>
+    <p:notesMasterId r:id="rId18"/>
   </p:notesMasterIdLst>
   <p:sldSz cx="12191695" cy="6858000"/>
   <p:notesSz cx="6858000" cy="12191695"/>
@@ -1068,6 +1069,94 @@
             <a:fld id="{F7021451-1387-4CA6-816F-3879F97B5CBC}" type="slidenum">
               <a:rPr lang="en-US"/>
               <a:t>15</a:t>
+            </a:fld>
+            <a:endParaRPr lang="en-US"/>
+          </a:p>
+        </p:txBody>
+      </p:sp>
+    </p:spTree>
+    <p:extLst>
+      <p:ext uri="{BB962C8B-B14F-4D97-AF65-F5344CB8AC3E}">
+        <p14:creationId xmlns:p14="http://schemas.microsoft.com/office/powerpoint/2010/main" val="1024086991"/>
+      </p:ext>
+    </p:extLst>
+  </p:cSld>
+  <p:clrMapOvr>
+    <a:masterClrMapping/>
+  </p:clrMapOvr>
+</p:notes>
+</file>
+
+<file path=ppt/notesSlides/notesSlide16.xml><?xml version="1.0" encoding="utf-8"?>
+<p:notes xmlns:a="http://schemas.openxmlformats.org/drawingml/2006/main" xmlns:r="http://schemas.openxmlformats.org/officeDocument/2006/relationships" xmlns:p="http://schemas.openxmlformats.org/presentationml/2006/main">
+  <p:cSld>
+    <p:spTree>
+      <p:nvGrpSpPr>
+        <p:cNvPr id="1" name=""/>
+        <p:cNvGrpSpPr/>
+        <p:nvPr/>
+      </p:nvGrpSpPr>
+      <p:grpSpPr>
+        <a:xfrm>
+          <a:off x="0" y="0"/>
+          <a:ext cx="0" cy="0"/>
+          <a:chOff x="0" y="0"/>
+          <a:chExt cx="0" cy="0"/>
+        </a:xfrm>
+      </p:grpSpPr>
+      <p:sp>
+        <p:nvSpPr>
+          <p:cNvPr id="2" name="Slide Image Placeholder 1"/>
+          <p:cNvSpPr>
+            <a:spLocks noGrp="1" noRot="1" noChangeAspect="1"/>
+          </p:cNvSpPr>
+          <p:nvPr>
+            <p:ph type="sldImg"/>
+          </p:nvPr>
+        </p:nvSpPr>
+        <p:spPr/>
+      </p:sp>
+      <p:sp>
+        <p:nvSpPr>
+          <p:cNvPr id="3" name="Notes Placeholder 2"/>
+          <p:cNvSpPr>
+            <a:spLocks noGrp="1"/>
+          </p:cNvSpPr>
+          <p:nvPr>
+            <p:ph type="body" idx="1"/>
+          </p:nvPr>
+        </p:nvSpPr>
+        <p:spPr/>
+        <p:txBody>
+          <a:bodyPr/>
+          <a:lstStyle/>
+          <a:p>
+            <a:r>
+              <a:rPr lang="en-US" dirty="0"/>
+              <a:t/>
+            </a:r>
+            <a:endParaRPr lang="en-US" dirty="0"/>
+          </a:p>
+        </p:txBody>
+      </p:sp>
+      <p:sp>
+        <p:nvSpPr>
+          <p:cNvPr id="4" name="Slide Number Placeholder 3"/>
+          <p:cNvSpPr>
+            <a:spLocks noGrp="1"/>
+          </p:cNvSpPr>
+          <p:nvPr>
+            <p:ph type="sldNum" sz="quarter" idx="10"/>
+          </p:nvPr>
+        </p:nvSpPr>
+        <p:spPr/>
+        <p:txBody>
+          <a:bodyPr/>
+          <a:lstStyle/>
+          <a:p>
+            <a:fld id="{F7021451-1387-4CA6-816F-3879F97B5CBC}" type="slidenum">
+              <a:rPr lang="en-US"/>
+              <a:t>16</a:t>
             </a:fld>
             <a:endParaRPr lang="en-US"/>
           </a:p>
@@ -3044,7 +3133,7 @@
                 <a:ea typeface="Apple SD Gothic Neo" pitchFamily="34" charset="-122"/>
                 <a:cs typeface="Apple SD Gothic Neo" pitchFamily="34" charset="-120"/>
               </a:rPr>
-              <a:t>Sources: RFC 9334 · Intel DCAP / TDX documentation</a:t>
+              <a:t>Source markers: 〔S-…〕 · Appendix 16</a:t>
             </a:r>
             <a:endParaRPr lang="en-US" sz="780" dirty="0"/>
           </a:p>
@@ -4005,7 +4094,7 @@
                 <a:ea typeface="Apple SD Gothic Neo" pitchFamily="34" charset="-122"/>
                 <a:cs typeface="Apple SD Gothic Neo" pitchFamily="34" charset="-120"/>
               </a:rPr>
-              <a:t>Sources: RFC 9334 · Intel DCAP / TDX documentation</a:t>
+              <a:t>Source markers: 〔S-…〕 · Appendix 16</a:t>
             </a:r>
             <a:endParaRPr lang="en-US" sz="780" dirty="0"/>
           </a:p>
@@ -4078,7 +4167,7 @@
                 <a:ea typeface="Apple SD Gothic Neo" pitchFamily="34" charset="-122"/>
                 <a:cs typeface="Apple SD Gothic Neo" pitchFamily="34" charset="-120"/>
               </a:rPr>
-              <a:t>Quote는 TD가 보고한 상태를 보여 주지만 workload의 모든 성질을 증명하지는 않는다</a:t>
+              <a:t>전체 Quote→Result 경로는 reported TD state를 확인하지만 workload의 모든 성질을 증명하지는 않는다</a:t>
             </a:r>
             <a:endParaRPr lang="en-US" sz="2900" dirty="0"/>
           </a:p>
@@ -4119,7 +4208,7 @@
                 <a:ea typeface="Apple SD Gothic Neo" pitchFamily="34" charset="-122"/>
                 <a:cs typeface="Apple SD Gothic Neo" pitchFamily="34" charset="-120"/>
               </a:rPr>
-              <a:t>proof boundary를 분리해야 valid Quote를 code correctness나 container identity로 과대 해석하지 않는다.</a:t>
+              <a:t>proof boundary를 분리해야 valid Quote와 signed Result를 code correctness나 container identity로 과대 해석하지 않는다.</a:t>
             </a:r>
             <a:endParaRPr lang="en-US" sz="1430" dirty="0"/>
           </a:p>
@@ -4175,7 +4264,7 @@
         <p:spPr>
           <a:xfrm>
             <a:off x="621792" y="1508760"/>
-            <a:ext cx="5285232" cy="4297680"/>
+            <a:ext cx="5285232" cy="4041648"/>
           </a:xfrm>
           <a:prstGeom prst="roundRect">
             <a:avLst/>
@@ -4240,7 +4329,7 @@
         </p:nvSpPr>
         <p:spPr>
           <a:xfrm>
-            <a:off x="914400" y="2496312"/>
+            <a:off x="914400" y="2386584"/>
             <a:ext cx="109728" cy="109728"/>
           </a:xfrm>
           <a:prstGeom prst="roundRect">
@@ -4265,7 +4354,7 @@
         </p:nvSpPr>
         <p:spPr>
           <a:xfrm>
-            <a:off x="1170432" y="2423160"/>
+            <a:off x="1170432" y="2313432"/>
             <a:ext cx="4178808" cy="228600"/>
           </a:xfrm>
           <a:prstGeom prst="rect">
@@ -4284,7 +4373,7 @@
               <a:buNone/>
             </a:pPr>
             <a:r>
-              <a:rPr lang="en-US" sz="1260" dirty="0">
+              <a:rPr lang="en-US" sz="1090" dirty="0">
                 <a:solidFill>
                   <a:srgbClr val="14273A"/>
                 </a:solidFill>
@@ -4294,7 +4383,7 @@
               </a:rPr>
               <a:t>Quote integrity와 accepted quoting credential 연결</a:t>
             </a:r>
-            <a:endParaRPr lang="en-US" sz="1260" dirty="0"/>
+            <a:endParaRPr lang="en-US" sz="1090" dirty="0"/>
           </a:p>
         </p:txBody>
       </p:sp>
@@ -4306,7 +4395,7 @@
         </p:nvSpPr>
         <p:spPr>
           <a:xfrm>
-            <a:off x="914400" y="3118104"/>
+            <a:off x="914400" y="2816352"/>
             <a:ext cx="109728" cy="109728"/>
           </a:xfrm>
           <a:prstGeom prst="roundRect">
@@ -4331,7 +4420,7 @@
         </p:nvSpPr>
         <p:spPr>
           <a:xfrm>
-            <a:off x="1170432" y="3044952"/>
+            <a:off x="1170432" y="2743200"/>
             <a:ext cx="4178808" cy="228600"/>
           </a:xfrm>
           <a:prstGeom prst="rect">
@@ -4350,7 +4439,7 @@
               <a:buNone/>
             </a:pPr>
             <a:r>
-              <a:rPr lang="en-US" sz="1260" dirty="0">
+              <a:rPr lang="en-US" sz="1090" dirty="0">
                 <a:solidFill>
                   <a:srgbClr val="14273A"/>
                 </a:solidFill>
@@ -4360,7 +4449,7 @@
               </a:rPr>
               <a:t>reported TD measurement·attribute·TCB state</a:t>
             </a:r>
-            <a:endParaRPr lang="en-US" sz="1260" dirty="0"/>
+            <a:endParaRPr lang="en-US" sz="1090" dirty="0"/>
           </a:p>
         </p:txBody>
       </p:sp>
@@ -4372,7 +4461,7 @@
         </p:nvSpPr>
         <p:spPr>
           <a:xfrm>
-            <a:off x="914400" y="3739896"/>
+            <a:off x="914400" y="3246120"/>
             <a:ext cx="109728" cy="109728"/>
           </a:xfrm>
           <a:prstGeom prst="roundRect">
@@ -4397,7 +4486,7 @@
         </p:nvSpPr>
         <p:spPr>
           <a:xfrm>
-            <a:off x="1170432" y="3666744"/>
+            <a:off x="1170432" y="3172968"/>
             <a:ext cx="4178808" cy="228600"/>
           </a:xfrm>
           <a:prstGeom prst="rect">
@@ -4416,7 +4505,7 @@
               <a:buNone/>
             </a:pPr>
             <a:r>
-              <a:rPr lang="en-US" sz="1260" dirty="0">
+              <a:rPr lang="en-US" sz="1090" dirty="0">
                 <a:solidFill>
                   <a:srgbClr val="14273A"/>
                 </a:solidFill>
@@ -4426,7 +4515,7 @@
               </a:rPr>
               <a:t>D가 retained context와 canonical key에 묶였는지</a:t>
             </a:r>
-            <a:endParaRPr lang="en-US" sz="1260" dirty="0"/>
+            <a:endParaRPr lang="en-US" sz="1090" dirty="0"/>
           </a:p>
         </p:txBody>
       </p:sp>
@@ -4438,7 +4527,7 @@
         </p:nvSpPr>
         <p:spPr>
           <a:xfrm>
-            <a:off x="914400" y="4361688"/>
+            <a:off x="914400" y="3675888"/>
             <a:ext cx="109728" cy="109728"/>
           </a:xfrm>
           <a:prstGeom prst="roundRect">
@@ -4463,7 +4552,7 @@
         </p:nvSpPr>
         <p:spPr>
           <a:xfrm>
-            <a:off x="1170432" y="4288536"/>
+            <a:off x="1170432" y="3602736"/>
             <a:ext cx="4178808" cy="228600"/>
           </a:xfrm>
           <a:prstGeom prst="rect">
@@ -4482,7 +4571,7 @@
               <a:buNone/>
             </a:pPr>
             <a:r>
-              <a:rPr lang="en-US" sz="1260" dirty="0">
+              <a:rPr lang="en-US" sz="1090" dirty="0">
                 <a:solidFill>
                   <a:srgbClr val="14273A"/>
                 </a:solidFill>
@@ -4490,22 +4579,154 @@
                 <a:ea typeface="Apple SD Gothic Neo" pitchFamily="34" charset="-122"/>
                 <a:cs typeface="Apple SD Gothic Neo" pitchFamily="34" charset="-120"/>
               </a:rPr>
+              <a:t>reference value와 비교 가능한지</a:t>
+            </a:r>
+            <a:endParaRPr lang="en-US" sz="1090" dirty="0"/>
+          </a:p>
+        </p:txBody>
+      </p:sp>
+      <p:sp>
+        <p:nvSpPr>
+          <p:cNvPr id="15" name="Shape 13"/>
+          <p:cNvSpPr/>
+          <p:nvPr/>
+        </p:nvSpPr>
+        <p:spPr>
+          <a:xfrm>
+            <a:off x="914400" y="4105656"/>
+            <a:ext cx="109728" cy="109728"/>
+          </a:xfrm>
+          <a:prstGeom prst="roundRect">
+            <a:avLst/>
+          </a:prstGeom>
+          <a:solidFill>
+            <a:srgbClr val="14804A"/>
+          </a:solidFill>
+          <a:ln w="8890">
+            <a:solidFill>
+              <a:srgbClr val="14804A"/>
+            </a:solidFill>
+            <a:prstDash val="solid"/>
+          </a:ln>
+        </p:spPr>
+      </p:sp>
+      <p:sp>
+        <p:nvSpPr>
+          <p:cNvPr id="16" name="Text 14"/>
+          <p:cNvSpPr/>
+          <p:nvPr/>
+        </p:nvSpPr>
+        <p:spPr>
+          <a:xfrm>
+            <a:off x="1170432" y="4032504"/>
+            <a:ext cx="4178808" cy="228600"/>
+          </a:xfrm>
+          <a:prstGeom prst="rect">
+            <a:avLst/>
+          </a:prstGeom>
+          <a:noFill/>
+          <a:ln/>
+        </p:spPr>
+        <p:txBody>
+          <a:bodyPr wrap="square" lIns="0" tIns="0" rIns="0" bIns="0" rtlCol="0" anchor="ctr">
+            <a:normAutofit/>
+          </a:bodyPr>
+          <a:lstStyle/>
+          <a:p>
+            <a:pPr indent="0" marL="0">
+              <a:buNone/>
+            </a:pPr>
+            <a:r>
+              <a:rPr lang="en-US" sz="1090" dirty="0">
+                <a:solidFill>
+                  <a:srgbClr val="14273A"/>
+                </a:solidFill>
+                <a:latin typeface="Apple SD Gothic Neo" pitchFamily="34" charset="0"/>
+                <a:ea typeface="Apple SD Gothic Neo" pitchFamily="34" charset="-122"/>
+                <a:cs typeface="Apple SD Gothic Neo" pitchFamily="34" charset="-120"/>
+              </a:rPr>
               <a:t>Result가 E·policy version·allow-only K를 가리키는지</a:t>
             </a:r>
-            <a:endParaRPr lang="en-US" sz="1260" dirty="0"/>
-          </a:p>
-        </p:txBody>
-      </p:sp>
-      <p:sp>
-        <p:nvSpPr>
-          <p:cNvPr id="15" name="Shape 13"/>
+            <a:endParaRPr lang="en-US" sz="1090" dirty="0"/>
+          </a:p>
+        </p:txBody>
+      </p:sp>
+      <p:sp>
+        <p:nvSpPr>
+          <p:cNvPr id="17" name="Shape 15"/>
+          <p:cNvSpPr/>
+          <p:nvPr/>
+        </p:nvSpPr>
+        <p:spPr>
+          <a:xfrm>
+            <a:off x="914400" y="4535424"/>
+            <a:ext cx="109728" cy="109728"/>
+          </a:xfrm>
+          <a:prstGeom prst="roundRect">
+            <a:avLst/>
+          </a:prstGeom>
+          <a:solidFill>
+            <a:srgbClr val="14804A"/>
+          </a:solidFill>
+          <a:ln w="8890">
+            <a:solidFill>
+              <a:srgbClr val="14804A"/>
+            </a:solidFill>
+            <a:prstDash val="solid"/>
+          </a:ln>
+        </p:spPr>
+      </p:sp>
+      <p:sp>
+        <p:nvSpPr>
+          <p:cNvPr id="18" name="Text 16"/>
+          <p:cNvSpPr/>
+          <p:nvPr/>
+        </p:nvSpPr>
+        <p:spPr>
+          <a:xfrm>
+            <a:off x="1170432" y="4462272"/>
+            <a:ext cx="4178808" cy="228600"/>
+          </a:xfrm>
+          <a:prstGeom prst="rect">
+            <a:avLst/>
+          </a:prstGeom>
+          <a:noFill/>
+          <a:ln/>
+        </p:spPr>
+        <p:txBody>
+          <a:bodyPr wrap="square" lIns="0" tIns="0" rIns="0" bIns="0" rtlCol="0" anchor="ctr">
+            <a:normAutofit/>
+          </a:bodyPr>
+          <a:lstStyle/>
+          <a:p>
+            <a:pPr indent="0" marL="0">
+              <a:buNone/>
+            </a:pPr>
+            <a:r>
+              <a:rPr lang="en-US" sz="1090" dirty="0">
+                <a:solidFill>
+                  <a:srgbClr val="14273A"/>
+                </a:solidFill>
+                <a:latin typeface="Apple SD Gothic Neo" pitchFamily="34" charset="0"/>
+                <a:ea typeface="Apple SD Gothic Neo" pitchFamily="34" charset="-122"/>
+                <a:cs typeface="Apple SD Gothic Neo" pitchFamily="34" charset="-120"/>
+              </a:rPr>
+              <a:t>별도 Result·PoP·authorization 검사를 거친 release path</a:t>
+            </a:r>
+            <a:endParaRPr lang="en-US" sz="1090" dirty="0"/>
+          </a:p>
+        </p:txBody>
+      </p:sp>
+      <p:sp>
+        <p:nvSpPr>
+          <p:cNvPr id="19" name="Shape 17"/>
           <p:cNvSpPr/>
           <p:nvPr/>
         </p:nvSpPr>
         <p:spPr>
           <a:xfrm>
             <a:off x="6272784" y="1508760"/>
-            <a:ext cx="5285232" cy="4297680"/>
+            <a:ext cx="5285232" cy="4041648"/>
           </a:xfrm>
           <a:prstGeom prst="roundRect">
             <a:avLst/>
@@ -4523,7 +4744,7 @@
       </p:sp>
       <p:sp>
         <p:nvSpPr>
-          <p:cNvPr id="16" name="Text 14"/>
+          <p:cNvPr id="20" name="Text 18"/>
           <p:cNvSpPr/>
           <p:nvPr/>
         </p:nvSpPr>
@@ -4564,13 +4785,13 @@
       </p:sp>
       <p:sp>
         <p:nvSpPr>
-          <p:cNvPr id="17" name="Shape 15"/>
-          <p:cNvSpPr/>
-          <p:nvPr/>
-        </p:nvSpPr>
-        <p:spPr>
-          <a:xfrm>
-            <a:off x="6565392" y="2496312"/>
+          <p:cNvPr id="21" name="Shape 19"/>
+          <p:cNvSpPr/>
+          <p:nvPr/>
+        </p:nvSpPr>
+        <p:spPr>
+          <a:xfrm>
+            <a:off x="6565392" y="2386584"/>
             <a:ext cx="109728" cy="109728"/>
           </a:xfrm>
           <a:prstGeom prst="roundRect">
@@ -4589,13 +4810,13 @@
       </p:sp>
       <p:sp>
         <p:nvSpPr>
-          <p:cNvPr id="18" name="Text 16"/>
-          <p:cNvSpPr/>
-          <p:nvPr/>
-        </p:nvSpPr>
-        <p:spPr>
-          <a:xfrm>
-            <a:off x="6821424" y="2423160"/>
+          <p:cNvPr id="22" name="Text 20"/>
+          <p:cNvSpPr/>
+          <p:nvPr/>
+        </p:nvSpPr>
+        <p:spPr>
+          <a:xfrm>
+            <a:off x="6821424" y="2313432"/>
             <a:ext cx="4224528" cy="228600"/>
           </a:xfrm>
           <a:prstGeom prst="rect">
@@ -4614,7 +4835,7 @@
               <a:buNone/>
             </a:pPr>
             <a:r>
-              <a:rPr lang="en-US" sz="1230" dirty="0">
+              <a:rPr lang="en-US" sz="1070" dirty="0">
                 <a:solidFill>
                   <a:srgbClr val="14273A"/>
                 </a:solidFill>
@@ -4624,19 +4845,19 @@
               </a:rPr>
               <a:t>code correctness 또는 vulnerability absence</a:t>
             </a:r>
-            <a:endParaRPr lang="en-US" sz="1230" dirty="0"/>
-          </a:p>
-        </p:txBody>
-      </p:sp>
-      <p:sp>
-        <p:nvSpPr>
-          <p:cNvPr id="19" name="Shape 17"/>
-          <p:cNvSpPr/>
-          <p:nvPr/>
-        </p:nvSpPr>
-        <p:spPr>
-          <a:xfrm>
-            <a:off x="6565392" y="3118104"/>
+            <a:endParaRPr lang="en-US" sz="1070" dirty="0"/>
+          </a:p>
+        </p:txBody>
+      </p:sp>
+      <p:sp>
+        <p:nvSpPr>
+          <p:cNvPr id="23" name="Shape 21"/>
+          <p:cNvSpPr/>
+          <p:nvPr/>
+        </p:nvSpPr>
+        <p:spPr>
+          <a:xfrm>
+            <a:off x="6565392" y="2816352"/>
             <a:ext cx="109728" cy="109728"/>
           </a:xfrm>
           <a:prstGeom prst="roundRect">
@@ -4655,13 +4876,13 @@
       </p:sp>
       <p:sp>
         <p:nvSpPr>
-          <p:cNvPr id="20" name="Text 18"/>
-          <p:cNvSpPr/>
-          <p:nvPr/>
-        </p:nvSpPr>
-        <p:spPr>
-          <a:xfrm>
-            <a:off x="6821424" y="3044952"/>
+          <p:cNvPr id="24" name="Text 22"/>
+          <p:cNvSpPr/>
+          <p:nvPr/>
+        </p:nvSpPr>
+        <p:spPr>
+          <a:xfrm>
+            <a:off x="6821424" y="2743200"/>
             <a:ext cx="4224528" cy="228600"/>
           </a:xfrm>
           <a:prstGeom prst="rect">
@@ -4680,7 +4901,7 @@
               <a:buNone/>
             </a:pPr>
             <a:r>
-              <a:rPr lang="en-US" sz="1230" dirty="0">
+              <a:rPr lang="en-US" sz="1070" dirty="0">
                 <a:solidFill>
                   <a:srgbClr val="14273A"/>
                 </a:solidFill>
@@ -4690,19 +4911,19 @@
               </a:rPr>
               <a:t>TD 안의 container/process 자동 identity</a:t>
             </a:r>
-            <a:endParaRPr lang="en-US" sz="1230" dirty="0"/>
-          </a:p>
-        </p:txBody>
-      </p:sp>
-      <p:sp>
-        <p:nvSpPr>
-          <p:cNvPr id="21" name="Shape 19"/>
-          <p:cNvSpPr/>
-          <p:nvPr/>
-        </p:nvSpPr>
-        <p:spPr>
-          <a:xfrm>
-            <a:off x="6565392" y="3739896"/>
+            <a:endParaRPr lang="en-US" sz="1070" dirty="0"/>
+          </a:p>
+        </p:txBody>
+      </p:sp>
+      <p:sp>
+        <p:nvSpPr>
+          <p:cNvPr id="25" name="Shape 23"/>
+          <p:cNvSpPr/>
+          <p:nvPr/>
+        </p:nvSpPr>
+        <p:spPr>
+          <a:xfrm>
+            <a:off x="6565392" y="3246120"/>
             <a:ext cx="109728" cy="109728"/>
           </a:xfrm>
           <a:prstGeom prst="roundRect">
@@ -4721,13 +4942,13 @@
       </p:sp>
       <p:sp>
         <p:nvSpPr>
-          <p:cNvPr id="22" name="Text 20"/>
-          <p:cNvSpPr/>
-          <p:nvPr/>
-        </p:nvSpPr>
-        <p:spPr>
-          <a:xfrm>
-            <a:off x="6821424" y="3666744"/>
+          <p:cNvPr id="26" name="Text 24"/>
+          <p:cNvSpPr/>
+          <p:nvPr/>
+        </p:nvSpPr>
+        <p:spPr>
+          <a:xfrm>
+            <a:off x="6821424" y="3172968"/>
             <a:ext cx="4224528" cy="228600"/>
           </a:xfrm>
           <a:prstGeom prst="rect">
@@ -4746,7 +4967,7 @@
               <a:buNone/>
             </a:pPr>
             <a:r>
-              <a:rPr lang="en-US" sz="1230" dirty="0">
+              <a:rPr lang="en-US" sz="1070" dirty="0">
                 <a:solidFill>
                   <a:srgbClr val="14273A"/>
                 </a:solidFill>
@@ -4756,19 +4977,19 @@
               </a:rPr>
               <a:t>attestation 이후의 future-safe behavior</a:t>
             </a:r>
-            <a:endParaRPr lang="en-US" sz="1230" dirty="0"/>
-          </a:p>
-        </p:txBody>
-      </p:sp>
-      <p:sp>
-        <p:nvSpPr>
-          <p:cNvPr id="23" name="Shape 21"/>
-          <p:cNvSpPr/>
-          <p:nvPr/>
-        </p:nvSpPr>
-        <p:spPr>
-          <a:xfrm>
-            <a:off x="6565392" y="4361688"/>
+            <a:endParaRPr lang="en-US" sz="1070" dirty="0"/>
+          </a:p>
+        </p:txBody>
+      </p:sp>
+      <p:sp>
+        <p:nvSpPr>
+          <p:cNvPr id="27" name="Shape 25"/>
+          <p:cNvSpPr/>
+          <p:nvPr/>
+        </p:nvSpPr>
+        <p:spPr>
+          <a:xfrm>
+            <a:off x="6565392" y="3675888"/>
             <a:ext cx="109728" cy="109728"/>
           </a:xfrm>
           <a:prstGeom prst="roundRect">
@@ -4787,13 +5008,13 @@
       </p:sp>
       <p:sp>
         <p:nvSpPr>
-          <p:cNvPr id="24" name="Text 22"/>
-          <p:cNvSpPr/>
-          <p:nvPr/>
-        </p:nvSpPr>
-        <p:spPr>
-          <a:xfrm>
-            <a:off x="6821424" y="4288536"/>
+          <p:cNvPr id="28" name="Text 26"/>
+          <p:cNvSpPr/>
+          <p:nvPr/>
+        </p:nvSpPr>
+        <p:spPr>
+          <a:xfrm>
+            <a:off x="6821424" y="3602736"/>
             <a:ext cx="4224528" cy="228600"/>
           </a:xfrm>
           <a:prstGeom prst="rect">
@@ -4812,7 +5033,7 @@
               <a:buNone/>
             </a:pPr>
             <a:r>
-              <a:rPr lang="en-US" sz="1230" dirty="0">
+              <a:rPr lang="en-US" sz="1070" dirty="0">
                 <a:solidFill>
                   <a:srgbClr val="14273A"/>
                 </a:solidFill>
@@ -4820,22 +5041,154 @@
                 <a:ea typeface="Apple SD Gothic Neo" pitchFamily="34" charset="-122"/>
                 <a:cs typeface="Apple SD Gothic Neo" pitchFamily="34" charset="-120"/>
               </a:rPr>
+              <a:t>retained·terminal challenge 없이 Evidence freshness</a:t>
+            </a:r>
+            <a:endParaRPr lang="en-US" sz="1070" dirty="0"/>
+          </a:p>
+        </p:txBody>
+      </p:sp>
+      <p:sp>
+        <p:nvSpPr>
+          <p:cNvPr id="29" name="Shape 27"/>
+          <p:cNvSpPr/>
+          <p:nvPr/>
+        </p:nvSpPr>
+        <p:spPr>
+          <a:xfrm>
+            <a:off x="6565392" y="4105656"/>
+            <a:ext cx="109728" cy="109728"/>
+          </a:xfrm>
+          <a:prstGeom prst="roundRect">
+            <a:avLst/>
+          </a:prstGeom>
+          <a:solidFill>
+            <a:srgbClr val="B42318"/>
+          </a:solidFill>
+          <a:ln w="8890">
+            <a:solidFill>
+              <a:srgbClr val="B42318"/>
+            </a:solidFill>
+            <a:prstDash val="solid"/>
+          </a:ln>
+        </p:spPr>
+      </p:sp>
+      <p:sp>
+        <p:nvSpPr>
+          <p:cNvPr id="30" name="Text 28"/>
+          <p:cNvSpPr/>
+          <p:nvPr/>
+        </p:nvSpPr>
+        <p:spPr>
+          <a:xfrm>
+            <a:off x="6821424" y="4032504"/>
+            <a:ext cx="4224528" cy="228600"/>
+          </a:xfrm>
+          <a:prstGeom prst="rect">
+            <a:avLst/>
+          </a:prstGeom>
+          <a:noFill/>
+          <a:ln/>
+        </p:spPr>
+        <p:txBody>
+          <a:bodyPr wrap="square" lIns="0" tIns="0" rIns="0" bIns="0" rtlCol="0" anchor="ctr">
+            <a:normAutofit/>
+          </a:bodyPr>
+          <a:lstStyle/>
+          <a:p>
+            <a:pPr indent="0" marL="0">
+              <a:buNone/>
+            </a:pPr>
+            <a:r>
+              <a:rPr lang="en-US" sz="1070" dirty="0">
+                <a:solidFill>
+                  <a:srgbClr val="14273A"/>
+                </a:solidFill>
+                <a:latin typeface="Apple SD Gothic Neo" pitchFamily="34" charset="0"/>
+                <a:ea typeface="Apple SD Gothic Neo" pitchFamily="34" charset="-122"/>
+                <a:cs typeface="Apple SD Gothic Neo" pitchFamily="34" charset="-120"/>
+              </a:rPr>
+              <a:t>별도 검사 없는 private-key possession·Result authenticity·최종 authorization</a:t>
+            </a:r>
+            <a:endParaRPr lang="en-US" sz="1070" dirty="0"/>
+          </a:p>
+        </p:txBody>
+      </p:sp>
+      <p:sp>
+        <p:nvSpPr>
+          <p:cNvPr id="31" name="Shape 29"/>
+          <p:cNvSpPr/>
+          <p:nvPr/>
+        </p:nvSpPr>
+        <p:spPr>
+          <a:xfrm>
+            <a:off x="6565392" y="4535424"/>
+            <a:ext cx="109728" cy="109728"/>
+          </a:xfrm>
+          <a:prstGeom prst="roundRect">
+            <a:avLst/>
+          </a:prstGeom>
+          <a:solidFill>
+            <a:srgbClr val="B42318"/>
+          </a:solidFill>
+          <a:ln w="8890">
+            <a:solidFill>
+              <a:srgbClr val="B42318"/>
+            </a:solidFill>
+            <a:prstDash val="solid"/>
+          </a:ln>
+        </p:spPr>
+      </p:sp>
+      <p:sp>
+        <p:nvSpPr>
+          <p:cNvPr id="32" name="Text 30"/>
+          <p:cNvSpPr/>
+          <p:nvPr/>
+        </p:nvSpPr>
+        <p:spPr>
+          <a:xfrm>
+            <a:off x="6821424" y="4462272"/>
+            <a:ext cx="4224528" cy="228600"/>
+          </a:xfrm>
+          <a:prstGeom prst="rect">
+            <a:avLst/>
+          </a:prstGeom>
+          <a:noFill/>
+          <a:ln/>
+        </p:spPr>
+        <p:txBody>
+          <a:bodyPr wrap="square" lIns="0" tIns="0" rIns="0" bIns="0" rtlCol="0" anchor="ctr">
+            <a:normAutofit/>
+          </a:bodyPr>
+          <a:lstStyle/>
+          <a:p>
+            <a:pPr indent="0" marL="0">
+              <a:buNone/>
+            </a:pPr>
+            <a:r>
+              <a:rPr lang="en-US" sz="1070" dirty="0">
+                <a:solidFill>
+                  <a:srgbClr val="14273A"/>
+                </a:solidFill>
+                <a:latin typeface="Apple SD Gothic Neo" pitchFamily="34" charset="0"/>
+                <a:ea typeface="Apple SD Gothic Neo" pitchFamily="34" charset="-122"/>
+                <a:cs typeface="Apple SD Gothic Neo" pitchFamily="34" charset="-120"/>
+              </a:rPr>
               <a:t>availability와 모든 side-channel·I/O·physical·supply-chain risk 제거</a:t>
             </a:r>
-            <a:endParaRPr lang="en-US" sz="1230" dirty="0"/>
-          </a:p>
-        </p:txBody>
-      </p:sp>
-      <p:sp>
-        <p:nvSpPr>
-          <p:cNvPr id="25" name="Shape 23"/>
-          <p:cNvSpPr/>
-          <p:nvPr/>
-        </p:nvSpPr>
-        <p:spPr>
-          <a:xfrm>
-            <a:off x="658368" y="5806440"/>
-            <a:ext cx="10835640" cy="438912"/>
+            <a:endParaRPr lang="en-US" sz="1070" dirty="0"/>
+          </a:p>
+        </p:txBody>
+      </p:sp>
+      <p:sp>
+        <p:nvSpPr>
+          <p:cNvPr id="33" name="Shape 31"/>
+          <p:cNvSpPr/>
+          <p:nvPr/>
+        </p:nvSpPr>
+        <p:spPr>
+          <a:xfrm>
+            <a:off x="658368" y="5632704"/>
+            <a:ext cx="10835640" cy="566928"/>
           </a:xfrm>
           <a:prstGeom prst="roundRect">
             <a:avLst/>
@@ -4853,13 +5206,13 @@
       </p:sp>
       <p:sp>
         <p:nvSpPr>
-          <p:cNvPr id="26" name="Shape 24"/>
-          <p:cNvSpPr/>
-          <p:nvPr/>
-        </p:nvSpPr>
-        <p:spPr>
-          <a:xfrm>
-            <a:off x="822960" y="5971032"/>
+          <p:cNvPr id="34" name="Shape 32"/>
+          <p:cNvSpPr/>
+          <p:nvPr/>
+        </p:nvSpPr>
+        <p:spPr>
+          <a:xfrm>
+            <a:off x="822960" y="5797296"/>
             <a:ext cx="822960" cy="256032"/>
           </a:xfrm>
           <a:prstGeom prst="roundRect">
@@ -4878,13 +5231,13 @@
       </p:sp>
       <p:sp>
         <p:nvSpPr>
-          <p:cNvPr id="27" name="Text 25"/>
-          <p:cNvSpPr/>
-          <p:nvPr/>
-        </p:nvSpPr>
-        <p:spPr>
-          <a:xfrm>
-            <a:off x="822960" y="6039612"/>
+          <p:cNvPr id="35" name="Text 33"/>
+          <p:cNvSpPr/>
+          <p:nvPr/>
+        </p:nvSpPr>
+        <p:spPr>
+          <a:xfrm>
+            <a:off x="822960" y="5865876"/>
             <a:ext cx="822960" cy="91440"/>
           </a:xfrm>
           <a:prstGeom prst="rect">
@@ -4919,14 +5272,14 @@
       </p:sp>
       <p:sp>
         <p:nvSpPr>
-          <p:cNvPr id="28" name="Text 26"/>
-          <p:cNvSpPr/>
-          <p:nvPr/>
-        </p:nvSpPr>
-        <p:spPr>
-          <a:xfrm>
-            <a:off x="1828800" y="5971032"/>
-            <a:ext cx="9482328" cy="237744"/>
+          <p:cNvPr id="36" name="Text 34"/>
+          <p:cNvSpPr/>
+          <p:nvPr/>
+        </p:nvSpPr>
+        <p:spPr>
+          <a:xfrm>
+            <a:off x="1828800" y="5797296"/>
+            <a:ext cx="9482328" cy="365760"/>
           </a:xfrm>
           <a:prstGeom prst="rect">
             <a:avLst/>
@@ -4952,7 +5305,7 @@
                 <a:ea typeface="Apple SD Gothic Neo" pitchFamily="34" charset="-122"/>
                 <a:cs typeface="Apple SD Gothic Neo" pitchFamily="34" charset="-120"/>
               </a:rPr>
-              <a:t>Quote 검증은 workload correctness나 container identity를 증명하지 않는다. 그것이 release 조건이면 workload Evidence와 runtime control을 별도로 추가한다.</a:t>
+              <a:t>Quote/Result는 workload correctness·container identity를 증명하지 않는다. release 조건이면 workload Evidence와 runtime control을 추가하고, freshness·PoP·authorization은 각각 독립 검사한다.</a:t>
             </a:r>
             <a:endParaRPr lang="en-US" sz="1330" dirty="0"/>
           </a:p>
@@ -4960,7 +5313,7 @@
       </p:sp>
       <p:sp>
         <p:nvSpPr>
-          <p:cNvPr id="29" name="Shape 27"/>
+          <p:cNvPr id="37" name="Shape 35"/>
           <p:cNvSpPr/>
           <p:nvPr/>
         </p:nvSpPr>
@@ -4983,7 +5336,7 @@
       </p:sp>
       <p:sp>
         <p:nvSpPr>
-          <p:cNvPr id="30" name="Text 28"/>
+          <p:cNvPr id="38" name="Text 36"/>
           <p:cNvSpPr/>
           <p:nvPr/>
         </p:nvSpPr>
@@ -5016,7 +5369,7 @@
                 <a:ea typeface="Apple SD Gothic Neo" pitchFamily="34" charset="-122"/>
                 <a:cs typeface="Apple SD Gothic Neo" pitchFamily="34" charset="-120"/>
               </a:rPr>
-              <a:t>C-007 · C-009 · B-007 · proves / does_not_prove</a:t>
+              <a:t>C-007 · C-009 · B-007 · proves / does_not_prove · 〔S-002,S-003,S-009〕</a:t>
             </a:r>
             <a:endParaRPr lang="en-US" sz="780" dirty="0"/>
           </a:p>
@@ -5024,7 +5377,7 @@
       </p:sp>
       <p:sp>
         <p:nvSpPr>
-          <p:cNvPr id="31" name="Text 29"/>
+          <p:cNvPr id="39" name="Text 37"/>
           <p:cNvSpPr/>
           <p:nvPr/>
         </p:nvSpPr>
@@ -5057,7 +5410,7 @@
                 <a:ea typeface="Apple SD Gothic Neo" pitchFamily="34" charset="-122"/>
                 <a:cs typeface="Apple SD Gothic Neo" pitchFamily="34" charset="-120"/>
               </a:rPr>
-              <a:t>Sources: RFC 9334 · Intel DCAP / TDX documentation</a:t>
+              <a:t>Source markers: 〔S-…〕 · Appendix 16</a:t>
             </a:r>
             <a:endParaRPr lang="en-US" sz="780" dirty="0"/>
           </a:p>
@@ -5226,8 +5579,8 @@
         </p:nvSpPr>
         <p:spPr>
           <a:xfrm>
-            <a:off x="640080" y="1755648"/>
-            <a:ext cx="3337560" cy="3063240"/>
+            <a:off x="640080" y="1664208"/>
+            <a:ext cx="3337560" cy="3182112"/>
           </a:xfrm>
           <a:prstGeom prst="roundRect">
             <a:avLst/>
@@ -5251,7 +5604,7 @@
         </p:nvSpPr>
         <p:spPr>
           <a:xfrm>
-            <a:off x="804672" y="1920240"/>
+            <a:off x="804672" y="1828800"/>
             <a:ext cx="1152144" cy="256032"/>
           </a:xfrm>
           <a:prstGeom prst="roundRect">
@@ -5276,7 +5629,7 @@
         </p:nvSpPr>
         <p:spPr>
           <a:xfrm>
-            <a:off x="804672" y="1988820"/>
+            <a:off x="804672" y="1897380"/>
             <a:ext cx="1152144" cy="91440"/>
           </a:xfrm>
           <a:prstGeom prst="rect">
@@ -5317,7 +5670,7 @@
         </p:nvSpPr>
         <p:spPr>
           <a:xfrm>
-            <a:off x="822960" y="2331720"/>
+            <a:off x="822960" y="2240280"/>
             <a:ext cx="2971800" cy="256032"/>
           </a:xfrm>
           <a:prstGeom prst="rect">
@@ -5358,8 +5711,8 @@
         </p:nvSpPr>
         <p:spPr>
           <a:xfrm>
-            <a:off x="822960" y="2724912"/>
-            <a:ext cx="2971800" cy="1975104"/>
+            <a:off x="822960" y="2633472"/>
+            <a:ext cx="2971800" cy="2093976"/>
           </a:xfrm>
           <a:prstGeom prst="rect">
             <a:avLst/>
@@ -5399,8 +5752,8 @@
         </p:nvSpPr>
         <p:spPr>
           <a:xfrm>
-            <a:off x="4425696" y="1755648"/>
-            <a:ext cx="3337560" cy="3063240"/>
+            <a:off x="4425696" y="1664208"/>
+            <a:ext cx="3337560" cy="3182112"/>
           </a:xfrm>
           <a:prstGeom prst="roundRect">
             <a:avLst/>
@@ -5424,7 +5777,7 @@
         </p:nvSpPr>
         <p:spPr>
           <a:xfrm>
-            <a:off x="4590288" y="1920240"/>
+            <a:off x="4590288" y="1828800"/>
             <a:ext cx="1152144" cy="256032"/>
           </a:xfrm>
           <a:prstGeom prst="roundRect">
@@ -5449,7 +5802,7 @@
         </p:nvSpPr>
         <p:spPr>
           <a:xfrm>
-            <a:off x="4590288" y="1988820"/>
+            <a:off x="4590288" y="1897380"/>
             <a:ext cx="1152144" cy="91440"/>
           </a:xfrm>
           <a:prstGeom prst="rect">
@@ -5476,7 +5829,7 @@
                 <a:ea typeface="Apple SD Gothic Neo" pitchFamily="34" charset="-122"/>
                 <a:cs typeface="Apple SD Gothic Neo" pitchFamily="34" charset="-120"/>
               </a:rPr>
-              <a:t>고쳐 읽을 부분</a:t>
+              <a:t>RFC와 다른 부분</a:t>
             </a:r>
             <a:endParaRPr lang="en-US" sz="820" dirty="0"/>
           </a:p>
@@ -5490,7 +5843,7 @@
         </p:nvSpPr>
         <p:spPr>
           <a:xfrm>
-            <a:off x="4608576" y="2331720"/>
+            <a:off x="4608576" y="2240280"/>
             <a:ext cx="2971800" cy="256032"/>
           </a:xfrm>
           <a:prstGeom prst="rect">
@@ -5517,7 +5870,7 @@
                 <a:ea typeface="Apple SD Gothic Neo" pitchFamily="34" charset="-122"/>
                 <a:cs typeface="Apple SD Gothic Neo" pitchFamily="34" charset="-120"/>
               </a:rPr>
-              <a:t>표준 route와 다를 수 있다</a:t>
+              <a:t>표준 Background Check와 route가 다르다</a:t>
             </a:r>
             <a:endParaRPr lang="en-US" sz="1530" dirty="0"/>
           </a:p>
@@ -5531,8 +5884,8 @@
         </p:nvSpPr>
         <p:spPr>
           <a:xfrm>
-            <a:off x="4608576" y="2724912"/>
-            <a:ext cx="2971800" cy="1975104"/>
+            <a:off x="4608576" y="2633472"/>
+            <a:ext cx="2971800" cy="2093976"/>
           </a:xfrm>
           <a:prstGeom prst="rect">
             <a:avLst/>
@@ -5558,7 +5911,7 @@
                 <a:ea typeface="Apple SD Gothic Neo" pitchFamily="34" charset="-122"/>
                 <a:cs typeface="Apple SD Gothic Neo" pitchFamily="34" charset="-120"/>
               </a:rPr>
-              <a:t>Background Check과 aggregate graph가 전달 패턴을 섞을 수 있다. nonce·audience·expiry·workload Evidence는 first-class type으로 보완해야 한다.</a:t>
+              <a:t>RFC 9334 Background Check은 Attester→RP→Verifier다. Intel-rats는 Evidence 선등록 후 RP 조회를 쓰며 aggregate direct edge와 상세 Guest Agent route가 섞인다.</a:t>
             </a:r>
             <a:endParaRPr lang="en-US" sz="1230" dirty="0"/>
           </a:p>
@@ -5572,8 +5925,8 @@
         </p:nvSpPr>
         <p:spPr>
           <a:xfrm>
-            <a:off x="8211312" y="1755648"/>
-            <a:ext cx="3337560" cy="3063240"/>
+            <a:off x="8211312" y="1664208"/>
+            <a:ext cx="3337560" cy="3182112"/>
           </a:xfrm>
           <a:prstGeom prst="roundRect">
             <a:avLst/>
@@ -5597,7 +5950,7 @@
         </p:nvSpPr>
         <p:spPr>
           <a:xfrm>
-            <a:off x="8375904" y="1920240"/>
+            <a:off x="8375904" y="1828800"/>
             <a:ext cx="1152144" cy="256032"/>
           </a:xfrm>
           <a:prstGeom prst="roundRect">
@@ -5622,7 +5975,7 @@
         </p:nvSpPr>
         <p:spPr>
           <a:xfrm>
-            <a:off x="8375904" y="1988820"/>
+            <a:off x="8375904" y="1897380"/>
             <a:ext cx="1152144" cy="91440"/>
           </a:xfrm>
           <a:prstGeom prst="rect">
@@ -5649,7 +6002,7 @@
                 <a:ea typeface="Apple SD Gothic Neo" pitchFamily="34" charset="-122"/>
                 <a:cs typeface="Apple SD Gothic Neo" pitchFamily="34" charset="-120"/>
               </a:rPr>
-              <a:t>사용 결론</a:t>
+              <a:t>구현 한계</a:t>
             </a:r>
             <a:endParaRPr lang="en-US" sz="820" dirty="0"/>
           </a:p>
@@ -5663,7 +6016,7 @@
         </p:nvSpPr>
         <p:spPr>
           <a:xfrm>
-            <a:off x="8394192" y="2331720"/>
+            <a:off x="8394192" y="2240280"/>
             <a:ext cx="2971800" cy="256032"/>
           </a:xfrm>
           <a:prstGeom prst="rect">
@@ -5690,7 +6043,7 @@
                 <a:ea typeface="Apple SD Gothic Neo" pitchFamily="34" charset="-122"/>
                 <a:cs typeface="Apple SD Gothic Neo" pitchFamily="34" charset="-120"/>
               </a:rPr>
-              <a:t>학습과 설계 질문에는 사용한다</a:t>
+              <a:t>운영 구현이 빠져 있다</a:t>
             </a:r>
             <a:endParaRPr lang="en-US" sz="1530" dirty="0"/>
           </a:p>
@@ -5704,8 +6057,8 @@
         </p:nvSpPr>
         <p:spPr>
           <a:xfrm>
-            <a:off x="8394192" y="2724912"/>
-            <a:ext cx="2971800" cy="1975104"/>
+            <a:off x="8394192" y="2633472"/>
+            <a:ext cx="2971800" cy="2093976"/>
           </a:xfrm>
           <a:prstGeom prst="rect">
             <a:avLst/>
@@ -5731,7 +6084,7 @@
                 <a:ea typeface="Apple SD Gothic Neo" pitchFamily="34" charset="-122"/>
                 <a:cs typeface="Apple SD Gothic Neo" pitchFamily="34" charset="-120"/>
               </a:rPr>
-              <a:t>구현·security approval·runtime enforcement의 단독 근거로 쓰지 않는다. RFC 9334와 current Intel TDX/DCAP documentation으로 보완한다.</a:t>
+              <a:t>nonce·audience·expiry·workload Evidence가 first-class type이 아니고 concrete Quote/DCAP API/배포 코드/정책 언어가 없다. deny-without-key는 교육용 불변조건이지 runtime enforcement 보증이 아니다.</a:t>
             </a:r>
             <a:endParaRPr lang="en-US" sz="1230" dirty="0"/>
           </a:p>
@@ -5745,8 +6098,8 @@
         </p:nvSpPr>
         <p:spPr>
           <a:xfrm>
-            <a:off x="658368" y="5266944"/>
-            <a:ext cx="10835640" cy="566928"/>
+            <a:off x="658368" y="5230368"/>
+            <a:ext cx="10835640" cy="713232"/>
           </a:xfrm>
           <a:prstGeom prst="roundRect">
             <a:avLst/>
@@ -5770,7 +6123,7 @@
         </p:nvSpPr>
         <p:spPr>
           <a:xfrm>
-            <a:off x="822960" y="5431536"/>
+            <a:off x="822960" y="5394960"/>
             <a:ext cx="822960" cy="256032"/>
           </a:xfrm>
           <a:prstGeom prst="roundRect">
@@ -5795,7 +6148,7 @@
         </p:nvSpPr>
         <p:spPr>
           <a:xfrm>
-            <a:off x="822960" y="5500116"/>
+            <a:off x="822960" y="5463540"/>
             <a:ext cx="822960" cy="91440"/>
           </a:xfrm>
           <a:prstGeom prst="rect">
@@ -5836,8 +6189,8 @@
         </p:nvSpPr>
         <p:spPr>
           <a:xfrm>
-            <a:off x="1828800" y="5431536"/>
-            <a:ext cx="9482328" cy="365760"/>
+            <a:off x="1828800" y="5394960"/>
+            <a:ext cx="9482328" cy="512064"/>
           </a:xfrm>
           <a:prstGeom prst="rect">
             <a:avLst/>
@@ -5863,7 +6216,7 @@
                 <a:ea typeface="Apple SD Gothic Neo" pitchFamily="34" charset="-122"/>
                 <a:cs typeface="Apple SD Gothic Neo" pitchFamily="34" charset="-120"/>
               </a:rPr>
-              <a:t>Intel-rats를 볼 때는 “누가 Evidence를 평가하고, 누가 release policy를 소유하며, 어떤 binding과 failure state가 explicit한가”를 질문한다. 답이 없는 부분은 실제 deployment 설계에서 추가해야 한다.</a:t>
+              <a:t>Intel-rats는 “누가 Evidence를 평가하고, 누가 release policy를 소유하며, 어떤 binding과 failure state가 explicit한가”를 묻는 학습 도구다. 실제 deployment는 RFC 흐름·구현 API·정책 언어·운영 enforcement를 별도로 확정해야 한다.</a:t>
             </a:r>
             <a:endParaRPr lang="en-US" sz="1330" dirty="0"/>
           </a:p>
@@ -5927,7 +6280,7 @@
                 <a:ea typeface="Apple SD Gothic Neo" pitchFamily="34" charset="-122"/>
                 <a:cs typeface="Apple SD Gothic Neo" pitchFamily="34" charset="-120"/>
               </a:rPr>
-              <a:t>C-008 · caveats · project lens</a:t>
+              <a:t>C-008 · caveats · project lens · 〔S-001,S-002,S-010〕</a:t>
             </a:r>
             <a:endParaRPr lang="en-US" sz="780" dirty="0"/>
           </a:p>
@@ -5968,7 +6321,7 @@
                 <a:ea typeface="Apple SD Gothic Neo" pitchFamily="34" charset="-122"/>
                 <a:cs typeface="Apple SD Gothic Neo" pitchFamily="34" charset="-120"/>
               </a:rPr>
-              <a:t>Sources: RFC 9334 · Intel DCAP / TDX documentation</a:t>
+              <a:t>Source markers: 〔S-…〕 · Appendix 16</a:t>
             </a:r>
             <a:endParaRPr lang="en-US" sz="780" dirty="0"/>
           </a:p>
@@ -6706,7 +7059,7 @@
                 <a:ea typeface="Apple SD Gothic Neo" pitchFamily="34" charset="-122"/>
                 <a:cs typeface="Apple SD Gothic Neo" pitchFamily="34" charset="-120"/>
               </a:rPr>
-              <a:t>Sources: RFC 9334 · Intel DCAP / TDX documentation</a:t>
+              <a:t>Source markers: 〔S-…〕 · Appendix 16</a:t>
             </a:r>
             <a:endParaRPr lang="en-US" sz="780" dirty="0"/>
           </a:p>
@@ -6875,8 +7228,8 @@
         </p:nvSpPr>
         <p:spPr>
           <a:xfrm>
-            <a:off x="566928" y="1481328"/>
-            <a:ext cx="5349240" cy="1481328"/>
+            <a:off x="566928" y="1417320"/>
+            <a:ext cx="5349240" cy="1371600"/>
           </a:xfrm>
           <a:prstGeom prst="roundRect">
             <a:avLst/>
@@ -6900,7 +7253,7 @@
         </p:nvSpPr>
         <p:spPr>
           <a:xfrm>
-            <a:off x="749808" y="1691640"/>
+            <a:off x="749808" y="1627632"/>
             <a:ext cx="4983480" cy="256032"/>
           </a:xfrm>
           <a:prstGeom prst="rect">
@@ -6941,8 +7294,8 @@
         </p:nvSpPr>
         <p:spPr>
           <a:xfrm>
-            <a:off x="749808" y="2084832"/>
-            <a:ext cx="4983480" cy="758952"/>
+            <a:off x="749808" y="2020824"/>
+            <a:ext cx="4983480" cy="649224"/>
           </a:xfrm>
           <a:prstGeom prst="rect">
             <a:avLst/>
@@ -6982,8 +7335,8 @@
         </p:nvSpPr>
         <p:spPr>
           <a:xfrm>
-            <a:off x="6190488" y="1481328"/>
-            <a:ext cx="5349240" cy="1481328"/>
+            <a:off x="6190488" y="1417320"/>
+            <a:ext cx="5349240" cy="1371600"/>
           </a:xfrm>
           <a:prstGeom prst="roundRect">
             <a:avLst/>
@@ -7007,7 +7360,7 @@
         </p:nvSpPr>
         <p:spPr>
           <a:xfrm>
-            <a:off x="6373368" y="1691640"/>
+            <a:off x="6373368" y="1627632"/>
             <a:ext cx="4983480" cy="256032"/>
           </a:xfrm>
           <a:prstGeom prst="rect">
@@ -7048,8 +7401,8 @@
         </p:nvSpPr>
         <p:spPr>
           <a:xfrm>
-            <a:off x="6373368" y="2084832"/>
-            <a:ext cx="4983480" cy="758952"/>
+            <a:off x="6373368" y="2020824"/>
+            <a:ext cx="4983480" cy="649224"/>
           </a:xfrm>
           <a:prstGeom prst="rect">
             <a:avLst/>
@@ -7089,8 +7442,8 @@
         </p:nvSpPr>
         <p:spPr>
           <a:xfrm>
-            <a:off x="566928" y="3364992"/>
-            <a:ext cx="5349240" cy="1481328"/>
+            <a:off x="566928" y="3154680"/>
+            <a:ext cx="5349240" cy="1371600"/>
           </a:xfrm>
           <a:prstGeom prst="roundRect">
             <a:avLst/>
@@ -7114,7 +7467,7 @@
         </p:nvSpPr>
         <p:spPr>
           <a:xfrm>
-            <a:off x="749808" y="3575304"/>
+            <a:off x="749808" y="3364992"/>
             <a:ext cx="4983480" cy="256032"/>
           </a:xfrm>
           <a:prstGeom prst="rect">
@@ -7155,8 +7508,8 @@
         </p:nvSpPr>
         <p:spPr>
           <a:xfrm>
-            <a:off x="749808" y="3968496"/>
-            <a:ext cx="4983480" cy="758952"/>
+            <a:off x="749808" y="3758184"/>
+            <a:ext cx="4983480" cy="649224"/>
           </a:xfrm>
           <a:prstGeom prst="rect">
             <a:avLst/>
@@ -7196,8 +7549,8 @@
         </p:nvSpPr>
         <p:spPr>
           <a:xfrm>
-            <a:off x="6190488" y="3364992"/>
-            <a:ext cx="5349240" cy="1481328"/>
+            <a:off x="6190488" y="3154680"/>
+            <a:ext cx="5349240" cy="1371600"/>
           </a:xfrm>
           <a:prstGeom prst="roundRect">
             <a:avLst/>
@@ -7221,7 +7574,7 @@
         </p:nvSpPr>
         <p:spPr>
           <a:xfrm>
-            <a:off x="6373368" y="3575304"/>
+            <a:off x="6373368" y="3364992"/>
             <a:ext cx="4983480" cy="256032"/>
           </a:xfrm>
           <a:prstGeom prst="rect">
@@ -7262,8 +7615,8 @@
         </p:nvSpPr>
         <p:spPr>
           <a:xfrm>
-            <a:off x="6373368" y="3968496"/>
-            <a:ext cx="4983480" cy="758952"/>
+            <a:off x="6373368" y="3758184"/>
+            <a:ext cx="4983480" cy="649224"/>
           </a:xfrm>
           <a:prstGeom prst="rect">
             <a:avLst/>
@@ -7303,8 +7656,8 @@
         </p:nvSpPr>
         <p:spPr>
           <a:xfrm>
-            <a:off x="658368" y="5413248"/>
-            <a:ext cx="10835640" cy="566928"/>
+            <a:off x="658368" y="4736592"/>
+            <a:ext cx="2029968" cy="1325880"/>
           </a:xfrm>
           <a:prstGeom prst="roundRect">
             <a:avLst/>
@@ -7322,24 +7675,123 @@
       </p:sp>
       <p:sp>
         <p:nvSpPr>
-          <p:cNvPr id="18" name="Shape 16"/>
-          <p:cNvSpPr/>
-          <p:nvPr/>
-        </p:nvSpPr>
-        <p:spPr>
-          <a:xfrm>
-            <a:off x="822960" y="5577840"/>
-            <a:ext cx="822960" cy="256032"/>
+          <p:cNvPr id="18" name="Text 16"/>
+          <p:cNvSpPr/>
+          <p:nvPr/>
+        </p:nvSpPr>
+        <p:spPr>
+          <a:xfrm>
+            <a:off x="804672" y="4956048"/>
+            <a:ext cx="1737360" cy="146304"/>
+          </a:xfrm>
+          <a:prstGeom prst="rect">
+            <a:avLst/>
+          </a:prstGeom>
+          <a:noFill/>
+          <a:ln/>
+        </p:spPr>
+        <p:txBody>
+          <a:bodyPr wrap="square" lIns="0" tIns="0" rIns="0" bIns="0" rtlCol="0" anchor="ctr">
+            <a:normAutofit/>
+          </a:bodyPr>
+          <a:lstStyle/>
+          <a:p>
+            <a:pPr algn="ctr" indent="0" marL="0">
+              <a:buNone/>
+            </a:pPr>
+            <a:r>
+              <a:rPr lang="en-US" sz="1080" b="1" dirty="0">
+                <a:solidFill>
+                  <a:srgbClr val="14804A"/>
+                </a:solidFill>
+                <a:latin typeface="Apple SD Gothic Neo" pitchFamily="34" charset="0"/>
+                <a:ea typeface="Apple SD Gothic Neo" pitchFamily="34" charset="-122"/>
+                <a:cs typeface="Apple SD Gothic Neo" pitchFamily="34" charset="-120"/>
+              </a:rPr>
+              <a:t>① terminal 1회</a:t>
+            </a:r>
+            <a:endParaRPr lang="en-US" sz="1080" dirty="0"/>
+          </a:p>
+        </p:txBody>
+      </p:sp>
+      <p:sp>
+        <p:nvSpPr>
+          <p:cNvPr id="19" name="Text 17"/>
+          <p:cNvSpPr/>
+          <p:nvPr/>
+        </p:nvSpPr>
+        <p:spPr>
+          <a:xfrm>
+            <a:off x="786384" y="5358384"/>
+            <a:ext cx="1773936" cy="365760"/>
+          </a:xfrm>
+          <a:prstGeom prst="rect">
+            <a:avLst/>
+          </a:prstGeom>
+          <a:noFill/>
+          <a:ln/>
+        </p:spPr>
+        <p:txBody>
+          <a:bodyPr wrap="square" lIns="127" tIns="127" rIns="127" bIns="127" rtlCol="0" anchor="ctr">
+            <a:normAutofit/>
+          </a:bodyPr>
+          <a:lstStyle/>
+          <a:p>
+            <a:pPr algn="ctr" indent="0" marL="0">
+              <a:buNone/>
+            </a:pPr>
+            <a:r>
+              <a:rPr lang="en-US" sz="1010" dirty="0">
+                <a:solidFill>
+                  <a:srgbClr val="14804A"/>
+                </a:solidFill>
+                <a:latin typeface="Apple SD Gothic Neo" pitchFamily="34" charset="0"/>
+                <a:ea typeface="Apple SD Gothic Neo" pitchFamily="34" charset="-122"/>
+                <a:cs typeface="Apple SD Gothic Neo" pitchFamily="34" charset="-120"/>
+              </a:rPr>
+              <a:t>allow·deny·expiry</a:t>
+            </a:r>
+            <a:endParaRPr lang="en-US" sz="1010" dirty="0"/>
+          </a:p>
+          <a:p>
+            <a:pPr algn="ctr" indent="0" marL="0">
+              <a:buNone/>
+            </a:pPr>
+            <a:r>
+              <a:rPr lang="en-US" sz="1010" dirty="0">
+                <a:solidFill>
+                  <a:srgbClr val="14804A"/>
+                </a:solidFill>
+                <a:latin typeface="Apple SD Gothic Neo" pitchFamily="34" charset="0"/>
+                <a:ea typeface="Apple SD Gothic Neo" pitchFamily="34" charset="-122"/>
+                <a:cs typeface="Apple SD Gothic Neo" pitchFamily="34" charset="-120"/>
+              </a:rPr>
+              <a:t>요청은 한 번만 소비</a:t>
+            </a:r>
+            <a:endParaRPr lang="en-US" sz="1010" dirty="0"/>
+          </a:p>
+        </p:txBody>
+      </p:sp>
+      <p:sp>
+        <p:nvSpPr>
+          <p:cNvPr id="20" name="Shape 18"/>
+          <p:cNvSpPr/>
+          <p:nvPr/>
+        </p:nvSpPr>
+        <p:spPr>
+          <a:xfrm>
+            <a:off x="2852928" y="4736592"/>
+            <a:ext cx="2029968" cy="1325880"/>
           </a:xfrm>
           <a:prstGeom prst="roundRect">
             <a:avLst/>
           </a:prstGeom>
           <a:solidFill>
-            <a:srgbClr val="14804A"/>
+            <a:srgbClr val="EAF7EF"/>
           </a:solidFill>
           <a:ln w="8890">
             <a:solidFill>
-              <a:srgbClr val="14804A"/>
+              <a:srgbClr val="EAF7EF"/>
             </a:solidFill>
             <a:prstDash val="solid"/>
           </a:ln>
@@ -7347,14 +7799,14 @@
       </p:sp>
       <p:sp>
         <p:nvSpPr>
-          <p:cNvPr id="19" name="Text 17"/>
-          <p:cNvSpPr/>
-          <p:nvPr/>
-        </p:nvSpPr>
-        <p:spPr>
-          <a:xfrm>
-            <a:off x="822960" y="5646420"/>
-            <a:ext cx="822960" cy="91440"/>
+          <p:cNvPr id="21" name="Text 19"/>
+          <p:cNvSpPr/>
+          <p:nvPr/>
+        </p:nvSpPr>
+        <p:spPr>
+          <a:xfrm>
+            <a:off x="2999232" y="4956048"/>
+            <a:ext cx="1737360" cy="146304"/>
           </a:xfrm>
           <a:prstGeom prst="rect">
             <a:avLst/>
@@ -7372,48 +7824,7 @@
               <a:buNone/>
             </a:pPr>
             <a:r>
-              <a:rPr lang="en-US" sz="820" b="1" dirty="0">
-                <a:solidFill>
-                  <a:srgbClr val="FFFFFF"/>
-                </a:solidFill>
-                <a:latin typeface="Apple SD Gothic Neo" pitchFamily="34" charset="0"/>
-                <a:ea typeface="Apple SD Gothic Neo" pitchFamily="34" charset="-122"/>
-                <a:cs typeface="Apple SD Gothic Neo" pitchFamily="34" charset="-120"/>
-              </a:rPr>
-              <a:t>출시 gate</a:t>
-            </a:r>
-            <a:endParaRPr lang="en-US" sz="820" dirty="0"/>
-          </a:p>
-        </p:txBody>
-      </p:sp>
-      <p:sp>
-        <p:nvSpPr>
-          <p:cNvPr id="20" name="Text 18"/>
-          <p:cNvSpPr/>
-          <p:nvPr/>
-        </p:nvSpPr>
-        <p:spPr>
-          <a:xfrm>
-            <a:off x="1828800" y="5577840"/>
-            <a:ext cx="9482328" cy="365760"/>
-          </a:xfrm>
-          <a:prstGeom prst="rect">
-            <a:avLst/>
-          </a:prstGeom>
-          <a:noFill/>
-          <a:ln/>
-        </p:spPr>
-        <p:txBody>
-          <a:bodyPr wrap="square" lIns="0" tIns="0" rIns="0" bIns="0" rtlCol="0" anchor="ctr">
-            <a:normAutofit/>
-          </a:bodyPr>
-          <a:lstStyle/>
-          <a:p>
-            <a:pPr indent="0" marL="0">
-              <a:buNone/>
-            </a:pPr>
-            <a:r>
-              <a:rPr lang="en-US" sz="1330" dirty="0">
+              <a:rPr lang="en-US" sz="1080" b="1" dirty="0">
                 <a:solidFill>
                   <a:srgbClr val="14804A"/>
                 </a:solidFill>
@@ -7421,15 +7832,486 @@
                 <a:ea typeface="Apple SD Gothic Neo" pitchFamily="34" charset="-122"/>
                 <a:cs typeface="Apple SD Gothic Neo" pitchFamily="34" charset="-120"/>
               </a:rPr>
-              <a:t>첫 pilot은 가치가 높고 회수 가능한 단일 key-release path로 제한한다. forged Quote·nonce replay·key substitution·Verifier/PCCS failure에서 공개된 key는 0개여야 한다.</a:t>
-            </a:r>
-            <a:endParaRPr lang="en-US" sz="1330" dirty="0"/>
-          </a:p>
-        </p:txBody>
-      </p:sp>
-      <p:sp>
-        <p:nvSpPr>
-          <p:cNvPr id="21" name="Shape 19"/>
+              <a:t>② numeric SLO</a:t>
+            </a:r>
+            <a:endParaRPr lang="en-US" sz="1080" dirty="0"/>
+          </a:p>
+        </p:txBody>
+      </p:sp>
+      <p:sp>
+        <p:nvSpPr>
+          <p:cNvPr id="22" name="Text 20"/>
+          <p:cNvSpPr/>
+          <p:nvPr/>
+        </p:nvSpPr>
+        <p:spPr>
+          <a:xfrm>
+            <a:off x="2980944" y="5358384"/>
+            <a:ext cx="1773936" cy="365760"/>
+          </a:xfrm>
+          <a:prstGeom prst="rect">
+            <a:avLst/>
+          </a:prstGeom>
+          <a:noFill/>
+          <a:ln/>
+        </p:spPr>
+        <p:txBody>
+          <a:bodyPr wrap="square" lIns="127" tIns="127" rIns="127" bIns="127" rtlCol="0" anchor="ctr">
+            <a:normAutofit/>
+          </a:bodyPr>
+          <a:lstStyle/>
+          <a:p>
+            <a:pPr algn="ctr" indent="0" marL="0">
+              <a:buNone/>
+            </a:pPr>
+            <a:r>
+              <a:rPr lang="en-US" sz="1010" dirty="0">
+                <a:solidFill>
+                  <a:srgbClr val="14804A"/>
+                </a:solidFill>
+                <a:latin typeface="Apple SD Gothic Neo" pitchFamily="34" charset="0"/>
+                <a:ea typeface="Apple SD Gothic Neo" pitchFamily="34" charset="-122"/>
+                <a:cs typeface="Apple SD Gothic Neo" pitchFamily="34" charset="-120"/>
+              </a:rPr>
+              <a:t>outage·skew·revoke</a:t>
+            </a:r>
+            <a:endParaRPr lang="en-US" sz="1010" dirty="0"/>
+          </a:p>
+          <a:p>
+            <a:pPr algn="ctr" indent="0" marL="0">
+              <a:buNone/>
+            </a:pPr>
+            <a:r>
+              <a:rPr lang="en-US" sz="1010" dirty="0">
+                <a:solidFill>
+                  <a:srgbClr val="14804A"/>
+                </a:solidFill>
+                <a:latin typeface="Apple SD Gothic Neo" pitchFamily="34" charset="0"/>
+                <a:ea typeface="Apple SD Gothic Neo" pitchFamily="34" charset="-122"/>
+                <a:cs typeface="Apple SD Gothic Neo" pitchFamily="34" charset="-120"/>
+              </a:rPr>
+              <a:t>re-attestation</a:t>
+            </a:r>
+            <a:endParaRPr lang="en-US" sz="1010" dirty="0"/>
+          </a:p>
+        </p:txBody>
+      </p:sp>
+      <p:sp>
+        <p:nvSpPr>
+          <p:cNvPr id="23" name="Shape 21"/>
+          <p:cNvSpPr/>
+          <p:nvPr/>
+        </p:nvSpPr>
+        <p:spPr>
+          <a:xfrm>
+            <a:off x="5047488" y="4736592"/>
+            <a:ext cx="2029968" cy="1325880"/>
+          </a:xfrm>
+          <a:prstGeom prst="roundRect">
+            <a:avLst/>
+          </a:prstGeom>
+          <a:solidFill>
+            <a:srgbClr val="EAF7EF"/>
+          </a:solidFill>
+          <a:ln w="8890">
+            <a:solidFill>
+              <a:srgbClr val="EAF7EF"/>
+            </a:solidFill>
+            <a:prstDash val="solid"/>
+          </a:ln>
+        </p:spPr>
+      </p:sp>
+      <p:sp>
+        <p:nvSpPr>
+          <p:cNvPr id="24" name="Text 22"/>
+          <p:cNvSpPr/>
+          <p:nvPr/>
+        </p:nvSpPr>
+        <p:spPr>
+          <a:xfrm>
+            <a:off x="5193792" y="4956048"/>
+            <a:ext cx="1737360" cy="146304"/>
+          </a:xfrm>
+          <a:prstGeom prst="rect">
+            <a:avLst/>
+          </a:prstGeom>
+          <a:noFill/>
+          <a:ln/>
+        </p:spPr>
+        <p:txBody>
+          <a:bodyPr wrap="square" lIns="0" tIns="0" rIns="0" bIns="0" rtlCol="0" anchor="ctr">
+            <a:normAutofit/>
+          </a:bodyPr>
+          <a:lstStyle/>
+          <a:p>
+            <a:pPr algn="ctr" indent="0" marL="0">
+              <a:buNone/>
+            </a:pPr>
+            <a:r>
+              <a:rPr lang="en-US" sz="1080" b="1" dirty="0">
+                <a:solidFill>
+                  <a:srgbClr val="14804A"/>
+                </a:solidFill>
+                <a:latin typeface="Apple SD Gothic Neo" pitchFamily="34" charset="0"/>
+                <a:ea typeface="Apple SD Gothic Neo" pitchFamily="34" charset="-122"/>
+                <a:cs typeface="Apple SD Gothic Neo" pitchFamily="34" charset="-120"/>
+              </a:rPr>
+              <a:t>③ policy audit</a:t>
+            </a:r>
+            <a:endParaRPr lang="en-US" sz="1080" dirty="0"/>
+          </a:p>
+        </p:txBody>
+      </p:sp>
+      <p:sp>
+        <p:nvSpPr>
+          <p:cNvPr id="25" name="Text 23"/>
+          <p:cNvSpPr/>
+          <p:nvPr/>
+        </p:nvSpPr>
+        <p:spPr>
+          <a:xfrm>
+            <a:off x="5175504" y="5358384"/>
+            <a:ext cx="1773936" cy="365760"/>
+          </a:xfrm>
+          <a:prstGeom prst="rect">
+            <a:avLst/>
+          </a:prstGeom>
+          <a:noFill/>
+          <a:ln/>
+        </p:spPr>
+        <p:txBody>
+          <a:bodyPr wrap="square" lIns="127" tIns="127" rIns="127" bIns="127" rtlCol="0" anchor="ctr">
+            <a:normAutofit/>
+          </a:bodyPr>
+          <a:lstStyle/>
+          <a:p>
+            <a:pPr algn="ctr" indent="0" marL="0">
+              <a:buNone/>
+            </a:pPr>
+            <a:r>
+              <a:rPr lang="en-US" sz="1010" dirty="0">
+                <a:solidFill>
+                  <a:srgbClr val="14804A"/>
+                </a:solidFill>
+                <a:latin typeface="Apple SD Gothic Neo" pitchFamily="34" charset="0"/>
+                <a:ea typeface="Apple SD Gothic Neo" pitchFamily="34" charset="-122"/>
+                <a:cs typeface="Apple SD Gothic Neo" pitchFamily="34" charset="-120"/>
+              </a:rPr>
+              <a:t>version + approver</a:t>
+            </a:r>
+            <a:endParaRPr lang="en-US" sz="1010" dirty="0"/>
+          </a:p>
+          <a:p>
+            <a:pPr algn="ctr" indent="0" marL="0">
+              <a:buNone/>
+            </a:pPr>
+            <a:r>
+              <a:rPr lang="en-US" sz="1010" dirty="0">
+                <a:solidFill>
+                  <a:srgbClr val="14804A"/>
+                </a:solidFill>
+                <a:latin typeface="Apple SD Gothic Neo" pitchFamily="34" charset="0"/>
+                <a:ea typeface="Apple SD Gothic Neo" pitchFamily="34" charset="-122"/>
+                <a:cs typeface="Apple SD Gothic Neo" pitchFamily="34" charset="-120"/>
+              </a:rPr>
+              <a:t>감사 가능</a:t>
+            </a:r>
+            <a:endParaRPr lang="en-US" sz="1010" dirty="0"/>
+          </a:p>
+        </p:txBody>
+      </p:sp>
+      <p:sp>
+        <p:nvSpPr>
+          <p:cNvPr id="26" name="Shape 24"/>
+          <p:cNvSpPr/>
+          <p:nvPr/>
+        </p:nvSpPr>
+        <p:spPr>
+          <a:xfrm>
+            <a:off x="7242048" y="4736592"/>
+            <a:ext cx="2029968" cy="1325880"/>
+          </a:xfrm>
+          <a:prstGeom prst="roundRect">
+            <a:avLst/>
+          </a:prstGeom>
+          <a:solidFill>
+            <a:srgbClr val="EAF7EF"/>
+          </a:solidFill>
+          <a:ln w="8890">
+            <a:solidFill>
+              <a:srgbClr val="EAF7EF"/>
+            </a:solidFill>
+            <a:prstDash val="solid"/>
+          </a:ln>
+        </p:spPr>
+      </p:sp>
+      <p:sp>
+        <p:nvSpPr>
+          <p:cNvPr id="27" name="Text 25"/>
+          <p:cNvSpPr/>
+          <p:nvPr/>
+        </p:nvSpPr>
+        <p:spPr>
+          <a:xfrm>
+            <a:off x="7388352" y="4956048"/>
+            <a:ext cx="1737360" cy="146304"/>
+          </a:xfrm>
+          <a:prstGeom prst="rect">
+            <a:avLst/>
+          </a:prstGeom>
+          <a:noFill/>
+          <a:ln/>
+        </p:spPr>
+        <p:txBody>
+          <a:bodyPr wrap="square" lIns="0" tIns="0" rIns="0" bIns="0" rtlCol="0" anchor="ctr">
+            <a:normAutofit/>
+          </a:bodyPr>
+          <a:lstStyle/>
+          <a:p>
+            <a:pPr algn="ctr" indent="0" marL="0">
+              <a:buNone/>
+            </a:pPr>
+            <a:r>
+              <a:rPr lang="en-US" sz="1080" b="1" dirty="0">
+                <a:solidFill>
+                  <a:srgbClr val="14804A"/>
+                </a:solidFill>
+                <a:latin typeface="Apple SD Gothic Neo" pitchFamily="34" charset="0"/>
+                <a:ea typeface="Apple SD Gothic Neo" pitchFamily="34" charset="-122"/>
+                <a:cs typeface="Apple SD Gothic Neo" pitchFamily="34" charset="-120"/>
+              </a:rPr>
+              <a:t>④ key rotation</a:t>
+            </a:r>
+            <a:endParaRPr lang="en-US" sz="1080" dirty="0"/>
+          </a:p>
+        </p:txBody>
+      </p:sp>
+      <p:sp>
+        <p:nvSpPr>
+          <p:cNvPr id="28" name="Text 26"/>
+          <p:cNvSpPr/>
+          <p:nvPr/>
+        </p:nvSpPr>
+        <p:spPr>
+          <a:xfrm>
+            <a:off x="7370064" y="5358384"/>
+            <a:ext cx="1773936" cy="365760"/>
+          </a:xfrm>
+          <a:prstGeom prst="rect">
+            <a:avLst/>
+          </a:prstGeom>
+          <a:noFill/>
+          <a:ln/>
+        </p:spPr>
+        <p:txBody>
+          <a:bodyPr wrap="square" lIns="127" tIns="127" rIns="127" bIns="127" rtlCol="0" anchor="ctr">
+            <a:normAutofit/>
+          </a:bodyPr>
+          <a:lstStyle/>
+          <a:p>
+            <a:pPr algn="ctr" indent="0" marL="0">
+              <a:buNone/>
+            </a:pPr>
+            <a:r>
+              <a:rPr lang="en-US" sz="1010" dirty="0">
+                <a:solidFill>
+                  <a:srgbClr val="14804A"/>
+                </a:solidFill>
+                <a:latin typeface="Apple SD Gothic Neo" pitchFamily="34" charset="0"/>
+                <a:ea typeface="Apple SD Gothic Neo" pitchFamily="34" charset="-122"/>
+                <a:cs typeface="Apple SD Gothic Neo" pitchFamily="34" charset="-120"/>
+              </a:rPr>
+              <a:t>revoke·rollback</a:t>
+            </a:r>
+            <a:endParaRPr lang="en-US" sz="1010" dirty="0"/>
+          </a:p>
+          <a:p>
+            <a:pPr algn="ctr" indent="0" marL="0">
+              <a:buNone/>
+            </a:pPr>
+            <a:r>
+              <a:rPr lang="en-US" sz="1010" dirty="0">
+                <a:solidFill>
+                  <a:srgbClr val="14804A"/>
+                </a:solidFill>
+                <a:latin typeface="Apple SD Gothic Neo" pitchFamily="34" charset="0"/>
+                <a:ea typeface="Apple SD Gothic Neo" pitchFamily="34" charset="-122"/>
+                <a:cs typeface="Apple SD Gothic Neo" pitchFamily="34" charset="-120"/>
+              </a:rPr>
+              <a:t>리허설</a:t>
+            </a:r>
+            <a:endParaRPr lang="en-US" sz="1010" dirty="0"/>
+          </a:p>
+        </p:txBody>
+      </p:sp>
+      <p:sp>
+        <p:nvSpPr>
+          <p:cNvPr id="29" name="Shape 27"/>
+          <p:cNvSpPr/>
+          <p:nvPr/>
+        </p:nvSpPr>
+        <p:spPr>
+          <a:xfrm>
+            <a:off x="9436608" y="4736592"/>
+            <a:ext cx="2029968" cy="1325880"/>
+          </a:xfrm>
+          <a:prstGeom prst="roundRect">
+            <a:avLst/>
+          </a:prstGeom>
+          <a:solidFill>
+            <a:srgbClr val="EAF7EF"/>
+          </a:solidFill>
+          <a:ln w="8890">
+            <a:solidFill>
+              <a:srgbClr val="EAF7EF"/>
+            </a:solidFill>
+            <a:prstDash val="solid"/>
+          </a:ln>
+        </p:spPr>
+      </p:sp>
+      <p:sp>
+        <p:nvSpPr>
+          <p:cNvPr id="30" name="Text 28"/>
+          <p:cNvSpPr/>
+          <p:nvPr/>
+        </p:nvSpPr>
+        <p:spPr>
+          <a:xfrm>
+            <a:off x="9582912" y="4956048"/>
+            <a:ext cx="1737360" cy="146304"/>
+          </a:xfrm>
+          <a:prstGeom prst="rect">
+            <a:avLst/>
+          </a:prstGeom>
+          <a:noFill/>
+          <a:ln/>
+        </p:spPr>
+        <p:txBody>
+          <a:bodyPr wrap="square" lIns="0" tIns="0" rIns="0" bIns="0" rtlCol="0" anchor="ctr">
+            <a:normAutofit/>
+          </a:bodyPr>
+          <a:lstStyle/>
+          <a:p>
+            <a:pPr algn="ctr" indent="0" marL="0">
+              <a:buNone/>
+            </a:pPr>
+            <a:r>
+              <a:rPr lang="en-US" sz="1080" b="1" dirty="0">
+                <a:solidFill>
+                  <a:srgbClr val="14804A"/>
+                </a:solidFill>
+                <a:latin typeface="Apple SD Gothic Neo" pitchFamily="34" charset="0"/>
+                <a:ea typeface="Apple SD Gothic Neo" pitchFamily="34" charset="-122"/>
+                <a:cs typeface="Apple SD Gothic Neo" pitchFamily="34" charset="-120"/>
+              </a:rPr>
+              <a:t>⑤ 공개 key 0</a:t>
+            </a:r>
+            <a:endParaRPr lang="en-US" sz="1080" dirty="0"/>
+          </a:p>
+        </p:txBody>
+      </p:sp>
+      <p:sp>
+        <p:nvSpPr>
+          <p:cNvPr id="31" name="Text 29"/>
+          <p:cNvSpPr/>
+          <p:nvPr/>
+        </p:nvSpPr>
+        <p:spPr>
+          <a:xfrm>
+            <a:off x="9564624" y="5358384"/>
+            <a:ext cx="1773936" cy="365760"/>
+          </a:xfrm>
+          <a:prstGeom prst="rect">
+            <a:avLst/>
+          </a:prstGeom>
+          <a:noFill/>
+          <a:ln/>
+        </p:spPr>
+        <p:txBody>
+          <a:bodyPr wrap="square" lIns="127" tIns="127" rIns="127" bIns="127" rtlCol="0" anchor="ctr">
+            <a:normAutofit/>
+          </a:bodyPr>
+          <a:lstStyle/>
+          <a:p>
+            <a:pPr algn="ctr" indent="0" marL="0">
+              <a:buNone/>
+            </a:pPr>
+            <a:r>
+              <a:rPr lang="en-US" sz="1010" dirty="0">
+                <a:solidFill>
+                  <a:srgbClr val="14804A"/>
+                </a:solidFill>
+                <a:latin typeface="Apple SD Gothic Neo" pitchFamily="34" charset="0"/>
+                <a:ea typeface="Apple SD Gothic Neo" pitchFamily="34" charset="-122"/>
+                <a:cs typeface="Apple SD Gothic Neo" pitchFamily="34" charset="-120"/>
+              </a:rPr>
+              <a:t>forged·replay·substitute</a:t>
+            </a:r>
+            <a:endParaRPr lang="en-US" sz="1010" dirty="0"/>
+          </a:p>
+          <a:p>
+            <a:pPr algn="ctr" indent="0" marL="0">
+              <a:buNone/>
+            </a:pPr>
+            <a:r>
+              <a:rPr lang="en-US" sz="1010" dirty="0">
+                <a:solidFill>
+                  <a:srgbClr val="14804A"/>
+                </a:solidFill>
+                <a:latin typeface="Apple SD Gothic Neo" pitchFamily="34" charset="0"/>
+                <a:ea typeface="Apple SD Gothic Neo" pitchFamily="34" charset="-122"/>
+                <a:cs typeface="Apple SD Gothic Neo" pitchFamily="34" charset="-120"/>
+              </a:rPr>
+              <a:t>Verifier/PCCS failure</a:t>
+            </a:r>
+            <a:endParaRPr lang="en-US" sz="1010" dirty="0"/>
+          </a:p>
+        </p:txBody>
+      </p:sp>
+      <p:sp>
+        <p:nvSpPr>
+          <p:cNvPr id="32" name="Text 30"/>
+          <p:cNvSpPr/>
+          <p:nvPr/>
+        </p:nvSpPr>
+        <p:spPr>
+          <a:xfrm>
+            <a:off x="786384" y="4562856"/>
+            <a:ext cx="10561320" cy="164592"/>
+          </a:xfrm>
+          <a:prstGeom prst="rect">
+            <a:avLst/>
+          </a:prstGeom>
+          <a:noFill/>
+          <a:ln/>
+        </p:spPr>
+        <p:txBody>
+          <a:bodyPr wrap="square" lIns="0" tIns="0" rIns="0" bIns="0" rtlCol="0" anchor="ctr">
+            <a:normAutofit/>
+          </a:bodyPr>
+          <a:lstStyle/>
+          <a:p>
+            <a:pPr algn="l" indent="0" marL="0">
+              <a:buNone/>
+            </a:pPr>
+            <a:r>
+              <a:rPr lang="en-US" sz="1070" b="1" dirty="0">
+                <a:solidFill>
+                  <a:srgbClr val="14804A"/>
+                </a:solidFill>
+                <a:latin typeface="Apple SD Gothic Neo" pitchFamily="34" charset="0"/>
+                <a:ea typeface="Apple SD Gothic Neo" pitchFamily="34" charset="-122"/>
+                <a:cs typeface="Apple SD Gothic Neo" pitchFamily="34" charset="-120"/>
+              </a:rPr>
+              <a:t>출시 gate: 단일 revocable key-release path는 다섯 조건이 모두 닫힌 뒤에만 연다.</a:t>
+            </a:r>
+            <a:endParaRPr lang="en-US" sz="1070" dirty="0"/>
+          </a:p>
+        </p:txBody>
+      </p:sp>
+      <p:sp>
+        <p:nvSpPr>
+          <p:cNvPr id="33" name="Shape 31"/>
           <p:cNvSpPr/>
           <p:nvPr/>
         </p:nvSpPr>
@@ -7452,7 +8334,7 @@
       </p:sp>
       <p:sp>
         <p:nvSpPr>
-          <p:cNvPr id="22" name="Text 20"/>
+          <p:cNvPr id="34" name="Text 32"/>
           <p:cNvSpPr/>
           <p:nvPr/>
         </p:nvSpPr>
@@ -7485,7 +8367,7 @@
                 <a:ea typeface="Apple SD Gothic Neo" pitchFamily="34" charset="-122"/>
                 <a:cs typeface="Apple SD Gothic Neo" pitchFamily="34" charset="-120"/>
               </a:rPr>
-              <a:t>C-010 · N-001 · E-001/E-002 · developer/executive implications</a:t>
+              <a:t>C-010 · N-001 · E-001/E-002 · developer/executive implications · 〔S-002,S-003,S-007,S-010,S-011〕</a:t>
             </a:r>
             <a:endParaRPr lang="en-US" sz="780" dirty="0"/>
           </a:p>
@@ -7493,7 +8375,7 @@
       </p:sp>
       <p:sp>
         <p:nvSpPr>
-          <p:cNvPr id="23" name="Text 21"/>
+          <p:cNvPr id="35" name="Text 33"/>
           <p:cNvSpPr/>
           <p:nvPr/>
         </p:nvSpPr>
@@ -7526,7 +8408,7 @@
                 <a:ea typeface="Apple SD Gothic Neo" pitchFamily="34" charset="-122"/>
                 <a:cs typeface="Apple SD Gothic Neo" pitchFamily="34" charset="-120"/>
               </a:rPr>
-              <a:t>Sources: RFC 9334 · Intel DCAP / TDX documentation</a:t>
+              <a:t>Source markers: 〔S-…〕 · Appendix 16</a:t>
             </a:r>
             <a:endParaRPr lang="en-US" sz="780" dirty="0"/>
           </a:p>
@@ -7599,7 +8481,7 @@
                 <a:ea typeface="Apple SD Gothic Neo" pitchFamily="34" charset="-122"/>
                 <a:cs typeface="Apple SD Gothic Neo" pitchFamily="34" charset="-120"/>
               </a:rPr>
-              <a:t>Appendix: full Point claim · model · prose trace ledger</a:t>
+              <a:t>Appendix: 10개 Point claim이 독자 문장과 어느 slide에서 만나는가</a:t>
             </a:r>
             <a:endParaRPr lang="en-US" sz="2900" dirty="0"/>
           </a:p>
@@ -7640,7 +8522,7 @@
                 <a:ea typeface="Apple SD Gothic Neo" pitchFamily="34" charset="-122"/>
                 <a:cs typeface="Apple SD Gothic Neo" pitchFamily="34" charset="-120"/>
               </a:rPr>
-              <a:t>이 deck은 10 claims, 8 nodes, 18 edges, 7 boundaries와 context/state/proof/implication inventory를 canonical Point hash에 연결한다.</a:t>
+              <a:t>coverage는 ID footer가 아니라 실제 Korean assertion·narrative·proof limit으로 확인한다. 자세한 locator는 final/prose-trace.json과 structural-coverage-map.json에 남긴다.</a:t>
             </a:r>
             <a:endParaRPr lang="en-US" sz="1430" dirty="0"/>
           </a:p>
@@ -7695,208 +8577,10 @@
         </p:nvSpPr>
         <p:spPr>
           <a:xfrm>
-            <a:off x="658368" y="1417320"/>
-            <a:ext cx="868680" cy="457200"/>
-          </a:xfrm>
-          <a:prstGeom prst="rect">
-            <a:avLst/>
-          </a:prstGeom>
-          <a:solidFill>
-            <a:srgbClr val="12334A"/>
-          </a:solidFill>
-          <a:ln w="8890">
-            <a:solidFill>
-              <a:srgbClr val="12334A"/>
-            </a:solidFill>
-            <a:prstDash val="solid"/>
-          </a:ln>
-        </p:spPr>
-      </p:sp>
-      <p:sp>
-        <p:nvSpPr>
-          <p:cNvPr id="6" name="Text 4"/>
-          <p:cNvSpPr/>
-          <p:nvPr/>
-        </p:nvSpPr>
-        <p:spPr>
-          <a:xfrm>
-            <a:off x="749808" y="1591056"/>
-            <a:ext cx="685800" cy="109728"/>
-          </a:xfrm>
-          <a:prstGeom prst="rect">
-            <a:avLst/>
-          </a:prstGeom>
-          <a:noFill/>
-          <a:ln/>
-        </p:spPr>
-        <p:txBody>
-          <a:bodyPr wrap="square" lIns="0" tIns="0" rIns="0" bIns="0" rtlCol="0" anchor="ctr">
-            <a:normAutofit/>
-          </a:bodyPr>
-          <a:lstStyle/>
-          <a:p>
-            <a:pPr algn="ctr" indent="0" marL="0">
-              <a:buNone/>
-            </a:pPr>
-            <a:r>
-              <a:rPr lang="en-US" sz="920" b="1" dirty="0">
-                <a:solidFill>
-                  <a:srgbClr val="FFFFFF"/>
-                </a:solidFill>
-                <a:latin typeface="Apple SD Gothic Neo" pitchFamily="34" charset="0"/>
-                <a:ea typeface="Apple SD Gothic Neo" pitchFamily="34" charset="-122"/>
-                <a:cs typeface="Apple SD Gothic Neo" pitchFamily="34" charset="-120"/>
-              </a:rPr>
-              <a:t>Point claim</a:t>
-            </a:r>
-            <a:endParaRPr lang="en-US" sz="920" dirty="0"/>
-          </a:p>
-        </p:txBody>
-      </p:sp>
-      <p:sp>
-        <p:nvSpPr>
-          <p:cNvPr id="7" name="Shape 5"/>
-          <p:cNvSpPr/>
-          <p:nvPr/>
-        </p:nvSpPr>
-        <p:spPr>
-          <a:xfrm>
-            <a:off x="1828800" y="1417320"/>
-            <a:ext cx="5074920" cy="457200"/>
-          </a:xfrm>
-          <a:prstGeom prst="rect">
-            <a:avLst/>
-          </a:prstGeom>
-          <a:solidFill>
-            <a:srgbClr val="12334A"/>
-          </a:solidFill>
-          <a:ln w="8890">
-            <a:solidFill>
-              <a:srgbClr val="12334A"/>
-            </a:solidFill>
-            <a:prstDash val="solid"/>
-          </a:ln>
-        </p:spPr>
-      </p:sp>
-      <p:sp>
-        <p:nvSpPr>
-          <p:cNvPr id="8" name="Text 6"/>
-          <p:cNvSpPr/>
-          <p:nvPr/>
-        </p:nvSpPr>
-        <p:spPr>
-          <a:xfrm>
-            <a:off x="1920240" y="1591056"/>
-            <a:ext cx="4892040" cy="109728"/>
-          </a:xfrm>
-          <a:prstGeom prst="rect">
-            <a:avLst/>
-          </a:prstGeom>
-          <a:noFill/>
-          <a:ln/>
-        </p:spPr>
-        <p:txBody>
-          <a:bodyPr wrap="square" lIns="0" tIns="0" rIns="0" bIns="0" rtlCol="0" anchor="ctr">
-            <a:normAutofit/>
-          </a:bodyPr>
-          <a:lstStyle/>
-          <a:p>
-            <a:pPr algn="ctr" indent="0" marL="0">
-              <a:buNone/>
-            </a:pPr>
-            <a:r>
-              <a:rPr lang="en-US" sz="920" b="1" dirty="0">
-                <a:solidFill>
-                  <a:srgbClr val="FFFFFF"/>
-                </a:solidFill>
-                <a:latin typeface="Apple SD Gothic Neo" pitchFamily="34" charset="0"/>
-                <a:ea typeface="Apple SD Gothic Neo" pitchFamily="34" charset="-122"/>
-                <a:cs typeface="Apple SD Gothic Neo" pitchFamily="34" charset="-120"/>
-              </a:rPr>
-              <a:t>Reader-visible meaning</a:t>
-            </a:r>
-            <a:endParaRPr lang="en-US" sz="920" dirty="0"/>
-          </a:p>
-        </p:txBody>
-      </p:sp>
-      <p:sp>
-        <p:nvSpPr>
-          <p:cNvPr id="9" name="Shape 7"/>
-          <p:cNvSpPr/>
-          <p:nvPr/>
-        </p:nvSpPr>
-        <p:spPr>
-          <a:xfrm>
-            <a:off x="7223760" y="1417320"/>
-            <a:ext cx="4023360" cy="457200"/>
-          </a:xfrm>
-          <a:prstGeom prst="rect">
-            <a:avLst/>
-          </a:prstGeom>
-          <a:solidFill>
-            <a:srgbClr val="12334A"/>
-          </a:solidFill>
-          <a:ln w="8890">
-            <a:solidFill>
-              <a:srgbClr val="12334A"/>
-            </a:solidFill>
-            <a:prstDash val="solid"/>
-          </a:ln>
-        </p:spPr>
-      </p:sp>
-      <p:sp>
-        <p:nvSpPr>
-          <p:cNvPr id="10" name="Text 8"/>
-          <p:cNvSpPr/>
-          <p:nvPr/>
-        </p:nvSpPr>
-        <p:spPr>
-          <a:xfrm>
-            <a:off x="7315200" y="1591056"/>
-            <a:ext cx="3840480" cy="109728"/>
-          </a:xfrm>
-          <a:prstGeom prst="rect">
-            <a:avLst/>
-          </a:prstGeom>
-          <a:noFill/>
-          <a:ln/>
-        </p:spPr>
-        <p:txBody>
-          <a:bodyPr wrap="square" lIns="0" tIns="0" rIns="0" bIns="0" rtlCol="0" anchor="ctr">
-            <a:normAutofit/>
-          </a:bodyPr>
-          <a:lstStyle/>
-          <a:p>
-            <a:pPr algn="ctr" indent="0" marL="0">
-              <a:buNone/>
-            </a:pPr>
-            <a:r>
-              <a:rPr lang="en-US" sz="920" b="1" dirty="0">
-                <a:solidFill>
-                  <a:srgbClr val="FFFFFF"/>
-                </a:solidFill>
-                <a:latin typeface="Apple SD Gothic Neo" pitchFamily="34" charset="0"/>
-                <a:ea typeface="Apple SD Gothic Neo" pitchFamily="34" charset="-122"/>
-                <a:cs typeface="Apple SD Gothic Neo" pitchFamily="34" charset="-120"/>
-              </a:rPr>
-              <a:t>Primary slide(s)</a:t>
-            </a:r>
-            <a:endParaRPr lang="en-US" sz="920" dirty="0"/>
-          </a:p>
-        </p:txBody>
-      </p:sp>
-      <p:sp>
-        <p:nvSpPr>
-          <p:cNvPr id="11" name="Shape 9"/>
-          <p:cNvSpPr/>
-          <p:nvPr/>
-        </p:nvSpPr>
-        <p:spPr>
-          <a:xfrm>
-            <a:off x="658368" y="1874520"/>
-            <a:ext cx="868680" cy="384048"/>
-          </a:xfrm>
-          <a:prstGeom prst="rect">
+            <a:off x="658368" y="1353312"/>
+            <a:ext cx="5212080" cy="658368"/>
+          </a:xfrm>
+          <a:prstGeom prst="roundRect">
             <a:avLst/>
           </a:prstGeom>
           <a:solidFill>
@@ -7912,14 +8596,253 @@
       </p:sp>
       <p:sp>
         <p:nvSpPr>
+          <p:cNvPr id="6" name="Shape 4"/>
+          <p:cNvSpPr/>
+          <p:nvPr/>
+        </p:nvSpPr>
+        <p:spPr>
+          <a:xfrm>
+            <a:off x="804672" y="1554480"/>
+            <a:ext cx="658368" cy="256032"/>
+          </a:xfrm>
+          <a:prstGeom prst="roundRect">
+            <a:avLst/>
+          </a:prstGeom>
+          <a:solidFill>
+            <a:srgbClr val="0B7890"/>
+          </a:solidFill>
+          <a:ln w="8890">
+            <a:solidFill>
+              <a:srgbClr val="0B7890"/>
+            </a:solidFill>
+            <a:prstDash val="solid"/>
+          </a:ln>
+        </p:spPr>
+      </p:sp>
+      <p:sp>
+        <p:nvSpPr>
+          <p:cNvPr id="7" name="Text 5"/>
+          <p:cNvSpPr/>
+          <p:nvPr/>
+        </p:nvSpPr>
+        <p:spPr>
+          <a:xfrm>
+            <a:off x="804672" y="1623060"/>
+            <a:ext cx="658368" cy="91440"/>
+          </a:xfrm>
+          <a:prstGeom prst="rect">
+            <a:avLst/>
+          </a:prstGeom>
+          <a:noFill/>
+          <a:ln/>
+        </p:spPr>
+        <p:txBody>
+          <a:bodyPr wrap="square" lIns="0" tIns="0" rIns="0" bIns="0" rtlCol="0" anchor="ctr">
+            <a:normAutofit/>
+          </a:bodyPr>
+          <a:lstStyle/>
+          <a:p>
+            <a:pPr algn="ctr" indent="0" marL="0">
+              <a:buNone/>
+            </a:pPr>
+            <a:r>
+              <a:rPr lang="en-US" sz="820" b="1" dirty="0">
+                <a:solidFill>
+                  <a:srgbClr val="FFFFFF"/>
+                </a:solidFill>
+                <a:latin typeface="Apple SD Gothic Neo" pitchFamily="34" charset="0"/>
+                <a:ea typeface="Apple SD Gothic Neo" pitchFamily="34" charset="-122"/>
+                <a:cs typeface="Apple SD Gothic Neo" pitchFamily="34" charset="-120"/>
+              </a:rPr>
+              <a:t>C-001</a:t>
+            </a:r>
+            <a:endParaRPr lang="en-US" sz="820" dirty="0"/>
+          </a:p>
+        </p:txBody>
+      </p:sp>
+      <p:sp>
+        <p:nvSpPr>
+          <p:cNvPr id="8" name="Text 6"/>
+          <p:cNvSpPr/>
+          <p:nvPr/>
+        </p:nvSpPr>
+        <p:spPr>
+          <a:xfrm>
+            <a:off x="1618488" y="1563624"/>
+            <a:ext cx="3566160" cy="137160"/>
+          </a:xfrm>
+          <a:prstGeom prst="rect">
+            <a:avLst/>
+          </a:prstGeom>
+          <a:noFill/>
+          <a:ln/>
+        </p:spPr>
+        <p:txBody>
+          <a:bodyPr wrap="square" lIns="0" tIns="0" rIns="0" bIns="0" rtlCol="0" anchor="ctr">
+            <a:normAutofit/>
+          </a:bodyPr>
+          <a:lstStyle/>
+          <a:p>
+            <a:pPr indent="0" marL="0">
+              <a:buNone/>
+            </a:pPr>
+            <a:r>
+              <a:rPr lang="en-US" sz="1090" b="1" dirty="0">
+                <a:solidFill>
+                  <a:srgbClr val="14273A"/>
+                </a:solidFill>
+                <a:latin typeface="Apple SD Gothic Neo" pitchFamily="34" charset="0"/>
+                <a:ea typeface="Apple SD Gothic Neo" pitchFamily="34" charset="-122"/>
+                <a:cs typeface="Apple SD Gothic Neo" pitchFamily="34" charset="-120"/>
+              </a:rPr>
+              <a:t>Evidence 평가는 비밀 공개 권한이 아니다</a:t>
+            </a:r>
+            <a:endParaRPr lang="en-US" sz="1090" dirty="0"/>
+          </a:p>
+        </p:txBody>
+      </p:sp>
+      <p:sp>
+        <p:nvSpPr>
+          <p:cNvPr id="9" name="Text 7"/>
+          <p:cNvSpPr/>
+          <p:nvPr/>
+        </p:nvSpPr>
+        <p:spPr>
+          <a:xfrm>
+            <a:off x="5084064" y="1572768"/>
+            <a:ext cx="594360" cy="118872"/>
+          </a:xfrm>
+          <a:prstGeom prst="rect">
+            <a:avLst/>
+          </a:prstGeom>
+          <a:noFill/>
+          <a:ln/>
+        </p:spPr>
+        <p:txBody>
+          <a:bodyPr wrap="square" lIns="0" tIns="0" rIns="0" bIns="0" rtlCol="0" anchor="ctr">
+            <a:normAutofit/>
+          </a:bodyPr>
+          <a:lstStyle/>
+          <a:p>
+            <a:pPr algn="r" indent="0" marL="0">
+              <a:buNone/>
+            </a:pPr>
+            <a:r>
+              <a:rPr lang="en-US" sz="850" dirty="0">
+                <a:solidFill>
+                  <a:srgbClr val="526B84"/>
+                </a:solidFill>
+                <a:latin typeface="Apple SD Gothic Neo" pitchFamily="34" charset="0"/>
+                <a:ea typeface="Apple SD Gothic Neo" pitchFamily="34" charset="-122"/>
+                <a:cs typeface="Apple SD Gothic Neo" pitchFamily="34" charset="-120"/>
+              </a:rPr>
+              <a:t>slide 01</a:t>
+            </a:r>
+            <a:endParaRPr lang="en-US" sz="850" dirty="0"/>
+          </a:p>
+        </p:txBody>
+      </p:sp>
+      <p:sp>
+        <p:nvSpPr>
+          <p:cNvPr id="10" name="Shape 8"/>
+          <p:cNvSpPr/>
+          <p:nvPr/>
+        </p:nvSpPr>
+        <p:spPr>
+          <a:xfrm>
+            <a:off x="658368" y="2194560"/>
+            <a:ext cx="5212080" cy="658368"/>
+          </a:xfrm>
+          <a:prstGeom prst="roundRect">
+            <a:avLst/>
+          </a:prstGeom>
+          <a:solidFill>
+            <a:srgbClr val="EDF2F7"/>
+          </a:solidFill>
+          <a:ln w="8890">
+            <a:solidFill>
+              <a:srgbClr val="EDF2F7"/>
+            </a:solidFill>
+            <a:prstDash val="solid"/>
+          </a:ln>
+        </p:spPr>
+      </p:sp>
+      <p:sp>
+        <p:nvSpPr>
+          <p:cNvPr id="11" name="Shape 9"/>
+          <p:cNvSpPr/>
+          <p:nvPr/>
+        </p:nvSpPr>
+        <p:spPr>
+          <a:xfrm>
+            <a:off x="804672" y="2395728"/>
+            <a:ext cx="658368" cy="256032"/>
+          </a:xfrm>
+          <a:prstGeom prst="roundRect">
+            <a:avLst/>
+          </a:prstGeom>
+          <a:solidFill>
+            <a:srgbClr val="0B7890"/>
+          </a:solidFill>
+          <a:ln w="8890">
+            <a:solidFill>
+              <a:srgbClr val="0B7890"/>
+            </a:solidFill>
+            <a:prstDash val="solid"/>
+          </a:ln>
+        </p:spPr>
+      </p:sp>
+      <p:sp>
+        <p:nvSpPr>
           <p:cNvPr id="12" name="Text 10"/>
           <p:cNvSpPr/>
           <p:nvPr/>
         </p:nvSpPr>
         <p:spPr>
           <a:xfrm>
-            <a:off x="749808" y="2002536"/>
-            <a:ext cx="685800" cy="91440"/>
+            <a:off x="804672" y="2464308"/>
+            <a:ext cx="658368" cy="91440"/>
+          </a:xfrm>
+          <a:prstGeom prst="rect">
+            <a:avLst/>
+          </a:prstGeom>
+          <a:noFill/>
+          <a:ln/>
+        </p:spPr>
+        <p:txBody>
+          <a:bodyPr wrap="square" lIns="0" tIns="0" rIns="0" bIns="0" rtlCol="0" anchor="ctr">
+            <a:normAutofit/>
+          </a:bodyPr>
+          <a:lstStyle/>
+          <a:p>
+            <a:pPr algn="ctr" indent="0" marL="0">
+              <a:buNone/>
+            </a:pPr>
+            <a:r>
+              <a:rPr lang="en-US" sz="820" b="1" dirty="0">
+                <a:solidFill>
+                  <a:srgbClr val="FFFFFF"/>
+                </a:solidFill>
+                <a:latin typeface="Apple SD Gothic Neo" pitchFamily="34" charset="0"/>
+                <a:ea typeface="Apple SD Gothic Neo" pitchFamily="34" charset="-122"/>
+                <a:cs typeface="Apple SD Gothic Neo" pitchFamily="34" charset="-120"/>
+              </a:rPr>
+              <a:t>C-002</a:t>
+            </a:r>
+            <a:endParaRPr lang="en-US" sz="820" dirty="0"/>
+          </a:p>
+        </p:txBody>
+      </p:sp>
+      <p:sp>
+        <p:nvSpPr>
+          <p:cNvPr id="13" name="Text 11"/>
+          <p:cNvSpPr/>
+          <p:nvPr/>
+        </p:nvSpPr>
+        <p:spPr>
+          <a:xfrm>
+            <a:off x="1618488" y="2404872"/>
+            <a:ext cx="3566160" cy="137160"/>
           </a:xfrm>
           <a:prstGeom prst="rect">
             <a:avLst/>
@@ -7937,32 +8860,73 @@
               <a:buNone/>
             </a:pPr>
             <a:r>
-              <a:rPr lang="en-US" sz="880" b="1" dirty="0">
-                <a:solidFill>
-                  <a:srgbClr val="0B7890"/>
-                </a:solidFill>
-                <a:latin typeface="Apple SD Gothic Neo" pitchFamily="34" charset="0"/>
-                <a:ea typeface="Apple SD Gothic Neo" pitchFamily="34" charset="-122"/>
-                <a:cs typeface="Apple SD Gothic Neo" pitchFamily="34" charset="-120"/>
-              </a:rPr>
-              <a:t>C-001</a:t>
-            </a:r>
-            <a:endParaRPr lang="en-US" sz="880" dirty="0"/>
-          </a:p>
-        </p:txBody>
-      </p:sp>
-      <p:sp>
-        <p:nvSpPr>
-          <p:cNvPr id="13" name="Shape 11"/>
-          <p:cNvSpPr/>
-          <p:nvPr/>
-        </p:nvSpPr>
-        <p:spPr>
-          <a:xfrm>
-            <a:off x="1828800" y="1874520"/>
-            <a:ext cx="5074920" cy="384048"/>
-          </a:xfrm>
-          <a:prstGeom prst="rect">
+              <a:rPr lang="en-US" sz="1090" b="1" dirty="0">
+                <a:solidFill>
+                  <a:srgbClr val="14273A"/>
+                </a:solidFill>
+                <a:latin typeface="Apple SD Gothic Neo" pitchFamily="34" charset="0"/>
+                <a:ea typeface="Apple SD Gothic Neo" pitchFamily="34" charset="-122"/>
+                <a:cs typeface="Apple SD Gothic Neo" pitchFamily="34" charset="-120"/>
+              </a:rPr>
+              <a:t>보호·운반·서명·평가·공개는 다른 역할이다</a:t>
+            </a:r>
+            <a:endParaRPr lang="en-US" sz="1090" dirty="0"/>
+          </a:p>
+        </p:txBody>
+      </p:sp>
+      <p:sp>
+        <p:nvSpPr>
+          <p:cNvPr id="14" name="Text 12"/>
+          <p:cNvSpPr/>
+          <p:nvPr/>
+        </p:nvSpPr>
+        <p:spPr>
+          <a:xfrm>
+            <a:off x="5084064" y="2414016"/>
+            <a:ext cx="594360" cy="118872"/>
+          </a:xfrm>
+          <a:prstGeom prst="rect">
+            <a:avLst/>
+          </a:prstGeom>
+          <a:noFill/>
+          <a:ln/>
+        </p:spPr>
+        <p:txBody>
+          <a:bodyPr wrap="square" lIns="0" tIns="0" rIns="0" bIns="0" rtlCol="0" anchor="ctr">
+            <a:normAutofit/>
+          </a:bodyPr>
+          <a:lstStyle/>
+          <a:p>
+            <a:pPr algn="r" indent="0" marL="0">
+              <a:buNone/>
+            </a:pPr>
+            <a:r>
+              <a:rPr lang="en-US" sz="850" dirty="0">
+                <a:solidFill>
+                  <a:srgbClr val="526B84"/>
+                </a:solidFill>
+                <a:latin typeface="Apple SD Gothic Neo" pitchFamily="34" charset="0"/>
+                <a:ea typeface="Apple SD Gothic Neo" pitchFamily="34" charset="-122"/>
+                <a:cs typeface="Apple SD Gothic Neo" pitchFamily="34" charset="-120"/>
+              </a:rPr>
+              <a:t>slide 02, 05</a:t>
+            </a:r>
+            <a:endParaRPr lang="en-US" sz="850" dirty="0"/>
+          </a:p>
+        </p:txBody>
+      </p:sp>
+      <p:sp>
+        <p:nvSpPr>
+          <p:cNvPr id="15" name="Shape 13"/>
+          <p:cNvSpPr/>
+          <p:nvPr/>
+        </p:nvSpPr>
+        <p:spPr>
+          <a:xfrm>
+            <a:off x="658368" y="3035808"/>
+            <a:ext cx="5212080" cy="658368"/>
+          </a:xfrm>
+          <a:prstGeom prst="roundRect">
             <a:avLst/>
           </a:prstGeom>
           <a:solidFill>
@@ -7978,14 +8942,80 @@
       </p:sp>
       <p:sp>
         <p:nvSpPr>
-          <p:cNvPr id="14" name="Text 12"/>
-          <p:cNvSpPr/>
-          <p:nvPr/>
-        </p:nvSpPr>
-        <p:spPr>
-          <a:xfrm>
-            <a:off x="1920240" y="2002536"/>
-            <a:ext cx="4892040" cy="91440"/>
+          <p:cNvPr id="16" name="Shape 14"/>
+          <p:cNvSpPr/>
+          <p:nvPr/>
+        </p:nvSpPr>
+        <p:spPr>
+          <a:xfrm>
+            <a:off x="804672" y="3236976"/>
+            <a:ext cx="658368" cy="256032"/>
+          </a:xfrm>
+          <a:prstGeom prst="roundRect">
+            <a:avLst/>
+          </a:prstGeom>
+          <a:solidFill>
+            <a:srgbClr val="0B7890"/>
+          </a:solidFill>
+          <a:ln w="8890">
+            <a:solidFill>
+              <a:srgbClr val="0B7890"/>
+            </a:solidFill>
+            <a:prstDash val="solid"/>
+          </a:ln>
+        </p:spPr>
+      </p:sp>
+      <p:sp>
+        <p:nvSpPr>
+          <p:cNvPr id="17" name="Text 15"/>
+          <p:cNvSpPr/>
+          <p:nvPr/>
+        </p:nvSpPr>
+        <p:spPr>
+          <a:xfrm>
+            <a:off x="804672" y="3305556"/>
+            <a:ext cx="658368" cy="91440"/>
+          </a:xfrm>
+          <a:prstGeom prst="rect">
+            <a:avLst/>
+          </a:prstGeom>
+          <a:noFill/>
+          <a:ln/>
+        </p:spPr>
+        <p:txBody>
+          <a:bodyPr wrap="square" lIns="0" tIns="0" rIns="0" bIns="0" rtlCol="0" anchor="ctr">
+            <a:normAutofit/>
+          </a:bodyPr>
+          <a:lstStyle/>
+          <a:p>
+            <a:pPr algn="ctr" indent="0" marL="0">
+              <a:buNone/>
+            </a:pPr>
+            <a:r>
+              <a:rPr lang="en-US" sz="820" b="1" dirty="0">
+                <a:solidFill>
+                  <a:srgbClr val="FFFFFF"/>
+                </a:solidFill>
+                <a:latin typeface="Apple SD Gothic Neo" pitchFamily="34" charset="0"/>
+                <a:ea typeface="Apple SD Gothic Neo" pitchFamily="34" charset="-122"/>
+                <a:cs typeface="Apple SD Gothic Neo" pitchFamily="34" charset="-120"/>
+              </a:rPr>
+              <a:t>C-003</a:t>
+            </a:r>
+            <a:endParaRPr lang="en-US" sz="820" dirty="0"/>
+          </a:p>
+        </p:txBody>
+      </p:sp>
+      <p:sp>
+        <p:nvSpPr>
+          <p:cNvPr id="18" name="Text 16"/>
+          <p:cNvSpPr/>
+          <p:nvPr/>
+        </p:nvSpPr>
+        <p:spPr>
+          <a:xfrm>
+            <a:off x="1618488" y="3246120"/>
+            <a:ext cx="3566160" cy="137160"/>
           </a:xfrm>
           <a:prstGeom prst="rect">
             <a:avLst/>
@@ -8003,7 +9033,7 @@
               <a:buNone/>
             </a:pPr>
             <a:r>
-              <a:rPr lang="en-US" sz="920" dirty="0">
+              <a:rPr lang="en-US" sz="1090" b="1" dirty="0">
                 <a:solidFill>
                   <a:srgbClr val="14273A"/>
                 </a:solidFill>
@@ -8011,24 +9041,238 @@
                 <a:ea typeface="Apple SD Gothic Neo" pitchFamily="34" charset="-122"/>
                 <a:cs typeface="Apple SD Gothic Neo" pitchFamily="34" charset="-120"/>
               </a:rPr>
-              <a:t>release-control thesis</a:t>
-            </a:r>
-            <a:endParaRPr lang="en-US" sz="920" dirty="0"/>
-          </a:p>
-        </p:txBody>
-      </p:sp>
-      <p:sp>
-        <p:nvSpPr>
-          <p:cNvPr id="15" name="Shape 13"/>
-          <p:cNvSpPr/>
-          <p:nvPr/>
-        </p:nvSpPr>
-        <p:spPr>
-          <a:xfrm>
-            <a:off x="7223760" y="1874520"/>
-            <a:ext cx="4023360" cy="384048"/>
-          </a:xfrm>
-          <a:prstGeom prst="rect">
+              <a:t>untrusted path는 권한을 만들 수 없고 NO KEY로 끝난다</a:t>
+            </a:r>
+            <a:endParaRPr lang="en-US" sz="1090" dirty="0"/>
+          </a:p>
+        </p:txBody>
+      </p:sp>
+      <p:sp>
+        <p:nvSpPr>
+          <p:cNvPr id="19" name="Text 17"/>
+          <p:cNvSpPr/>
+          <p:nvPr/>
+        </p:nvSpPr>
+        <p:spPr>
+          <a:xfrm>
+            <a:off x="5084064" y="3255264"/>
+            <a:ext cx="594360" cy="118872"/>
+          </a:xfrm>
+          <a:prstGeom prst="rect">
+            <a:avLst/>
+          </a:prstGeom>
+          <a:noFill/>
+          <a:ln/>
+        </p:spPr>
+        <p:txBody>
+          <a:bodyPr wrap="square" lIns="0" tIns="0" rIns="0" bIns="0" rtlCol="0" anchor="ctr">
+            <a:normAutofit/>
+          </a:bodyPr>
+          <a:lstStyle/>
+          <a:p>
+            <a:pPr algn="r" indent="0" marL="0">
+              <a:buNone/>
+            </a:pPr>
+            <a:r>
+              <a:rPr lang="en-US" sz="850" dirty="0">
+                <a:solidFill>
+                  <a:srgbClr val="526B84"/>
+                </a:solidFill>
+                <a:latin typeface="Apple SD Gothic Neo" pitchFamily="34" charset="0"/>
+                <a:ea typeface="Apple SD Gothic Neo" pitchFamily="34" charset="-122"/>
+                <a:cs typeface="Apple SD Gothic Neo" pitchFamily="34" charset="-120"/>
+              </a:rPr>
+              <a:t>slide 03, 04</a:t>
+            </a:r>
+            <a:endParaRPr lang="en-US" sz="850" dirty="0"/>
+          </a:p>
+        </p:txBody>
+      </p:sp>
+      <p:sp>
+        <p:nvSpPr>
+          <p:cNvPr id="20" name="Shape 18"/>
+          <p:cNvSpPr/>
+          <p:nvPr/>
+        </p:nvSpPr>
+        <p:spPr>
+          <a:xfrm>
+            <a:off x="658368" y="3877056"/>
+            <a:ext cx="5212080" cy="658368"/>
+          </a:xfrm>
+          <a:prstGeom prst="roundRect">
+            <a:avLst/>
+          </a:prstGeom>
+          <a:solidFill>
+            <a:srgbClr val="EDF2F7"/>
+          </a:solidFill>
+          <a:ln w="8890">
+            <a:solidFill>
+              <a:srgbClr val="EDF2F7"/>
+            </a:solidFill>
+            <a:prstDash val="solid"/>
+          </a:ln>
+        </p:spPr>
+      </p:sp>
+      <p:sp>
+        <p:nvSpPr>
+          <p:cNvPr id="21" name="Shape 19"/>
+          <p:cNvSpPr/>
+          <p:nvPr/>
+        </p:nvSpPr>
+        <p:spPr>
+          <a:xfrm>
+            <a:off x="804672" y="4078224"/>
+            <a:ext cx="658368" cy="256032"/>
+          </a:xfrm>
+          <a:prstGeom prst="roundRect">
+            <a:avLst/>
+          </a:prstGeom>
+          <a:solidFill>
+            <a:srgbClr val="0B7890"/>
+          </a:solidFill>
+          <a:ln w="8890">
+            <a:solidFill>
+              <a:srgbClr val="0B7890"/>
+            </a:solidFill>
+            <a:prstDash val="solid"/>
+          </a:ln>
+        </p:spPr>
+      </p:sp>
+      <p:sp>
+        <p:nvSpPr>
+          <p:cNvPr id="22" name="Text 20"/>
+          <p:cNvSpPr/>
+          <p:nvPr/>
+        </p:nvSpPr>
+        <p:spPr>
+          <a:xfrm>
+            <a:off x="804672" y="4146804"/>
+            <a:ext cx="658368" cy="91440"/>
+          </a:xfrm>
+          <a:prstGeom prst="rect">
+            <a:avLst/>
+          </a:prstGeom>
+          <a:noFill/>
+          <a:ln/>
+        </p:spPr>
+        <p:txBody>
+          <a:bodyPr wrap="square" lIns="0" tIns="0" rIns="0" bIns="0" rtlCol="0" anchor="ctr">
+            <a:normAutofit/>
+          </a:bodyPr>
+          <a:lstStyle/>
+          <a:p>
+            <a:pPr algn="ctr" indent="0" marL="0">
+              <a:buNone/>
+            </a:pPr>
+            <a:r>
+              <a:rPr lang="en-US" sz="820" b="1" dirty="0">
+                <a:solidFill>
+                  <a:srgbClr val="FFFFFF"/>
+                </a:solidFill>
+                <a:latin typeface="Apple SD Gothic Neo" pitchFamily="34" charset="0"/>
+                <a:ea typeface="Apple SD Gothic Neo" pitchFamily="34" charset="-122"/>
+                <a:cs typeface="Apple SD Gothic Neo" pitchFamily="34" charset="-120"/>
+              </a:rPr>
+              <a:t>C-004</a:t>
+            </a:r>
+            <a:endParaRPr lang="en-US" sz="820" dirty="0"/>
+          </a:p>
+        </p:txBody>
+      </p:sp>
+      <p:sp>
+        <p:nvSpPr>
+          <p:cNvPr id="23" name="Text 21"/>
+          <p:cNvSpPr/>
+          <p:nvPr/>
+        </p:nvSpPr>
+        <p:spPr>
+          <a:xfrm>
+            <a:off x="1618488" y="4087368"/>
+            <a:ext cx="3566160" cy="137160"/>
+          </a:xfrm>
+          <a:prstGeom prst="rect">
+            <a:avLst/>
+          </a:prstGeom>
+          <a:noFill/>
+          <a:ln/>
+        </p:spPr>
+        <p:txBody>
+          <a:bodyPr wrap="square" lIns="0" tIns="0" rIns="0" bIns="0" rtlCol="0" anchor="ctr">
+            <a:normAutofit/>
+          </a:bodyPr>
+          <a:lstStyle/>
+          <a:p>
+            <a:pPr indent="0" marL="0">
+              <a:buNone/>
+            </a:pPr>
+            <a:r>
+              <a:rPr lang="en-US" sz="1090" b="1" dirty="0">
+                <a:solidFill>
+                  <a:srgbClr val="14273A"/>
+                </a:solidFill>
+                <a:latin typeface="Apple SD Gothic Neo" pitchFamily="34" charset="0"/>
+                <a:ea typeface="Apple SD Gothic Neo" pitchFamily="34" charset="-122"/>
+                <a:cs typeface="Apple SD Gothic Neo" pitchFamily="34" charset="-120"/>
+              </a:rPr>
+              <a:t>request·Quote·Result·PoP·same-key release는 닫힌 경로다</a:t>
+            </a:r>
+            <a:endParaRPr lang="en-US" sz="1090" dirty="0"/>
+          </a:p>
+        </p:txBody>
+      </p:sp>
+      <p:sp>
+        <p:nvSpPr>
+          <p:cNvPr id="24" name="Text 22"/>
+          <p:cNvSpPr/>
+          <p:nvPr/>
+        </p:nvSpPr>
+        <p:spPr>
+          <a:xfrm>
+            <a:off x="5084064" y="4096512"/>
+            <a:ext cx="594360" cy="118872"/>
+          </a:xfrm>
+          <a:prstGeom prst="rect">
+            <a:avLst/>
+          </a:prstGeom>
+          <a:noFill/>
+          <a:ln/>
+        </p:spPr>
+        <p:txBody>
+          <a:bodyPr wrap="square" lIns="0" tIns="0" rIns="0" bIns="0" rtlCol="0" anchor="ctr">
+            <a:normAutofit/>
+          </a:bodyPr>
+          <a:lstStyle/>
+          <a:p>
+            <a:pPr algn="r" indent="0" marL="0">
+              <a:buNone/>
+            </a:pPr>
+            <a:r>
+              <a:rPr lang="en-US" sz="850" dirty="0">
+                <a:solidFill>
+                  <a:srgbClr val="526B84"/>
+                </a:solidFill>
+                <a:latin typeface="Apple SD Gothic Neo" pitchFamily="34" charset="0"/>
+                <a:ea typeface="Apple SD Gothic Neo" pitchFamily="34" charset="-122"/>
+                <a:cs typeface="Apple SD Gothic Neo" pitchFamily="34" charset="-120"/>
+              </a:rPr>
+              <a:t>slide 04–09</a:t>
+            </a:r>
+            <a:endParaRPr lang="en-US" sz="850" dirty="0"/>
+          </a:p>
+        </p:txBody>
+      </p:sp>
+      <p:sp>
+        <p:nvSpPr>
+          <p:cNvPr id="25" name="Shape 23"/>
+          <p:cNvSpPr/>
+          <p:nvPr/>
+        </p:nvSpPr>
+        <p:spPr>
+          <a:xfrm>
+            <a:off x="658368" y="4718304"/>
+            <a:ext cx="5212080" cy="658368"/>
+          </a:xfrm>
+          <a:prstGeom prst="roundRect">
             <a:avLst/>
           </a:prstGeom>
           <a:solidFill>
@@ -8044,14 +9288,80 @@
       </p:sp>
       <p:sp>
         <p:nvSpPr>
-          <p:cNvPr id="16" name="Text 14"/>
-          <p:cNvSpPr/>
-          <p:nvPr/>
-        </p:nvSpPr>
-        <p:spPr>
-          <a:xfrm>
-            <a:off x="7315200" y="2002536"/>
-            <a:ext cx="3840480" cy="91440"/>
+          <p:cNvPr id="26" name="Shape 24"/>
+          <p:cNvSpPr/>
+          <p:nvPr/>
+        </p:nvSpPr>
+        <p:spPr>
+          <a:xfrm>
+            <a:off x="804672" y="4919472"/>
+            <a:ext cx="658368" cy="256032"/>
+          </a:xfrm>
+          <a:prstGeom prst="roundRect">
+            <a:avLst/>
+          </a:prstGeom>
+          <a:solidFill>
+            <a:srgbClr val="0B7890"/>
+          </a:solidFill>
+          <a:ln w="8890">
+            <a:solidFill>
+              <a:srgbClr val="0B7890"/>
+            </a:solidFill>
+            <a:prstDash val="solid"/>
+          </a:ln>
+        </p:spPr>
+      </p:sp>
+      <p:sp>
+        <p:nvSpPr>
+          <p:cNvPr id="27" name="Text 25"/>
+          <p:cNvSpPr/>
+          <p:nvPr/>
+        </p:nvSpPr>
+        <p:spPr>
+          <a:xfrm>
+            <a:off x="804672" y="4988052"/>
+            <a:ext cx="658368" cy="91440"/>
+          </a:xfrm>
+          <a:prstGeom prst="rect">
+            <a:avLst/>
+          </a:prstGeom>
+          <a:noFill/>
+          <a:ln/>
+        </p:spPr>
+        <p:txBody>
+          <a:bodyPr wrap="square" lIns="0" tIns="0" rIns="0" bIns="0" rtlCol="0" anchor="ctr">
+            <a:normAutofit/>
+          </a:bodyPr>
+          <a:lstStyle/>
+          <a:p>
+            <a:pPr algn="ctr" indent="0" marL="0">
+              <a:buNone/>
+            </a:pPr>
+            <a:r>
+              <a:rPr lang="en-US" sz="820" b="1" dirty="0">
+                <a:solidFill>
+                  <a:srgbClr val="FFFFFF"/>
+                </a:solidFill>
+                <a:latin typeface="Apple SD Gothic Neo" pitchFamily="34" charset="0"/>
+                <a:ea typeface="Apple SD Gothic Neo" pitchFamily="34" charset="-122"/>
+                <a:cs typeface="Apple SD Gothic Neo" pitchFamily="34" charset="-120"/>
+              </a:rPr>
+              <a:t>C-005</a:t>
+            </a:r>
+            <a:endParaRPr lang="en-US" sz="820" dirty="0"/>
+          </a:p>
+        </p:txBody>
+      </p:sp>
+      <p:sp>
+        <p:nvSpPr>
+          <p:cNvPr id="28" name="Text 26"/>
+          <p:cNvSpPr/>
+          <p:nvPr/>
+        </p:nvSpPr>
+        <p:spPr>
+          <a:xfrm>
+            <a:off x="1618488" y="4928616"/>
+            <a:ext cx="3566160" cy="137160"/>
           </a:xfrm>
           <a:prstGeom prst="rect">
             <a:avLst/>
@@ -8069,7 +9379,7 @@
               <a:buNone/>
             </a:pPr>
             <a:r>
-              <a:rPr lang="en-US" sz="880" dirty="0">
+              <a:rPr lang="en-US" sz="1090" b="1" dirty="0">
                 <a:solidFill>
                   <a:srgbClr val="14273A"/>
                 </a:solidFill>
@@ -8077,24 +9387,65 @@
                 <a:ea typeface="Apple SD Gothic Neo" pitchFamily="34" charset="-122"/>
                 <a:cs typeface="Apple SD Gothic Neo" pitchFamily="34" charset="-120"/>
               </a:rPr>
-              <a:t>01</a:t>
-            </a:r>
-            <a:endParaRPr lang="en-US" sz="880" dirty="0"/>
-          </a:p>
-        </p:txBody>
-      </p:sp>
-      <p:sp>
-        <p:nvSpPr>
-          <p:cNvPr id="17" name="Shape 15"/>
-          <p:cNvSpPr/>
-          <p:nvPr/>
-        </p:nvSpPr>
-        <p:spPr>
-          <a:xfrm>
-            <a:off x="658368" y="2267712"/>
-            <a:ext cx="868680" cy="384048"/>
-          </a:xfrm>
-          <a:prstGeom prst="rect">
+              <a:t>PCS authority와 PCCS cache는 다르다</a:t>
+            </a:r>
+            <a:endParaRPr lang="en-US" sz="1090" dirty="0"/>
+          </a:p>
+        </p:txBody>
+      </p:sp>
+      <p:sp>
+        <p:nvSpPr>
+          <p:cNvPr id="29" name="Text 27"/>
+          <p:cNvSpPr/>
+          <p:nvPr/>
+        </p:nvSpPr>
+        <p:spPr>
+          <a:xfrm>
+            <a:off x="5084064" y="4937760"/>
+            <a:ext cx="594360" cy="118872"/>
+          </a:xfrm>
+          <a:prstGeom prst="rect">
+            <a:avLst/>
+          </a:prstGeom>
+          <a:noFill/>
+          <a:ln/>
+        </p:spPr>
+        <p:txBody>
+          <a:bodyPr wrap="square" lIns="0" tIns="0" rIns="0" bIns="0" rtlCol="0" anchor="ctr">
+            <a:normAutofit/>
+          </a:bodyPr>
+          <a:lstStyle/>
+          <a:p>
+            <a:pPr algn="r" indent="0" marL="0">
+              <a:buNone/>
+            </a:pPr>
+            <a:r>
+              <a:rPr lang="en-US" sz="850" dirty="0">
+                <a:solidFill>
+                  <a:srgbClr val="526B84"/>
+                </a:solidFill>
+                <a:latin typeface="Apple SD Gothic Neo" pitchFamily="34" charset="0"/>
+                <a:ea typeface="Apple SD Gothic Neo" pitchFamily="34" charset="-122"/>
+                <a:cs typeface="Apple SD Gothic Neo" pitchFamily="34" charset="-120"/>
+              </a:rPr>
+              <a:t>slide 10</a:t>
+            </a:r>
+            <a:endParaRPr lang="en-US" sz="850" dirty="0"/>
+          </a:p>
+        </p:txBody>
+      </p:sp>
+      <p:sp>
+        <p:nvSpPr>
+          <p:cNvPr id="30" name="Shape 28"/>
+          <p:cNvSpPr/>
+          <p:nvPr/>
+        </p:nvSpPr>
+        <p:spPr>
+          <a:xfrm>
+            <a:off x="6327648" y="1353312"/>
+            <a:ext cx="5212080" cy="658368"/>
+          </a:xfrm>
+          <a:prstGeom prst="roundRect">
             <a:avLst/>
           </a:prstGeom>
           <a:solidFill>
@@ -8110,14 +9461,80 @@
       </p:sp>
       <p:sp>
         <p:nvSpPr>
-          <p:cNvPr id="18" name="Text 16"/>
-          <p:cNvSpPr/>
-          <p:nvPr/>
-        </p:nvSpPr>
-        <p:spPr>
-          <a:xfrm>
-            <a:off x="749808" y="2395728"/>
-            <a:ext cx="685800" cy="91440"/>
+          <p:cNvPr id="31" name="Shape 29"/>
+          <p:cNvSpPr/>
+          <p:nvPr/>
+        </p:nvSpPr>
+        <p:spPr>
+          <a:xfrm>
+            <a:off x="6473952" y="1554480"/>
+            <a:ext cx="658368" cy="256032"/>
+          </a:xfrm>
+          <a:prstGeom prst="roundRect">
+            <a:avLst/>
+          </a:prstGeom>
+          <a:solidFill>
+            <a:srgbClr val="0B7890"/>
+          </a:solidFill>
+          <a:ln w="8890">
+            <a:solidFill>
+              <a:srgbClr val="0B7890"/>
+            </a:solidFill>
+            <a:prstDash val="solid"/>
+          </a:ln>
+        </p:spPr>
+      </p:sp>
+      <p:sp>
+        <p:nvSpPr>
+          <p:cNvPr id="32" name="Text 30"/>
+          <p:cNvSpPr/>
+          <p:nvPr/>
+        </p:nvSpPr>
+        <p:spPr>
+          <a:xfrm>
+            <a:off x="6473952" y="1623060"/>
+            <a:ext cx="658368" cy="91440"/>
+          </a:xfrm>
+          <a:prstGeom prst="rect">
+            <a:avLst/>
+          </a:prstGeom>
+          <a:noFill/>
+          <a:ln/>
+        </p:spPr>
+        <p:txBody>
+          <a:bodyPr wrap="square" lIns="0" tIns="0" rIns="0" bIns="0" rtlCol="0" anchor="ctr">
+            <a:normAutofit/>
+          </a:bodyPr>
+          <a:lstStyle/>
+          <a:p>
+            <a:pPr algn="ctr" indent="0" marL="0">
+              <a:buNone/>
+            </a:pPr>
+            <a:r>
+              <a:rPr lang="en-US" sz="820" b="1" dirty="0">
+                <a:solidFill>
+                  <a:srgbClr val="FFFFFF"/>
+                </a:solidFill>
+                <a:latin typeface="Apple SD Gothic Neo" pitchFamily="34" charset="0"/>
+                <a:ea typeface="Apple SD Gothic Neo" pitchFamily="34" charset="-122"/>
+                <a:cs typeface="Apple SD Gothic Neo" pitchFamily="34" charset="-120"/>
+              </a:rPr>
+              <a:t>C-006</a:t>
+            </a:r>
+            <a:endParaRPr lang="en-US" sz="820" dirty="0"/>
+          </a:p>
+        </p:txBody>
+      </p:sp>
+      <p:sp>
+        <p:nvSpPr>
+          <p:cNvPr id="33" name="Text 31"/>
+          <p:cNvSpPr/>
+          <p:nvPr/>
+        </p:nvSpPr>
+        <p:spPr>
+          <a:xfrm>
+            <a:off x="7287768" y="1563624"/>
+            <a:ext cx="3566160" cy="137160"/>
           </a:xfrm>
           <a:prstGeom prst="rect">
             <a:avLst/>
@@ -8135,32 +9552,246 @@
               <a:buNone/>
             </a:pPr>
             <a:r>
-              <a:rPr lang="en-US" sz="880" b="1" dirty="0">
-                <a:solidFill>
-                  <a:srgbClr val="0B7890"/>
-                </a:solidFill>
-                <a:latin typeface="Apple SD Gothic Neo" pitchFamily="34" charset="0"/>
-                <a:ea typeface="Apple SD Gothic Neo" pitchFamily="34" charset="-122"/>
-                <a:cs typeface="Apple SD Gothic Neo" pitchFamily="34" charset="-120"/>
-              </a:rPr>
-              <a:t>C-002</a:t>
-            </a:r>
-            <a:endParaRPr lang="en-US" sz="880" dirty="0"/>
-          </a:p>
-        </p:txBody>
-      </p:sp>
-      <p:sp>
-        <p:nvSpPr>
-          <p:cNvPr id="19" name="Shape 17"/>
-          <p:cNvSpPr/>
-          <p:nvPr/>
-        </p:nvSpPr>
-        <p:spPr>
-          <a:xfrm>
-            <a:off x="1828800" y="2267712"/>
-            <a:ext cx="5074920" cy="384048"/>
-          </a:xfrm>
-          <a:prstGeom prst="rect">
+              <a:rPr lang="en-US" sz="1090" b="1" dirty="0">
+                <a:solidFill>
+                  <a:srgbClr val="14273A"/>
+                </a:solidFill>
+                <a:latin typeface="Apple SD Gothic Neo" pitchFamily="34" charset="0"/>
+                <a:ea typeface="Apple SD Gothic Neo" pitchFamily="34" charset="-122"/>
+                <a:cs typeface="Apple SD Gothic Neo" pitchFamily="34" charset="-120"/>
+              </a:rPr>
+              <a:t>K/D/E와 Result profile은 구현 전 version-fixed profile이 필요하다</a:t>
+            </a:r>
+            <a:endParaRPr lang="en-US" sz="1090" dirty="0"/>
+          </a:p>
+        </p:txBody>
+      </p:sp>
+      <p:sp>
+        <p:nvSpPr>
+          <p:cNvPr id="34" name="Text 32"/>
+          <p:cNvSpPr/>
+          <p:nvPr/>
+        </p:nvSpPr>
+        <p:spPr>
+          <a:xfrm>
+            <a:off x="10753344" y="1572768"/>
+            <a:ext cx="594360" cy="118872"/>
+          </a:xfrm>
+          <a:prstGeom prst="rect">
+            <a:avLst/>
+          </a:prstGeom>
+          <a:noFill/>
+          <a:ln/>
+        </p:spPr>
+        <p:txBody>
+          <a:bodyPr wrap="square" lIns="0" tIns="0" rIns="0" bIns="0" rtlCol="0" anchor="ctr">
+            <a:normAutofit/>
+          </a:bodyPr>
+          <a:lstStyle/>
+          <a:p>
+            <a:pPr algn="r" indent="0" marL="0">
+              <a:buNone/>
+            </a:pPr>
+            <a:r>
+              <a:rPr lang="en-US" sz="850" dirty="0">
+                <a:solidFill>
+                  <a:srgbClr val="526B84"/>
+                </a:solidFill>
+                <a:latin typeface="Apple SD Gothic Neo" pitchFamily="34" charset="0"/>
+                <a:ea typeface="Apple SD Gothic Neo" pitchFamily="34" charset="-122"/>
+                <a:cs typeface="Apple SD Gothic Neo" pitchFamily="34" charset="-120"/>
+              </a:rPr>
+              <a:t>slide 07–09</a:t>
+            </a:r>
+            <a:endParaRPr lang="en-US" sz="850" dirty="0"/>
+          </a:p>
+        </p:txBody>
+      </p:sp>
+      <p:sp>
+        <p:nvSpPr>
+          <p:cNvPr id="35" name="Shape 33"/>
+          <p:cNvSpPr/>
+          <p:nvPr/>
+        </p:nvSpPr>
+        <p:spPr>
+          <a:xfrm>
+            <a:off x="6327648" y="2194560"/>
+            <a:ext cx="5212080" cy="658368"/>
+          </a:xfrm>
+          <a:prstGeom prst="roundRect">
+            <a:avLst/>
+          </a:prstGeom>
+          <a:solidFill>
+            <a:srgbClr val="FFFFFF"/>
+          </a:solidFill>
+          <a:ln w="8890">
+            <a:solidFill>
+              <a:srgbClr val="FFFFFF"/>
+            </a:solidFill>
+            <a:prstDash val="solid"/>
+          </a:ln>
+        </p:spPr>
+      </p:sp>
+      <p:sp>
+        <p:nvSpPr>
+          <p:cNvPr id="36" name="Shape 34"/>
+          <p:cNvSpPr/>
+          <p:nvPr/>
+        </p:nvSpPr>
+        <p:spPr>
+          <a:xfrm>
+            <a:off x="6473952" y="2395728"/>
+            <a:ext cx="658368" cy="256032"/>
+          </a:xfrm>
+          <a:prstGeom prst="roundRect">
+            <a:avLst/>
+          </a:prstGeom>
+          <a:solidFill>
+            <a:srgbClr val="0B7890"/>
+          </a:solidFill>
+          <a:ln w="8890">
+            <a:solidFill>
+              <a:srgbClr val="0B7890"/>
+            </a:solidFill>
+            <a:prstDash val="solid"/>
+          </a:ln>
+        </p:spPr>
+      </p:sp>
+      <p:sp>
+        <p:nvSpPr>
+          <p:cNvPr id="37" name="Text 35"/>
+          <p:cNvSpPr/>
+          <p:nvPr/>
+        </p:nvSpPr>
+        <p:spPr>
+          <a:xfrm>
+            <a:off x="6473952" y="2464308"/>
+            <a:ext cx="658368" cy="91440"/>
+          </a:xfrm>
+          <a:prstGeom prst="rect">
+            <a:avLst/>
+          </a:prstGeom>
+          <a:noFill/>
+          <a:ln/>
+        </p:spPr>
+        <p:txBody>
+          <a:bodyPr wrap="square" lIns="0" tIns="0" rIns="0" bIns="0" rtlCol="0" anchor="ctr">
+            <a:normAutofit/>
+          </a:bodyPr>
+          <a:lstStyle/>
+          <a:p>
+            <a:pPr algn="ctr" indent="0" marL="0">
+              <a:buNone/>
+            </a:pPr>
+            <a:r>
+              <a:rPr lang="en-US" sz="820" b="1" dirty="0">
+                <a:solidFill>
+                  <a:srgbClr val="FFFFFF"/>
+                </a:solidFill>
+                <a:latin typeface="Apple SD Gothic Neo" pitchFamily="34" charset="0"/>
+                <a:ea typeface="Apple SD Gothic Neo" pitchFamily="34" charset="-122"/>
+                <a:cs typeface="Apple SD Gothic Neo" pitchFamily="34" charset="-120"/>
+              </a:rPr>
+              <a:t>C-007</a:t>
+            </a:r>
+            <a:endParaRPr lang="en-US" sz="820" dirty="0"/>
+          </a:p>
+        </p:txBody>
+      </p:sp>
+      <p:sp>
+        <p:nvSpPr>
+          <p:cNvPr id="38" name="Text 36"/>
+          <p:cNvSpPr/>
+          <p:nvPr/>
+        </p:nvSpPr>
+        <p:spPr>
+          <a:xfrm>
+            <a:off x="7287768" y="2404872"/>
+            <a:ext cx="3566160" cy="137160"/>
+          </a:xfrm>
+          <a:prstGeom prst="rect">
+            <a:avLst/>
+          </a:prstGeom>
+          <a:noFill/>
+          <a:ln/>
+        </p:spPr>
+        <p:txBody>
+          <a:bodyPr wrap="square" lIns="0" tIns="0" rIns="0" bIns="0" rtlCol="0" anchor="ctr">
+            <a:normAutofit/>
+          </a:bodyPr>
+          <a:lstStyle/>
+          <a:p>
+            <a:pPr indent="0" marL="0">
+              <a:buNone/>
+            </a:pPr>
+            <a:r>
+              <a:rPr lang="en-US" sz="1090" b="1" dirty="0">
+                <a:solidFill>
+                  <a:srgbClr val="14273A"/>
+                </a:solidFill>
+                <a:latin typeface="Apple SD Gothic Neo" pitchFamily="34" charset="0"/>
+                <a:ea typeface="Apple SD Gothic Neo" pitchFamily="34" charset="-122"/>
+                <a:cs typeface="Apple SD Gothic Neo" pitchFamily="34" charset="-120"/>
+              </a:rPr>
+              <a:t>Quote/Result는 security proof의 일부이지 모든 property의 증명은 아니다</a:t>
+            </a:r>
+            <a:endParaRPr lang="en-US" sz="1090" dirty="0"/>
+          </a:p>
+        </p:txBody>
+      </p:sp>
+      <p:sp>
+        <p:nvSpPr>
+          <p:cNvPr id="39" name="Text 37"/>
+          <p:cNvSpPr/>
+          <p:nvPr/>
+        </p:nvSpPr>
+        <p:spPr>
+          <a:xfrm>
+            <a:off x="10753344" y="2414016"/>
+            <a:ext cx="594360" cy="118872"/>
+          </a:xfrm>
+          <a:prstGeom prst="rect">
+            <a:avLst/>
+          </a:prstGeom>
+          <a:noFill/>
+          <a:ln/>
+        </p:spPr>
+        <p:txBody>
+          <a:bodyPr wrap="square" lIns="0" tIns="0" rIns="0" bIns="0" rtlCol="0" anchor="ctr">
+            <a:normAutofit/>
+          </a:bodyPr>
+          <a:lstStyle/>
+          <a:p>
+            <a:pPr algn="r" indent="0" marL="0">
+              <a:buNone/>
+            </a:pPr>
+            <a:r>
+              <a:rPr lang="en-US" sz="850" dirty="0">
+                <a:solidFill>
+                  <a:srgbClr val="526B84"/>
+                </a:solidFill>
+                <a:latin typeface="Apple SD Gothic Neo" pitchFamily="34" charset="0"/>
+                <a:ea typeface="Apple SD Gothic Neo" pitchFamily="34" charset="-122"/>
+                <a:cs typeface="Apple SD Gothic Neo" pitchFamily="34" charset="-120"/>
+              </a:rPr>
+              <a:t>slide 11</a:t>
+            </a:r>
+            <a:endParaRPr lang="en-US" sz="850" dirty="0"/>
+          </a:p>
+        </p:txBody>
+      </p:sp>
+      <p:sp>
+        <p:nvSpPr>
+          <p:cNvPr id="40" name="Shape 38"/>
+          <p:cNvSpPr/>
+          <p:nvPr/>
+        </p:nvSpPr>
+        <p:spPr>
+          <a:xfrm>
+            <a:off x="6327648" y="3035808"/>
+            <a:ext cx="5212080" cy="658368"/>
+          </a:xfrm>
+          <a:prstGeom prst="roundRect">
             <a:avLst/>
           </a:prstGeom>
           <a:solidFill>
@@ -8176,14 +9807,80 @@
       </p:sp>
       <p:sp>
         <p:nvSpPr>
-          <p:cNvPr id="20" name="Text 18"/>
-          <p:cNvSpPr/>
-          <p:nvPr/>
-        </p:nvSpPr>
-        <p:spPr>
-          <a:xfrm>
-            <a:off x="1920240" y="2395728"/>
-            <a:ext cx="4892040" cy="91440"/>
+          <p:cNvPr id="41" name="Shape 39"/>
+          <p:cNvSpPr/>
+          <p:nvPr/>
+        </p:nvSpPr>
+        <p:spPr>
+          <a:xfrm>
+            <a:off x="6473952" y="3236976"/>
+            <a:ext cx="658368" cy="256032"/>
+          </a:xfrm>
+          <a:prstGeom prst="roundRect">
+            <a:avLst/>
+          </a:prstGeom>
+          <a:solidFill>
+            <a:srgbClr val="0B7890"/>
+          </a:solidFill>
+          <a:ln w="8890">
+            <a:solidFill>
+              <a:srgbClr val="0B7890"/>
+            </a:solidFill>
+            <a:prstDash val="solid"/>
+          </a:ln>
+        </p:spPr>
+      </p:sp>
+      <p:sp>
+        <p:nvSpPr>
+          <p:cNvPr id="42" name="Text 40"/>
+          <p:cNvSpPr/>
+          <p:nvPr/>
+        </p:nvSpPr>
+        <p:spPr>
+          <a:xfrm>
+            <a:off x="6473952" y="3305556"/>
+            <a:ext cx="658368" cy="91440"/>
+          </a:xfrm>
+          <a:prstGeom prst="rect">
+            <a:avLst/>
+          </a:prstGeom>
+          <a:noFill/>
+          <a:ln/>
+        </p:spPr>
+        <p:txBody>
+          <a:bodyPr wrap="square" lIns="0" tIns="0" rIns="0" bIns="0" rtlCol="0" anchor="ctr">
+            <a:normAutofit/>
+          </a:bodyPr>
+          <a:lstStyle/>
+          <a:p>
+            <a:pPr algn="ctr" indent="0" marL="0">
+              <a:buNone/>
+            </a:pPr>
+            <a:r>
+              <a:rPr lang="en-US" sz="820" b="1" dirty="0">
+                <a:solidFill>
+                  <a:srgbClr val="FFFFFF"/>
+                </a:solidFill>
+                <a:latin typeface="Apple SD Gothic Neo" pitchFamily="34" charset="0"/>
+                <a:ea typeface="Apple SD Gothic Neo" pitchFamily="34" charset="-122"/>
+                <a:cs typeface="Apple SD Gothic Neo" pitchFamily="34" charset="-120"/>
+              </a:rPr>
+              <a:t>C-008</a:t>
+            </a:r>
+            <a:endParaRPr lang="en-US" sz="820" dirty="0"/>
+          </a:p>
+        </p:txBody>
+      </p:sp>
+      <p:sp>
+        <p:nvSpPr>
+          <p:cNvPr id="43" name="Text 41"/>
+          <p:cNvSpPr/>
+          <p:nvPr/>
+        </p:nvSpPr>
+        <p:spPr>
+          <a:xfrm>
+            <a:off x="7287768" y="3246120"/>
+            <a:ext cx="3566160" cy="137160"/>
           </a:xfrm>
           <a:prstGeom prst="rect">
             <a:avLst/>
@@ -8201,7 +9898,7 @@
               <a:buNone/>
             </a:pPr>
             <a:r>
-              <a:rPr lang="en-US" sz="920" dirty="0">
+              <a:rPr lang="en-US" sz="1090" b="1" dirty="0">
                 <a:solidFill>
                   <a:srgbClr val="14273A"/>
                 </a:solidFill>
@@ -8209,24 +9906,238 @@
                 <a:ea typeface="Apple SD Gothic Neo" pitchFamily="34" charset="-122"/>
                 <a:cs typeface="Apple SD Gothic Neo" pitchFamily="34" charset="-120"/>
               </a:rPr>
-              <a:t>actors / trust roles</a:t>
-            </a:r>
-            <a:endParaRPr lang="en-US" sz="920" dirty="0"/>
-          </a:p>
-        </p:txBody>
-      </p:sp>
-      <p:sp>
-        <p:nvSpPr>
-          <p:cNvPr id="21" name="Shape 19"/>
-          <p:cNvSpPr/>
-          <p:nvPr/>
-        </p:nvSpPr>
-        <p:spPr>
-          <a:xfrm>
-            <a:off x="7223760" y="2267712"/>
-            <a:ext cx="4023360" cy="384048"/>
-          </a:xfrm>
-          <a:prstGeom prst="rect">
+              <a:t>Intel-rats는 학습 자료이며 운영 implementation 기준은 아니다</a:t>
+            </a:r>
+            <a:endParaRPr lang="en-US" sz="1090" dirty="0"/>
+          </a:p>
+        </p:txBody>
+      </p:sp>
+      <p:sp>
+        <p:nvSpPr>
+          <p:cNvPr id="44" name="Text 42"/>
+          <p:cNvSpPr/>
+          <p:nvPr/>
+        </p:nvSpPr>
+        <p:spPr>
+          <a:xfrm>
+            <a:off x="10753344" y="3255264"/>
+            <a:ext cx="594360" cy="118872"/>
+          </a:xfrm>
+          <a:prstGeom prst="rect">
+            <a:avLst/>
+          </a:prstGeom>
+          <a:noFill/>
+          <a:ln/>
+        </p:spPr>
+        <p:txBody>
+          <a:bodyPr wrap="square" lIns="0" tIns="0" rIns="0" bIns="0" rtlCol="0" anchor="ctr">
+            <a:normAutofit/>
+          </a:bodyPr>
+          <a:lstStyle/>
+          <a:p>
+            <a:pPr algn="r" indent="0" marL="0">
+              <a:buNone/>
+            </a:pPr>
+            <a:r>
+              <a:rPr lang="en-US" sz="850" dirty="0">
+                <a:solidFill>
+                  <a:srgbClr val="526B84"/>
+                </a:solidFill>
+                <a:latin typeface="Apple SD Gothic Neo" pitchFamily="34" charset="0"/>
+                <a:ea typeface="Apple SD Gothic Neo" pitchFamily="34" charset="-122"/>
+                <a:cs typeface="Apple SD Gothic Neo" pitchFamily="34" charset="-120"/>
+              </a:rPr>
+              <a:t>slide 12</a:t>
+            </a:r>
+            <a:endParaRPr lang="en-US" sz="850" dirty="0"/>
+          </a:p>
+        </p:txBody>
+      </p:sp>
+      <p:sp>
+        <p:nvSpPr>
+          <p:cNvPr id="45" name="Shape 43"/>
+          <p:cNvSpPr/>
+          <p:nvPr/>
+        </p:nvSpPr>
+        <p:spPr>
+          <a:xfrm>
+            <a:off x="6327648" y="3877056"/>
+            <a:ext cx="5212080" cy="658368"/>
+          </a:xfrm>
+          <a:prstGeom prst="roundRect">
+            <a:avLst/>
+          </a:prstGeom>
+          <a:solidFill>
+            <a:srgbClr val="FFFFFF"/>
+          </a:solidFill>
+          <a:ln w="8890">
+            <a:solidFill>
+              <a:srgbClr val="FFFFFF"/>
+            </a:solidFill>
+            <a:prstDash val="solid"/>
+          </a:ln>
+        </p:spPr>
+      </p:sp>
+      <p:sp>
+        <p:nvSpPr>
+          <p:cNvPr id="46" name="Shape 44"/>
+          <p:cNvSpPr/>
+          <p:nvPr/>
+        </p:nvSpPr>
+        <p:spPr>
+          <a:xfrm>
+            <a:off x="6473952" y="4078224"/>
+            <a:ext cx="658368" cy="256032"/>
+          </a:xfrm>
+          <a:prstGeom prst="roundRect">
+            <a:avLst/>
+          </a:prstGeom>
+          <a:solidFill>
+            <a:srgbClr val="0B7890"/>
+          </a:solidFill>
+          <a:ln w="8890">
+            <a:solidFill>
+              <a:srgbClr val="0B7890"/>
+            </a:solidFill>
+            <a:prstDash val="solid"/>
+          </a:ln>
+        </p:spPr>
+      </p:sp>
+      <p:sp>
+        <p:nvSpPr>
+          <p:cNvPr id="47" name="Text 45"/>
+          <p:cNvSpPr/>
+          <p:nvPr/>
+        </p:nvSpPr>
+        <p:spPr>
+          <a:xfrm>
+            <a:off x="6473952" y="4146804"/>
+            <a:ext cx="658368" cy="91440"/>
+          </a:xfrm>
+          <a:prstGeom prst="rect">
+            <a:avLst/>
+          </a:prstGeom>
+          <a:noFill/>
+          <a:ln/>
+        </p:spPr>
+        <p:txBody>
+          <a:bodyPr wrap="square" lIns="0" tIns="0" rIns="0" bIns="0" rtlCol="0" anchor="ctr">
+            <a:normAutofit/>
+          </a:bodyPr>
+          <a:lstStyle/>
+          <a:p>
+            <a:pPr algn="ctr" indent="0" marL="0">
+              <a:buNone/>
+            </a:pPr>
+            <a:r>
+              <a:rPr lang="en-US" sz="820" b="1" dirty="0">
+                <a:solidFill>
+                  <a:srgbClr val="FFFFFF"/>
+                </a:solidFill>
+                <a:latin typeface="Apple SD Gothic Neo" pitchFamily="34" charset="0"/>
+                <a:ea typeface="Apple SD Gothic Neo" pitchFamily="34" charset="-122"/>
+                <a:cs typeface="Apple SD Gothic Neo" pitchFamily="34" charset="-120"/>
+              </a:rPr>
+              <a:t>C-009</a:t>
+            </a:r>
+            <a:endParaRPr lang="en-US" sz="820" dirty="0"/>
+          </a:p>
+        </p:txBody>
+      </p:sp>
+      <p:sp>
+        <p:nvSpPr>
+          <p:cNvPr id="48" name="Text 46"/>
+          <p:cNvSpPr/>
+          <p:nvPr/>
+        </p:nvSpPr>
+        <p:spPr>
+          <a:xfrm>
+            <a:off x="7287768" y="4087368"/>
+            <a:ext cx="3566160" cy="137160"/>
+          </a:xfrm>
+          <a:prstGeom prst="rect">
+            <a:avLst/>
+          </a:prstGeom>
+          <a:noFill/>
+          <a:ln/>
+        </p:spPr>
+        <p:txBody>
+          <a:bodyPr wrap="square" lIns="0" tIns="0" rIns="0" bIns="0" rtlCol="0" anchor="ctr">
+            <a:normAutofit/>
+          </a:bodyPr>
+          <a:lstStyle/>
+          <a:p>
+            <a:pPr indent="0" marL="0">
+              <a:buNone/>
+            </a:pPr>
+            <a:r>
+              <a:rPr lang="en-US" sz="1090" b="1" dirty="0">
+                <a:solidFill>
+                  <a:srgbClr val="14273A"/>
+                </a:solidFill>
+                <a:latin typeface="Apple SD Gothic Neo" pitchFamily="34" charset="0"/>
+                <a:ea typeface="Apple SD Gothic Neo" pitchFamily="34" charset="-122"/>
+                <a:cs typeface="Apple SD Gothic Neo" pitchFamily="34" charset="-120"/>
+              </a:rPr>
+              <a:t>TDX Quote는 TD/VM scope이지 container identity가 아니다</a:t>
+            </a:r>
+            <a:endParaRPr lang="en-US" sz="1090" dirty="0"/>
+          </a:p>
+        </p:txBody>
+      </p:sp>
+      <p:sp>
+        <p:nvSpPr>
+          <p:cNvPr id="49" name="Text 47"/>
+          <p:cNvSpPr/>
+          <p:nvPr/>
+        </p:nvSpPr>
+        <p:spPr>
+          <a:xfrm>
+            <a:off x="10753344" y="4096512"/>
+            <a:ext cx="594360" cy="118872"/>
+          </a:xfrm>
+          <a:prstGeom prst="rect">
+            <a:avLst/>
+          </a:prstGeom>
+          <a:noFill/>
+          <a:ln/>
+        </p:spPr>
+        <p:txBody>
+          <a:bodyPr wrap="square" lIns="0" tIns="0" rIns="0" bIns="0" rtlCol="0" anchor="ctr">
+            <a:normAutofit/>
+          </a:bodyPr>
+          <a:lstStyle/>
+          <a:p>
+            <a:pPr algn="r" indent="0" marL="0">
+              <a:buNone/>
+            </a:pPr>
+            <a:r>
+              <a:rPr lang="en-US" sz="850" dirty="0">
+                <a:solidFill>
+                  <a:srgbClr val="526B84"/>
+                </a:solidFill>
+                <a:latin typeface="Apple SD Gothic Neo" pitchFamily="34" charset="0"/>
+                <a:ea typeface="Apple SD Gothic Neo" pitchFamily="34" charset="-122"/>
+                <a:cs typeface="Apple SD Gothic Neo" pitchFamily="34" charset="-120"/>
+              </a:rPr>
+              <a:t>slide 13</a:t>
+            </a:r>
+            <a:endParaRPr lang="en-US" sz="850" dirty="0"/>
+          </a:p>
+        </p:txBody>
+      </p:sp>
+      <p:sp>
+        <p:nvSpPr>
+          <p:cNvPr id="50" name="Shape 48"/>
+          <p:cNvSpPr/>
+          <p:nvPr/>
+        </p:nvSpPr>
+        <p:spPr>
+          <a:xfrm>
+            <a:off x="6327648" y="4718304"/>
+            <a:ext cx="5212080" cy="658368"/>
+          </a:xfrm>
+          <a:prstGeom prst="roundRect">
             <a:avLst/>
           </a:prstGeom>
           <a:solidFill>
@@ -8242,14 +10153,80 @@
       </p:sp>
       <p:sp>
         <p:nvSpPr>
-          <p:cNvPr id="22" name="Text 20"/>
-          <p:cNvSpPr/>
-          <p:nvPr/>
-        </p:nvSpPr>
-        <p:spPr>
-          <a:xfrm>
-            <a:off x="7315200" y="2395728"/>
-            <a:ext cx="3840480" cy="91440"/>
+          <p:cNvPr id="51" name="Shape 49"/>
+          <p:cNvSpPr/>
+          <p:nvPr/>
+        </p:nvSpPr>
+        <p:spPr>
+          <a:xfrm>
+            <a:off x="6473952" y="4919472"/>
+            <a:ext cx="658368" cy="256032"/>
+          </a:xfrm>
+          <a:prstGeom prst="roundRect">
+            <a:avLst/>
+          </a:prstGeom>
+          <a:solidFill>
+            <a:srgbClr val="0B7890"/>
+          </a:solidFill>
+          <a:ln w="8890">
+            <a:solidFill>
+              <a:srgbClr val="0B7890"/>
+            </a:solidFill>
+            <a:prstDash val="solid"/>
+          </a:ln>
+        </p:spPr>
+      </p:sp>
+      <p:sp>
+        <p:nvSpPr>
+          <p:cNvPr id="52" name="Text 50"/>
+          <p:cNvSpPr/>
+          <p:nvPr/>
+        </p:nvSpPr>
+        <p:spPr>
+          <a:xfrm>
+            <a:off x="6473952" y="4988052"/>
+            <a:ext cx="658368" cy="91440"/>
+          </a:xfrm>
+          <a:prstGeom prst="rect">
+            <a:avLst/>
+          </a:prstGeom>
+          <a:noFill/>
+          <a:ln/>
+        </p:spPr>
+        <p:txBody>
+          <a:bodyPr wrap="square" lIns="0" tIns="0" rIns="0" bIns="0" rtlCol="0" anchor="ctr">
+            <a:normAutofit/>
+          </a:bodyPr>
+          <a:lstStyle/>
+          <a:p>
+            <a:pPr algn="ctr" indent="0" marL="0">
+              <a:buNone/>
+            </a:pPr>
+            <a:r>
+              <a:rPr lang="en-US" sz="820" b="1" dirty="0">
+                <a:solidFill>
+                  <a:srgbClr val="FFFFFF"/>
+                </a:solidFill>
+                <a:latin typeface="Apple SD Gothic Neo" pitchFamily="34" charset="0"/>
+                <a:ea typeface="Apple SD Gothic Neo" pitchFamily="34" charset="-122"/>
+                <a:cs typeface="Apple SD Gothic Neo" pitchFamily="34" charset="-120"/>
+              </a:rPr>
+              <a:t>C-010</a:t>
+            </a:r>
+            <a:endParaRPr lang="en-US" sz="820" dirty="0"/>
+          </a:p>
+        </p:txBody>
+      </p:sp>
+      <p:sp>
+        <p:nvSpPr>
+          <p:cNvPr id="53" name="Text 51"/>
+          <p:cNvSpPr/>
+          <p:nvPr/>
+        </p:nvSpPr>
+        <p:spPr>
+          <a:xfrm>
+            <a:off x="7287768" y="4928616"/>
+            <a:ext cx="3566160" cy="137160"/>
           </a:xfrm>
           <a:prstGeom prst="rect">
             <a:avLst/>
@@ -8267,7 +10244,7 @@
               <a:buNone/>
             </a:pPr>
             <a:r>
-              <a:rPr lang="en-US" sz="880" dirty="0">
+              <a:rPr lang="en-US" sz="1090" b="1" dirty="0">
                 <a:solidFill>
                   <a:srgbClr val="14273A"/>
                 </a:solidFill>
@@ -8275,24 +10252,523 @@
                 <a:ea typeface="Apple SD Gothic Neo" pitchFamily="34" charset="-122"/>
                 <a:cs typeface="Apple SD Gothic Neo" pitchFamily="34" charset="-120"/>
               </a:rPr>
-              <a:t>02, 05, 10</a:t>
-            </a:r>
-            <a:endParaRPr lang="en-US" sz="880" dirty="0"/>
-          </a:p>
-        </p:txBody>
-      </p:sp>
-      <p:sp>
-        <p:nvSpPr>
-          <p:cNvPr id="23" name="Shape 21"/>
-          <p:cNvSpPr/>
-          <p:nvPr/>
-        </p:nvSpPr>
-        <p:spPr>
-          <a:xfrm>
-            <a:off x="658368" y="2660904"/>
-            <a:ext cx="868680" cy="384048"/>
-          </a:xfrm>
-          <a:prstGeom prst="rect">
+              <a:t>단일 revocable pilot과 책임·SLO·negative gate가 먼저다</a:t>
+            </a:r>
+            <a:endParaRPr lang="en-US" sz="1090" dirty="0"/>
+          </a:p>
+        </p:txBody>
+      </p:sp>
+      <p:sp>
+        <p:nvSpPr>
+          <p:cNvPr id="54" name="Text 52"/>
+          <p:cNvSpPr/>
+          <p:nvPr/>
+        </p:nvSpPr>
+        <p:spPr>
+          <a:xfrm>
+            <a:off x="10753344" y="4937760"/>
+            <a:ext cx="594360" cy="118872"/>
+          </a:xfrm>
+          <a:prstGeom prst="rect">
+            <a:avLst/>
+          </a:prstGeom>
+          <a:noFill/>
+          <a:ln/>
+        </p:spPr>
+        <p:txBody>
+          <a:bodyPr wrap="square" lIns="0" tIns="0" rIns="0" bIns="0" rtlCol="0" anchor="ctr">
+            <a:normAutofit/>
+          </a:bodyPr>
+          <a:lstStyle/>
+          <a:p>
+            <a:pPr algn="r" indent="0" marL="0">
+              <a:buNone/>
+            </a:pPr>
+            <a:r>
+              <a:rPr lang="en-US" sz="850" dirty="0">
+                <a:solidFill>
+                  <a:srgbClr val="526B84"/>
+                </a:solidFill>
+                <a:latin typeface="Apple SD Gothic Neo" pitchFamily="34" charset="0"/>
+                <a:ea typeface="Apple SD Gothic Neo" pitchFamily="34" charset="-122"/>
+                <a:cs typeface="Apple SD Gothic Neo" pitchFamily="34" charset="-120"/>
+              </a:rPr>
+              <a:t>slide 14</a:t>
+            </a:r>
+            <a:endParaRPr lang="en-US" sz="850" dirty="0"/>
+          </a:p>
+        </p:txBody>
+      </p:sp>
+      <p:sp>
+        <p:nvSpPr>
+          <p:cNvPr id="55" name="Shape 53"/>
+          <p:cNvSpPr/>
+          <p:nvPr/>
+        </p:nvSpPr>
+        <p:spPr>
+          <a:xfrm>
+            <a:off x="658368" y="5715000"/>
+            <a:ext cx="10835640" cy="438912"/>
+          </a:xfrm>
+          <a:prstGeom prst="roundRect">
+            <a:avLst/>
+          </a:prstGeom>
+          <a:solidFill>
+            <a:srgbClr val="FFF7E6"/>
+          </a:solidFill>
+          <a:ln w="8890">
+            <a:solidFill>
+              <a:srgbClr val="FFF7E6"/>
+            </a:solidFill>
+            <a:prstDash val="solid"/>
+          </a:ln>
+        </p:spPr>
+      </p:sp>
+      <p:sp>
+        <p:nvSpPr>
+          <p:cNvPr id="56" name="Shape 54"/>
+          <p:cNvSpPr/>
+          <p:nvPr/>
+        </p:nvSpPr>
+        <p:spPr>
+          <a:xfrm>
+            <a:off x="822960" y="5879592"/>
+            <a:ext cx="822960" cy="256032"/>
+          </a:xfrm>
+          <a:prstGeom prst="roundRect">
+            <a:avLst/>
+          </a:prstGeom>
+          <a:solidFill>
+            <a:srgbClr val="9A6500"/>
+          </a:solidFill>
+          <a:ln w="8890">
+            <a:solidFill>
+              <a:srgbClr val="9A6500"/>
+            </a:solidFill>
+            <a:prstDash val="solid"/>
+          </a:ln>
+        </p:spPr>
+      </p:sp>
+      <p:sp>
+        <p:nvSpPr>
+          <p:cNvPr id="57" name="Text 55"/>
+          <p:cNvSpPr/>
+          <p:nvPr/>
+        </p:nvSpPr>
+        <p:spPr>
+          <a:xfrm>
+            <a:off x="822960" y="5948172"/>
+            <a:ext cx="822960" cy="91440"/>
+          </a:xfrm>
+          <a:prstGeom prst="rect">
+            <a:avLst/>
+          </a:prstGeom>
+          <a:noFill/>
+          <a:ln/>
+        </p:spPr>
+        <p:txBody>
+          <a:bodyPr wrap="square" lIns="0" tIns="0" rIns="0" bIns="0" rtlCol="0" anchor="ctr">
+            <a:normAutofit/>
+          </a:bodyPr>
+          <a:lstStyle/>
+          <a:p>
+            <a:pPr algn="ctr" indent="0" marL="0">
+              <a:buNone/>
+            </a:pPr>
+            <a:r>
+              <a:rPr lang="en-US" sz="820" b="1" dirty="0">
+                <a:solidFill>
+                  <a:srgbClr val="FFFFFF"/>
+                </a:solidFill>
+                <a:latin typeface="Apple SD Gothic Neo" pitchFamily="34" charset="0"/>
+                <a:ea typeface="Apple SD Gothic Neo" pitchFamily="34" charset="-122"/>
+                <a:cs typeface="Apple SD Gothic Neo" pitchFamily="34" charset="-120"/>
+              </a:rPr>
+              <a:t>audit locator</a:t>
+            </a:r>
+            <a:endParaRPr lang="en-US" sz="820" dirty="0"/>
+          </a:p>
+        </p:txBody>
+      </p:sp>
+      <p:sp>
+        <p:nvSpPr>
+          <p:cNvPr id="58" name="Text 56"/>
+          <p:cNvSpPr/>
+          <p:nvPr/>
+        </p:nvSpPr>
+        <p:spPr>
+          <a:xfrm>
+            <a:off x="1828800" y="5879592"/>
+            <a:ext cx="9482328" cy="237744"/>
+          </a:xfrm>
+          <a:prstGeom prst="rect">
+            <a:avLst/>
+          </a:prstGeom>
+          <a:noFill/>
+          <a:ln/>
+        </p:spPr>
+        <p:txBody>
+          <a:bodyPr wrap="square" lIns="0" tIns="0" rIns="0" bIns="0" rtlCol="0" anchor="ctr">
+            <a:normAutofit/>
+          </a:bodyPr>
+          <a:lstStyle/>
+          <a:p>
+            <a:pPr indent="0" marL="0">
+              <a:buNone/>
+            </a:pPr>
+            <a:r>
+              <a:rPr lang="en-US" sz="1330" dirty="0">
+                <a:solidFill>
+                  <a:srgbClr val="14273A"/>
+                </a:solidFill>
+                <a:latin typeface="Apple SD Gothic Neo" pitchFamily="34" charset="0"/>
+                <a:ea typeface="Apple SD Gothic Neo" pitchFamily="34" charset="-122"/>
+                <a:cs typeface="Apple SD Gothic Neo" pitchFamily="34" charset="-120"/>
+              </a:rPr>
+              <a:t>이 Appendix는 claim-level reader-visible trace다. model node/edge/boundary/context/state/proof/non-proof/implication/caveat/source marker의 exact location은 package JSON에서 재검증할 수 있다.</a:t>
+            </a:r>
+            <a:endParaRPr lang="en-US" sz="1330" dirty="0"/>
+          </a:p>
+        </p:txBody>
+      </p:sp>
+      <p:sp>
+        <p:nvSpPr>
+          <p:cNvPr id="59" name="Shape 57"/>
+          <p:cNvSpPr/>
+          <p:nvPr/>
+        </p:nvSpPr>
+        <p:spPr>
+          <a:xfrm>
+            <a:off x="502920" y="6345936"/>
+            <a:ext cx="11183112" cy="0"/>
+          </a:xfrm>
+          <a:prstGeom prst="line">
+            <a:avLst/>
+          </a:prstGeom>
+          <a:noFill/>
+          <a:ln w="6350">
+            <a:solidFill>
+              <a:srgbClr val="C9D6E3"/>
+            </a:solidFill>
+            <a:prstDash val="solid"/>
+          </a:ln>
+        </p:spPr>
+      </p:sp>
+      <p:sp>
+        <p:nvSpPr>
+          <p:cNvPr id="60" name="Text 58"/>
+          <p:cNvSpPr/>
+          <p:nvPr/>
+        </p:nvSpPr>
+        <p:spPr>
+          <a:xfrm>
+            <a:off x="502920" y="6473952"/>
+            <a:ext cx="7772400" cy="128016"/>
+          </a:xfrm>
+          <a:prstGeom prst="rect">
+            <a:avLst/>
+          </a:prstGeom>
+          <a:noFill/>
+          <a:ln/>
+        </p:spPr>
+        <p:txBody>
+          <a:bodyPr wrap="square" lIns="0" tIns="0" rIns="0" bIns="0" rtlCol="0" anchor="ctr">
+            <a:normAutofit/>
+          </a:bodyPr>
+          <a:lstStyle/>
+          <a:p>
+            <a:pPr indent="0" marL="0">
+              <a:buNone/>
+            </a:pPr>
+            <a:r>
+              <a:rPr lang="en-US" sz="780" dirty="0">
+                <a:solidFill>
+                  <a:srgbClr val="526B84"/>
+                </a:solidFill>
+                <a:latin typeface="Apple SD Gothic Neo" pitchFamily="34" charset="0"/>
+                <a:ea typeface="Apple SD Gothic Neo" pitchFamily="34" charset="-122"/>
+                <a:cs typeface="Apple SD Gothic Neo" pitchFamily="34" charset="-120"/>
+              </a:rPr>
+              <a:t>C-001–C-010 · prose trace · complete structural coverage</a:t>
+            </a:r>
+            <a:endParaRPr lang="en-US" sz="780" dirty="0"/>
+          </a:p>
+        </p:txBody>
+      </p:sp>
+      <p:sp>
+        <p:nvSpPr>
+          <p:cNvPr id="61" name="Text 59"/>
+          <p:cNvSpPr/>
+          <p:nvPr/>
+        </p:nvSpPr>
+        <p:spPr>
+          <a:xfrm>
+            <a:off x="7543800" y="6473952"/>
+            <a:ext cx="4114800" cy="128016"/>
+          </a:xfrm>
+          <a:prstGeom prst="rect">
+            <a:avLst/>
+          </a:prstGeom>
+          <a:noFill/>
+          <a:ln/>
+        </p:spPr>
+        <p:txBody>
+          <a:bodyPr wrap="square" lIns="0" tIns="0" rIns="0" bIns="0" rtlCol="0" anchor="ctr">
+            <a:normAutofit/>
+          </a:bodyPr>
+          <a:lstStyle/>
+          <a:p>
+            <a:pPr algn="r" indent="0" marL="0">
+              <a:buNone/>
+            </a:pPr>
+            <a:r>
+              <a:rPr lang="en-US" sz="780" dirty="0">
+                <a:solidFill>
+                  <a:srgbClr val="526B84"/>
+                </a:solidFill>
+                <a:latin typeface="Apple SD Gothic Neo" pitchFamily="34" charset="0"/>
+                <a:ea typeface="Apple SD Gothic Neo" pitchFamily="34" charset="-122"/>
+                <a:cs typeface="Apple SD Gothic Neo" pitchFamily="34" charset="-120"/>
+              </a:rPr>
+              <a:t>Source markers: 〔S-…〕 · Appendix 16</a:t>
+            </a:r>
+            <a:endParaRPr lang="en-US" sz="780" dirty="0"/>
+          </a:p>
+        </p:txBody>
+      </p:sp>
+    </p:spTree>
+  </p:cSld>
+  <p:clrMapOvr>
+    <a:masterClrMapping/>
+  </p:clrMapOvr>
+</p:sld>
+</file>
+
+<file path=ppt/slides/slide16.xml><?xml version="1.0" encoding="utf-8"?>
+<p:sld xmlns:a="http://schemas.openxmlformats.org/drawingml/2006/main" xmlns:r="http://schemas.openxmlformats.org/officeDocument/2006/relationships" xmlns:p="http://schemas.openxmlformats.org/presentationml/2006/main">
+  <p:cSld name="Slide 16">
+    <p:bg>
+      <p:bgPr>
+        <a:solidFill>
+          <a:srgbClr val="F6F8FB"/>
+        </a:solidFill>
+      </p:bgPr>
+    </p:bg>
+    <p:spTree>
+      <p:nvGrpSpPr>
+        <p:cNvPr id="1" name=""/>
+        <p:cNvGrpSpPr/>
+        <p:nvPr/>
+      </p:nvGrpSpPr>
+      <p:grpSpPr>
+        <a:xfrm>
+          <a:off x="0" y="0"/>
+          <a:ext cx="0" cy="0"/>
+          <a:chOff x="0" y="0"/>
+          <a:chExt cx="0" cy="0"/>
+        </a:xfrm>
+      </p:grpSpPr>
+      <p:sp>
+        <p:nvSpPr>
+          <p:cNvPr id="2" name="Text 0"/>
+          <p:cNvSpPr/>
+          <p:nvPr/>
+        </p:nvSpPr>
+        <p:spPr>
+          <a:xfrm>
+            <a:off x="502920" y="292608"/>
+            <a:ext cx="10515600" cy="420624"/>
+          </a:xfrm>
+          <a:prstGeom prst="rect">
+            <a:avLst/>
+          </a:prstGeom>
+          <a:noFill/>
+          <a:ln/>
+        </p:spPr>
+        <p:txBody>
+          <a:bodyPr wrap="square" lIns="0" tIns="0" rIns="0" bIns="0" rtlCol="0" anchor="ctr">
+            <a:normAutofit/>
+          </a:bodyPr>
+          <a:lstStyle/>
+          <a:p>
+            <a:pPr indent="0" marL="0">
+              <a:buNone/>
+            </a:pPr>
+            <a:r>
+              <a:rPr lang="en-US" sz="2900" b="1" dirty="0">
+                <a:solidFill>
+                  <a:srgbClr val="14273A"/>
+                </a:solidFill>
+                <a:latin typeface="Apple SD Gothic Neo" pitchFamily="34" charset="0"/>
+                <a:ea typeface="Apple SD Gothic Neo" pitchFamily="34" charset="-122"/>
+                <a:cs typeface="Apple SD Gothic Neo" pitchFamily="34" charset="-120"/>
+              </a:rPr>
+              <a:t>Appendix: canonical Point hash와 〔S-…〕 source marker를 독자에게 보이게 한다</a:t>
+            </a:r>
+            <a:endParaRPr lang="en-US" sz="2900" dirty="0"/>
+          </a:p>
+        </p:txBody>
+      </p:sp>
+      <p:sp>
+        <p:nvSpPr>
+          <p:cNvPr id="3" name="Text 1"/>
+          <p:cNvSpPr/>
+          <p:nvPr/>
+        </p:nvSpPr>
+        <p:spPr>
+          <a:xfrm>
+            <a:off x="521208" y="832104"/>
+            <a:ext cx="10607040" cy="274320"/>
+          </a:xfrm>
+          <a:prstGeom prst="rect">
+            <a:avLst/>
+          </a:prstGeom>
+          <a:noFill/>
+          <a:ln/>
+        </p:spPr>
+        <p:txBody>
+          <a:bodyPr wrap="square" lIns="0" tIns="0" rIns="0" bIns="0" rtlCol="0" anchor="ctr">
+            <a:normAutofit/>
+          </a:bodyPr>
+          <a:lstStyle/>
+          <a:p>
+            <a:pPr indent="0" marL="0">
+              <a:buNone/>
+            </a:pPr>
+            <a:r>
+              <a:rPr lang="en-US" sz="1430" dirty="0">
+                <a:solidFill>
+                  <a:srgbClr val="526B84"/>
+                </a:solidFill>
+                <a:latin typeface="Apple SD Gothic Neo" pitchFamily="34" charset="0"/>
+                <a:ea typeface="Apple SD Gothic Neo" pitchFamily="34" charset="-122"/>
+                <a:cs typeface="Apple SD Gothic Neo" pitchFamily="34" charset="-120"/>
+              </a:rPr>
+              <a:t>slide footer의 〔S-…〕는 passed Point의 source_map stable reference다. 이 package에는 bibliography title registry가 없으므로, 존재하지 않는 서지를 추정해 쓰지 않는다.</a:t>
+            </a:r>
+            <a:endParaRPr lang="en-US" sz="1430" dirty="0"/>
+          </a:p>
+        </p:txBody>
+      </p:sp>
+      <p:sp>
+        <p:nvSpPr>
+          <p:cNvPr id="4" name="Text 2"/>
+          <p:cNvSpPr/>
+          <p:nvPr/>
+        </p:nvSpPr>
+        <p:spPr>
+          <a:xfrm>
+            <a:off x="11155680" y="384048"/>
+            <a:ext cx="502920" cy="164592"/>
+          </a:xfrm>
+          <a:prstGeom prst="rect">
+            <a:avLst/>
+          </a:prstGeom>
+          <a:noFill/>
+          <a:ln/>
+        </p:spPr>
+        <p:txBody>
+          <a:bodyPr wrap="square" lIns="0" tIns="0" rIns="0" bIns="0" rtlCol="0" anchor="ctr">
+            <a:normAutofit/>
+          </a:bodyPr>
+          <a:lstStyle/>
+          <a:p>
+            <a:pPr algn="r" indent="0" marL="0">
+              <a:buNone/>
+            </a:pPr>
+            <a:r>
+              <a:rPr lang="en-US" sz="1050" b="1" dirty="0">
+                <a:solidFill>
+                  <a:srgbClr val="526B84"/>
+                </a:solidFill>
+                <a:latin typeface="Apple SD Gothic Neo" pitchFamily="34" charset="0"/>
+                <a:ea typeface="Apple SD Gothic Neo" pitchFamily="34" charset="-122"/>
+                <a:cs typeface="Apple SD Gothic Neo" pitchFamily="34" charset="-120"/>
+              </a:rPr>
+              <a:t>16</a:t>
+            </a:r>
+            <a:endParaRPr lang="en-US" sz="1050" dirty="0"/>
+          </a:p>
+        </p:txBody>
+      </p:sp>
+      <p:sp>
+        <p:nvSpPr>
+          <p:cNvPr id="5" name="Shape 3"/>
+          <p:cNvSpPr/>
+          <p:nvPr/>
+        </p:nvSpPr>
+        <p:spPr>
+          <a:xfrm>
+            <a:off x="658368" y="1325880"/>
+            <a:ext cx="10972800" cy="731520"/>
+          </a:xfrm>
+          <a:prstGeom prst="roundRect">
+            <a:avLst/>
+          </a:prstGeom>
+          <a:solidFill>
+            <a:srgbClr val="E8F5FA"/>
+          </a:solidFill>
+          <a:ln w="8890">
+            <a:solidFill>
+              <a:srgbClr val="E8F5FA"/>
+            </a:solidFill>
+            <a:prstDash val="solid"/>
+          </a:ln>
+        </p:spPr>
+      </p:sp>
+      <p:sp>
+        <p:nvSpPr>
+          <p:cNvPr id="6" name="Text 4"/>
+          <p:cNvSpPr/>
+          <p:nvPr/>
+        </p:nvSpPr>
+        <p:spPr>
+          <a:xfrm>
+            <a:off x="896112" y="1600200"/>
+            <a:ext cx="10497312" cy="128016"/>
+          </a:xfrm>
+          <a:prstGeom prst="rect">
+            <a:avLst/>
+          </a:prstGeom>
+          <a:noFill/>
+          <a:ln/>
+        </p:spPr>
+        <p:txBody>
+          <a:bodyPr wrap="square" lIns="0" tIns="0" rIns="0" bIns="0" rtlCol="0" anchor="ctr">
+            <a:normAutofit/>
+          </a:bodyPr>
+          <a:lstStyle/>
+          <a:p>
+            <a:pPr algn="ctr" indent="0" marL="0">
+              <a:buNone/>
+            </a:pPr>
+            <a:r>
+              <a:rPr lang="en-US" sz="950" b="1" dirty="0">
+                <a:solidFill>
+                  <a:srgbClr val="0B7890"/>
+                </a:solidFill>
+                <a:latin typeface="Apple SD Gothic Neo" pitchFamily="34" charset="0"/>
+                <a:ea typeface="Apple SD Gothic Neo" pitchFamily="34" charset="-122"/>
+                <a:cs typeface="Apple SD Gothic Neo" pitchFamily="34" charset="-120"/>
+              </a:rPr>
+              <a:t>Canonical Point  SHA-256  59bb8e0d71c321cc18cb4880e27dbbe7966511257a4d4c33e7e7a538fbc38891</a:t>
+            </a:r>
+            <a:endParaRPr lang="en-US" sz="950" dirty="0"/>
+          </a:p>
+        </p:txBody>
+      </p:sp>
+      <p:sp>
+        <p:nvSpPr>
+          <p:cNvPr id="7" name="Shape 5"/>
+          <p:cNvSpPr/>
+          <p:nvPr/>
+        </p:nvSpPr>
+        <p:spPr>
+          <a:xfrm>
+            <a:off x="658368" y="2395728"/>
+            <a:ext cx="5285232" cy="475488"/>
+          </a:xfrm>
+          <a:prstGeom prst="roundRect">
             <a:avLst/>
           </a:prstGeom>
           <a:solidFill>
@@ -8308,14 +10784,14 @@
       </p:sp>
       <p:sp>
         <p:nvSpPr>
-          <p:cNvPr id="24" name="Text 22"/>
-          <p:cNvSpPr/>
-          <p:nvPr/>
-        </p:nvSpPr>
-        <p:spPr>
-          <a:xfrm>
-            <a:off x="749808" y="2788920"/>
-            <a:ext cx="685800" cy="91440"/>
+          <p:cNvPr id="8" name="Text 6"/>
+          <p:cNvSpPr/>
+          <p:nvPr/>
+        </p:nvSpPr>
+        <p:spPr>
+          <a:xfrm>
+            <a:off x="822960" y="2569464"/>
+            <a:ext cx="594360" cy="109728"/>
           </a:xfrm>
           <a:prstGeom prst="rect">
             <a:avLst/>
@@ -8333,7 +10809,7 @@
               <a:buNone/>
             </a:pPr>
             <a:r>
-              <a:rPr lang="en-US" sz="880" b="1" dirty="0">
+              <a:rPr lang="en-US" sz="950" b="1" dirty="0">
                 <a:solidFill>
                   <a:srgbClr val="0B7890"/>
                 </a:solidFill>
@@ -8341,7 +10817,48 @@
                 <a:ea typeface="Apple SD Gothic Neo" pitchFamily="34" charset="-122"/>
                 <a:cs typeface="Apple SD Gothic Neo" pitchFamily="34" charset="-120"/>
               </a:rPr>
-              <a:t>C-003</a:t>
+              <a:t>C-001</a:t>
+            </a:r>
+            <a:endParaRPr lang="en-US" sz="950" dirty="0"/>
+          </a:p>
+        </p:txBody>
+      </p:sp>
+      <p:sp>
+        <p:nvSpPr>
+          <p:cNvPr id="9" name="Text 7"/>
+          <p:cNvSpPr/>
+          <p:nvPr/>
+        </p:nvSpPr>
+        <p:spPr>
+          <a:xfrm>
+            <a:off x="1554480" y="2569464"/>
+            <a:ext cx="4160520" cy="109728"/>
+          </a:xfrm>
+          <a:prstGeom prst="rect">
+            <a:avLst/>
+          </a:prstGeom>
+          <a:noFill/>
+          <a:ln/>
+        </p:spPr>
+        <p:txBody>
+          <a:bodyPr wrap="square" lIns="0" tIns="0" rIns="0" bIns="0" rtlCol="0" anchor="ctr">
+            <a:normAutofit/>
+          </a:bodyPr>
+          <a:lstStyle/>
+          <a:p>
+            <a:pPr indent="0" marL="0">
+              <a:buNone/>
+            </a:pPr>
+            <a:r>
+              <a:rPr lang="en-US" sz="880" dirty="0">
+                <a:solidFill>
+                  <a:srgbClr val="14273A"/>
+                </a:solidFill>
+                <a:latin typeface="Apple SD Gothic Neo" pitchFamily="34" charset="0"/>
+                <a:ea typeface="Apple SD Gothic Neo" pitchFamily="34" charset="-122"/>
+                <a:cs typeface="Apple SD Gothic Neo" pitchFamily="34" charset="-120"/>
+              </a:rPr>
+              <a:t>S-002 · S-003 · S-007</a:t>
             </a:r>
             <a:endParaRPr lang="en-US" sz="880" dirty="0"/>
           </a:p>
@@ -8349,16 +10866,123 @@
       </p:sp>
       <p:sp>
         <p:nvSpPr>
-          <p:cNvPr id="25" name="Shape 23"/>
-          <p:cNvSpPr/>
-          <p:nvPr/>
-        </p:nvSpPr>
-        <p:spPr>
-          <a:xfrm>
-            <a:off x="1828800" y="2660904"/>
-            <a:ext cx="5074920" cy="384048"/>
-          </a:xfrm>
-          <a:prstGeom prst="rect">
+          <p:cNvPr id="10" name="Shape 8"/>
+          <p:cNvSpPr/>
+          <p:nvPr/>
+        </p:nvSpPr>
+        <p:spPr>
+          <a:xfrm>
+            <a:off x="658368" y="2971800"/>
+            <a:ext cx="5285232" cy="475488"/>
+          </a:xfrm>
+          <a:prstGeom prst="roundRect">
+            <a:avLst/>
+          </a:prstGeom>
+          <a:solidFill>
+            <a:srgbClr val="EDF2F7"/>
+          </a:solidFill>
+          <a:ln w="8890">
+            <a:solidFill>
+              <a:srgbClr val="EDF2F7"/>
+            </a:solidFill>
+            <a:prstDash val="solid"/>
+          </a:ln>
+        </p:spPr>
+      </p:sp>
+      <p:sp>
+        <p:nvSpPr>
+          <p:cNvPr id="11" name="Text 9"/>
+          <p:cNvSpPr/>
+          <p:nvPr/>
+        </p:nvSpPr>
+        <p:spPr>
+          <a:xfrm>
+            <a:off x="822960" y="3145536"/>
+            <a:ext cx="594360" cy="109728"/>
+          </a:xfrm>
+          <a:prstGeom prst="rect">
+            <a:avLst/>
+          </a:prstGeom>
+          <a:noFill/>
+          <a:ln/>
+        </p:spPr>
+        <p:txBody>
+          <a:bodyPr wrap="square" lIns="0" tIns="0" rIns="0" bIns="0" rtlCol="0" anchor="ctr">
+            <a:normAutofit/>
+          </a:bodyPr>
+          <a:lstStyle/>
+          <a:p>
+            <a:pPr indent="0" marL="0">
+              <a:buNone/>
+            </a:pPr>
+            <a:r>
+              <a:rPr lang="en-US" sz="950" b="1" dirty="0">
+                <a:solidFill>
+                  <a:srgbClr val="0B7890"/>
+                </a:solidFill>
+                <a:latin typeface="Apple SD Gothic Neo" pitchFamily="34" charset="0"/>
+                <a:ea typeface="Apple SD Gothic Neo" pitchFamily="34" charset="-122"/>
+                <a:cs typeface="Apple SD Gothic Neo" pitchFamily="34" charset="-120"/>
+              </a:rPr>
+              <a:t>C-002</a:t>
+            </a:r>
+            <a:endParaRPr lang="en-US" sz="950" dirty="0"/>
+          </a:p>
+        </p:txBody>
+      </p:sp>
+      <p:sp>
+        <p:nvSpPr>
+          <p:cNvPr id="12" name="Text 10"/>
+          <p:cNvSpPr/>
+          <p:nvPr/>
+        </p:nvSpPr>
+        <p:spPr>
+          <a:xfrm>
+            <a:off x="1554480" y="3145536"/>
+            <a:ext cx="4160520" cy="109728"/>
+          </a:xfrm>
+          <a:prstGeom prst="rect">
+            <a:avLst/>
+          </a:prstGeom>
+          <a:noFill/>
+          <a:ln/>
+        </p:spPr>
+        <p:txBody>
+          <a:bodyPr wrap="square" lIns="0" tIns="0" rIns="0" bIns="0" rtlCol="0" anchor="ctr">
+            <a:normAutofit/>
+          </a:bodyPr>
+          <a:lstStyle/>
+          <a:p>
+            <a:pPr indent="0" marL="0">
+              <a:buNone/>
+            </a:pPr>
+            <a:r>
+              <a:rPr lang="en-US" sz="880" dirty="0">
+                <a:solidFill>
+                  <a:srgbClr val="14273A"/>
+                </a:solidFill>
+                <a:latin typeface="Apple SD Gothic Neo" pitchFamily="34" charset="0"/>
+                <a:ea typeface="Apple SD Gothic Neo" pitchFamily="34" charset="-122"/>
+                <a:cs typeface="Apple SD Gothic Neo" pitchFamily="34" charset="-120"/>
+              </a:rPr>
+              <a:t>S-002 · S-003 · S-005 · S-007 · S-009</a:t>
+            </a:r>
+            <a:endParaRPr lang="en-US" sz="880" dirty="0"/>
+          </a:p>
+        </p:txBody>
+      </p:sp>
+      <p:sp>
+        <p:nvSpPr>
+          <p:cNvPr id="13" name="Shape 11"/>
+          <p:cNvSpPr/>
+          <p:nvPr/>
+        </p:nvSpPr>
+        <p:spPr>
+          <a:xfrm>
+            <a:off x="658368" y="3547872"/>
+            <a:ext cx="5285232" cy="475488"/>
+          </a:xfrm>
+          <a:prstGeom prst="roundRect">
             <a:avLst/>
           </a:prstGeom>
           <a:solidFill>
@@ -8374,14 +10998,14 @@
       </p:sp>
       <p:sp>
         <p:nvSpPr>
-          <p:cNvPr id="26" name="Text 24"/>
-          <p:cNvSpPr/>
-          <p:nvPr/>
-        </p:nvSpPr>
-        <p:spPr>
-          <a:xfrm>
-            <a:off x="1920240" y="2788920"/>
-            <a:ext cx="4892040" cy="91440"/>
+          <p:cNvPr id="14" name="Text 12"/>
+          <p:cNvSpPr/>
+          <p:nvPr/>
+        </p:nvSpPr>
+        <p:spPr>
+          <a:xfrm>
+            <a:off x="822960" y="3721608"/>
+            <a:ext cx="594360" cy="109728"/>
           </a:xfrm>
           <a:prstGeom prst="rect">
             <a:avLst/>
@@ -8399,7 +11023,48 @@
               <a:buNone/>
             </a:pPr>
             <a:r>
-              <a:rPr lang="en-US" sz="920" dirty="0">
+              <a:rPr lang="en-US" sz="950" b="1" dirty="0">
+                <a:solidFill>
+                  <a:srgbClr val="0B7890"/>
+                </a:solidFill>
+                <a:latin typeface="Apple SD Gothic Neo" pitchFamily="34" charset="0"/>
+                <a:ea typeface="Apple SD Gothic Neo" pitchFamily="34" charset="-122"/>
+                <a:cs typeface="Apple SD Gothic Neo" pitchFamily="34" charset="-120"/>
+              </a:rPr>
+              <a:t>C-003</a:t>
+            </a:r>
+            <a:endParaRPr lang="en-US" sz="950" dirty="0"/>
+          </a:p>
+        </p:txBody>
+      </p:sp>
+      <p:sp>
+        <p:nvSpPr>
+          <p:cNvPr id="15" name="Text 13"/>
+          <p:cNvSpPr/>
+          <p:nvPr/>
+        </p:nvSpPr>
+        <p:spPr>
+          <a:xfrm>
+            <a:off x="1554480" y="3721608"/>
+            <a:ext cx="4160520" cy="109728"/>
+          </a:xfrm>
+          <a:prstGeom prst="rect">
+            <a:avLst/>
+          </a:prstGeom>
+          <a:noFill/>
+          <a:ln/>
+        </p:spPr>
+        <p:txBody>
+          <a:bodyPr wrap="square" lIns="0" tIns="0" rIns="0" bIns="0" rtlCol="0" anchor="ctr">
+            <a:normAutofit/>
+          </a:bodyPr>
+          <a:lstStyle/>
+          <a:p>
+            <a:pPr indent="0" marL="0">
+              <a:buNone/>
+            </a:pPr>
+            <a:r>
+              <a:rPr lang="en-US" sz="880" dirty="0">
                 <a:solidFill>
                   <a:srgbClr val="14273A"/>
                 </a:solidFill>
@@ -8407,24 +11072,131 @@
                 <a:ea typeface="Apple SD Gothic Neo" pitchFamily="34" charset="-122"/>
                 <a:cs typeface="Apple SD Gothic Neo" pitchFamily="34" charset="-120"/>
               </a:rPr>
-              <a:t>threat and trust assumptions</a:t>
-            </a:r>
-            <a:endParaRPr lang="en-US" sz="920" dirty="0"/>
-          </a:p>
-        </p:txBody>
-      </p:sp>
-      <p:sp>
-        <p:nvSpPr>
-          <p:cNvPr id="27" name="Shape 25"/>
-          <p:cNvSpPr/>
-          <p:nvPr/>
-        </p:nvSpPr>
-        <p:spPr>
-          <a:xfrm>
-            <a:off x="7223760" y="2660904"/>
-            <a:ext cx="4023360" cy="384048"/>
-          </a:xfrm>
-          <a:prstGeom prst="rect">
+              <a:t>S-002 · S-003 · S-005 · S-009</a:t>
+            </a:r>
+            <a:endParaRPr lang="en-US" sz="880" dirty="0"/>
+          </a:p>
+        </p:txBody>
+      </p:sp>
+      <p:sp>
+        <p:nvSpPr>
+          <p:cNvPr id="16" name="Shape 14"/>
+          <p:cNvSpPr/>
+          <p:nvPr/>
+        </p:nvSpPr>
+        <p:spPr>
+          <a:xfrm>
+            <a:off x="658368" y="4123944"/>
+            <a:ext cx="5285232" cy="475488"/>
+          </a:xfrm>
+          <a:prstGeom prst="roundRect">
+            <a:avLst/>
+          </a:prstGeom>
+          <a:solidFill>
+            <a:srgbClr val="EDF2F7"/>
+          </a:solidFill>
+          <a:ln w="8890">
+            <a:solidFill>
+              <a:srgbClr val="EDF2F7"/>
+            </a:solidFill>
+            <a:prstDash val="solid"/>
+          </a:ln>
+        </p:spPr>
+      </p:sp>
+      <p:sp>
+        <p:nvSpPr>
+          <p:cNvPr id="17" name="Text 15"/>
+          <p:cNvSpPr/>
+          <p:nvPr/>
+        </p:nvSpPr>
+        <p:spPr>
+          <a:xfrm>
+            <a:off x="822960" y="4297680"/>
+            <a:ext cx="594360" cy="109728"/>
+          </a:xfrm>
+          <a:prstGeom prst="rect">
+            <a:avLst/>
+          </a:prstGeom>
+          <a:noFill/>
+          <a:ln/>
+        </p:spPr>
+        <p:txBody>
+          <a:bodyPr wrap="square" lIns="0" tIns="0" rIns="0" bIns="0" rtlCol="0" anchor="ctr">
+            <a:normAutofit/>
+          </a:bodyPr>
+          <a:lstStyle/>
+          <a:p>
+            <a:pPr indent="0" marL="0">
+              <a:buNone/>
+            </a:pPr>
+            <a:r>
+              <a:rPr lang="en-US" sz="950" b="1" dirty="0">
+                <a:solidFill>
+                  <a:srgbClr val="0B7890"/>
+                </a:solidFill>
+                <a:latin typeface="Apple SD Gothic Neo" pitchFamily="34" charset="0"/>
+                <a:ea typeface="Apple SD Gothic Neo" pitchFamily="34" charset="-122"/>
+                <a:cs typeface="Apple SD Gothic Neo" pitchFamily="34" charset="-120"/>
+              </a:rPr>
+              <a:t>C-004</a:t>
+            </a:r>
+            <a:endParaRPr lang="en-US" sz="950" dirty="0"/>
+          </a:p>
+        </p:txBody>
+      </p:sp>
+      <p:sp>
+        <p:nvSpPr>
+          <p:cNvPr id="18" name="Text 16"/>
+          <p:cNvSpPr/>
+          <p:nvPr/>
+        </p:nvSpPr>
+        <p:spPr>
+          <a:xfrm>
+            <a:off x="1554480" y="4297680"/>
+            <a:ext cx="4160520" cy="109728"/>
+          </a:xfrm>
+          <a:prstGeom prst="rect">
+            <a:avLst/>
+          </a:prstGeom>
+          <a:noFill/>
+          <a:ln/>
+        </p:spPr>
+        <p:txBody>
+          <a:bodyPr wrap="square" lIns="0" tIns="0" rIns="0" bIns="0" rtlCol="0" anchor="ctr">
+            <a:normAutofit/>
+          </a:bodyPr>
+          <a:lstStyle/>
+          <a:p>
+            <a:pPr indent="0" marL="0">
+              <a:buNone/>
+            </a:pPr>
+            <a:r>
+              <a:rPr lang="en-US" sz="880" dirty="0">
+                <a:solidFill>
+                  <a:srgbClr val="14273A"/>
+                </a:solidFill>
+                <a:latin typeface="Apple SD Gothic Neo" pitchFamily="34" charset="0"/>
+                <a:ea typeface="Apple SD Gothic Neo" pitchFamily="34" charset="-122"/>
+                <a:cs typeface="Apple SD Gothic Neo" pitchFamily="34" charset="-120"/>
+              </a:rPr>
+              <a:t>S-002 · S-003 · S-004 · S-005 · S-006 · S-008 · S-010 · S-011</a:t>
+            </a:r>
+            <a:endParaRPr lang="en-US" sz="880" dirty="0"/>
+          </a:p>
+        </p:txBody>
+      </p:sp>
+      <p:sp>
+        <p:nvSpPr>
+          <p:cNvPr id="19" name="Shape 17"/>
+          <p:cNvSpPr/>
+          <p:nvPr/>
+        </p:nvSpPr>
+        <p:spPr>
+          <a:xfrm>
+            <a:off x="658368" y="4700016"/>
+            <a:ext cx="5285232" cy="475488"/>
+          </a:xfrm>
+          <a:prstGeom prst="roundRect">
             <a:avLst/>
           </a:prstGeom>
           <a:solidFill>
@@ -8440,14 +11212,14 @@
       </p:sp>
       <p:sp>
         <p:nvSpPr>
-          <p:cNvPr id="28" name="Text 26"/>
-          <p:cNvSpPr/>
-          <p:nvPr/>
-        </p:nvSpPr>
-        <p:spPr>
-          <a:xfrm>
-            <a:off x="7315200" y="2788920"/>
-            <a:ext cx="3840480" cy="91440"/>
+          <p:cNvPr id="20" name="Text 18"/>
+          <p:cNvSpPr/>
+          <p:nvPr/>
+        </p:nvSpPr>
+        <p:spPr>
+          <a:xfrm>
+            <a:off x="822960" y="4873752"/>
+            <a:ext cx="594360" cy="109728"/>
           </a:xfrm>
           <a:prstGeom prst="rect">
             <a:avLst/>
@@ -8465,6 +11237,47 @@
               <a:buNone/>
             </a:pPr>
             <a:r>
+              <a:rPr lang="en-US" sz="950" b="1" dirty="0">
+                <a:solidFill>
+                  <a:srgbClr val="0B7890"/>
+                </a:solidFill>
+                <a:latin typeface="Apple SD Gothic Neo" pitchFamily="34" charset="0"/>
+                <a:ea typeface="Apple SD Gothic Neo" pitchFamily="34" charset="-122"/>
+                <a:cs typeface="Apple SD Gothic Neo" pitchFamily="34" charset="-120"/>
+              </a:rPr>
+              <a:t>C-005</a:t>
+            </a:r>
+            <a:endParaRPr lang="en-US" sz="950" dirty="0"/>
+          </a:p>
+        </p:txBody>
+      </p:sp>
+      <p:sp>
+        <p:nvSpPr>
+          <p:cNvPr id="21" name="Text 19"/>
+          <p:cNvSpPr/>
+          <p:nvPr/>
+        </p:nvSpPr>
+        <p:spPr>
+          <a:xfrm>
+            <a:off x="1554480" y="4873752"/>
+            <a:ext cx="4160520" cy="109728"/>
+          </a:xfrm>
+          <a:prstGeom prst="rect">
+            <a:avLst/>
+          </a:prstGeom>
+          <a:noFill/>
+          <a:ln/>
+        </p:spPr>
+        <p:txBody>
+          <a:bodyPr wrap="square" lIns="0" tIns="0" rIns="0" bIns="0" rtlCol="0" anchor="ctr">
+            <a:normAutofit/>
+          </a:bodyPr>
+          <a:lstStyle/>
+          <a:p>
+            <a:pPr indent="0" marL="0">
+              <a:buNone/>
+            </a:pPr>
+            <a:r>
               <a:rPr lang="en-US" sz="880" dirty="0">
                 <a:solidFill>
                   <a:srgbClr val="14273A"/>
@@ -8473,7 +11286,7 @@
                 <a:ea typeface="Apple SD Gothic Neo" pitchFamily="34" charset="-122"/>
                 <a:cs typeface="Apple SD Gothic Neo" pitchFamily="34" charset="-120"/>
               </a:rPr>
-              <a:t>03, 04</a:t>
+              <a:t>S-003 · S-005</a:t>
             </a:r>
             <a:endParaRPr lang="en-US" sz="880" dirty="0"/>
           </a:p>
@@ -8481,16 +11294,16 @@
       </p:sp>
       <p:sp>
         <p:nvSpPr>
-          <p:cNvPr id="29" name="Shape 27"/>
-          <p:cNvSpPr/>
-          <p:nvPr/>
-        </p:nvSpPr>
-        <p:spPr>
-          <a:xfrm>
-            <a:off x="658368" y="3054096"/>
-            <a:ext cx="868680" cy="384048"/>
-          </a:xfrm>
-          <a:prstGeom prst="rect">
+          <p:cNvPr id="22" name="Shape 20"/>
+          <p:cNvSpPr/>
+          <p:nvPr/>
+        </p:nvSpPr>
+        <p:spPr>
+          <a:xfrm>
+            <a:off x="6291072" y="2395728"/>
+            <a:ext cx="5285232" cy="475488"/>
+          </a:xfrm>
+          <a:prstGeom prst="roundRect">
             <a:avLst/>
           </a:prstGeom>
           <a:solidFill>
@@ -8506,14 +11319,14 @@
       </p:sp>
       <p:sp>
         <p:nvSpPr>
-          <p:cNvPr id="30" name="Text 28"/>
-          <p:cNvSpPr/>
-          <p:nvPr/>
-        </p:nvSpPr>
-        <p:spPr>
-          <a:xfrm>
-            <a:off x="749808" y="3182112"/>
-            <a:ext cx="685800" cy="91440"/>
+          <p:cNvPr id="23" name="Text 21"/>
+          <p:cNvSpPr/>
+          <p:nvPr/>
+        </p:nvSpPr>
+        <p:spPr>
+          <a:xfrm>
+            <a:off x="6455664" y="2569464"/>
+            <a:ext cx="594360" cy="109728"/>
           </a:xfrm>
           <a:prstGeom prst="rect">
             <a:avLst/>
@@ -8531,7 +11344,7 @@
               <a:buNone/>
             </a:pPr>
             <a:r>
-              <a:rPr lang="en-US" sz="880" b="1" dirty="0">
+              <a:rPr lang="en-US" sz="950" b="1" dirty="0">
                 <a:solidFill>
                   <a:srgbClr val="0B7890"/>
                 </a:solidFill>
@@ -8539,7 +11352,48 @@
                 <a:ea typeface="Apple SD Gothic Neo" pitchFamily="34" charset="-122"/>
                 <a:cs typeface="Apple SD Gothic Neo" pitchFamily="34" charset="-120"/>
               </a:rPr>
-              <a:t>C-004</a:t>
+              <a:t>C-006</a:t>
+            </a:r>
+            <a:endParaRPr lang="en-US" sz="950" dirty="0"/>
+          </a:p>
+        </p:txBody>
+      </p:sp>
+      <p:sp>
+        <p:nvSpPr>
+          <p:cNvPr id="24" name="Text 22"/>
+          <p:cNvSpPr/>
+          <p:nvPr/>
+        </p:nvSpPr>
+        <p:spPr>
+          <a:xfrm>
+            <a:off x="7187184" y="2569464"/>
+            <a:ext cx="4160520" cy="109728"/>
+          </a:xfrm>
+          <a:prstGeom prst="rect">
+            <a:avLst/>
+          </a:prstGeom>
+          <a:noFill/>
+          <a:ln/>
+        </p:spPr>
+        <p:txBody>
+          <a:bodyPr wrap="square" lIns="0" tIns="0" rIns="0" bIns="0" rtlCol="0" anchor="ctr">
+            <a:normAutofit/>
+          </a:bodyPr>
+          <a:lstStyle/>
+          <a:p>
+            <a:pPr indent="0" marL="0">
+              <a:buNone/>
+            </a:pPr>
+            <a:r>
+              <a:rPr lang="en-US" sz="880" dirty="0">
+                <a:solidFill>
+                  <a:srgbClr val="14273A"/>
+                </a:solidFill>
+                <a:latin typeface="Apple SD Gothic Neo" pitchFamily="34" charset="0"/>
+                <a:ea typeface="Apple SD Gothic Neo" pitchFamily="34" charset="-122"/>
+                <a:cs typeface="Apple SD Gothic Neo" pitchFamily="34" charset="-120"/>
+              </a:rPr>
+              <a:t>S-002 · S-004 · S-005 · S-011</a:t>
             </a:r>
             <a:endParaRPr lang="en-US" sz="880" dirty="0"/>
           </a:p>
@@ -8547,16 +11401,123 @@
       </p:sp>
       <p:sp>
         <p:nvSpPr>
-          <p:cNvPr id="31" name="Shape 29"/>
-          <p:cNvSpPr/>
-          <p:nvPr/>
-        </p:nvSpPr>
-        <p:spPr>
-          <a:xfrm>
-            <a:off x="1828800" y="3054096"/>
-            <a:ext cx="5074920" cy="384048"/>
-          </a:xfrm>
-          <a:prstGeom prst="rect">
+          <p:cNvPr id="25" name="Shape 23"/>
+          <p:cNvSpPr/>
+          <p:nvPr/>
+        </p:nvSpPr>
+        <p:spPr>
+          <a:xfrm>
+            <a:off x="6291072" y="2971800"/>
+            <a:ext cx="5285232" cy="475488"/>
+          </a:xfrm>
+          <a:prstGeom prst="roundRect">
+            <a:avLst/>
+          </a:prstGeom>
+          <a:solidFill>
+            <a:srgbClr val="FFFFFF"/>
+          </a:solidFill>
+          <a:ln w="8890">
+            <a:solidFill>
+              <a:srgbClr val="FFFFFF"/>
+            </a:solidFill>
+            <a:prstDash val="solid"/>
+          </a:ln>
+        </p:spPr>
+      </p:sp>
+      <p:sp>
+        <p:nvSpPr>
+          <p:cNvPr id="26" name="Text 24"/>
+          <p:cNvSpPr/>
+          <p:nvPr/>
+        </p:nvSpPr>
+        <p:spPr>
+          <a:xfrm>
+            <a:off x="6455664" y="3145536"/>
+            <a:ext cx="594360" cy="109728"/>
+          </a:xfrm>
+          <a:prstGeom prst="rect">
+            <a:avLst/>
+          </a:prstGeom>
+          <a:noFill/>
+          <a:ln/>
+        </p:spPr>
+        <p:txBody>
+          <a:bodyPr wrap="square" lIns="0" tIns="0" rIns="0" bIns="0" rtlCol="0" anchor="ctr">
+            <a:normAutofit/>
+          </a:bodyPr>
+          <a:lstStyle/>
+          <a:p>
+            <a:pPr indent="0" marL="0">
+              <a:buNone/>
+            </a:pPr>
+            <a:r>
+              <a:rPr lang="en-US" sz="950" b="1" dirty="0">
+                <a:solidFill>
+                  <a:srgbClr val="0B7890"/>
+                </a:solidFill>
+                <a:latin typeface="Apple SD Gothic Neo" pitchFamily="34" charset="0"/>
+                <a:ea typeface="Apple SD Gothic Neo" pitchFamily="34" charset="-122"/>
+                <a:cs typeface="Apple SD Gothic Neo" pitchFamily="34" charset="-120"/>
+              </a:rPr>
+              <a:t>C-007</a:t>
+            </a:r>
+            <a:endParaRPr lang="en-US" sz="950" dirty="0"/>
+          </a:p>
+        </p:txBody>
+      </p:sp>
+      <p:sp>
+        <p:nvSpPr>
+          <p:cNvPr id="27" name="Text 25"/>
+          <p:cNvSpPr/>
+          <p:nvPr/>
+        </p:nvSpPr>
+        <p:spPr>
+          <a:xfrm>
+            <a:off x="7187184" y="3145536"/>
+            <a:ext cx="4160520" cy="109728"/>
+          </a:xfrm>
+          <a:prstGeom prst="rect">
+            <a:avLst/>
+          </a:prstGeom>
+          <a:noFill/>
+          <a:ln/>
+        </p:spPr>
+        <p:txBody>
+          <a:bodyPr wrap="square" lIns="0" tIns="0" rIns="0" bIns="0" rtlCol="0" anchor="ctr">
+            <a:normAutofit/>
+          </a:bodyPr>
+          <a:lstStyle/>
+          <a:p>
+            <a:pPr indent="0" marL="0">
+              <a:buNone/>
+            </a:pPr>
+            <a:r>
+              <a:rPr lang="en-US" sz="880" dirty="0">
+                <a:solidFill>
+                  <a:srgbClr val="14273A"/>
+                </a:solidFill>
+                <a:latin typeface="Apple SD Gothic Neo" pitchFamily="34" charset="0"/>
+                <a:ea typeface="Apple SD Gothic Neo" pitchFamily="34" charset="-122"/>
+                <a:cs typeface="Apple SD Gothic Neo" pitchFamily="34" charset="-120"/>
+              </a:rPr>
+              <a:t>S-002 · S-003 · S-009</a:t>
+            </a:r>
+            <a:endParaRPr lang="en-US" sz="880" dirty="0"/>
+          </a:p>
+        </p:txBody>
+      </p:sp>
+      <p:sp>
+        <p:nvSpPr>
+          <p:cNvPr id="28" name="Shape 26"/>
+          <p:cNvSpPr/>
+          <p:nvPr/>
+        </p:nvSpPr>
+        <p:spPr>
+          <a:xfrm>
+            <a:off x="6291072" y="3547872"/>
+            <a:ext cx="5285232" cy="475488"/>
+          </a:xfrm>
+          <a:prstGeom prst="roundRect">
             <a:avLst/>
           </a:prstGeom>
           <a:solidFill>
@@ -8572,14 +11533,121 @@
       </p:sp>
       <p:sp>
         <p:nvSpPr>
+          <p:cNvPr id="29" name="Text 27"/>
+          <p:cNvSpPr/>
+          <p:nvPr/>
+        </p:nvSpPr>
+        <p:spPr>
+          <a:xfrm>
+            <a:off x="6455664" y="3721608"/>
+            <a:ext cx="594360" cy="109728"/>
+          </a:xfrm>
+          <a:prstGeom prst="rect">
+            <a:avLst/>
+          </a:prstGeom>
+          <a:noFill/>
+          <a:ln/>
+        </p:spPr>
+        <p:txBody>
+          <a:bodyPr wrap="square" lIns="0" tIns="0" rIns="0" bIns="0" rtlCol="0" anchor="ctr">
+            <a:normAutofit/>
+          </a:bodyPr>
+          <a:lstStyle/>
+          <a:p>
+            <a:pPr indent="0" marL="0">
+              <a:buNone/>
+            </a:pPr>
+            <a:r>
+              <a:rPr lang="en-US" sz="950" b="1" dirty="0">
+                <a:solidFill>
+                  <a:srgbClr val="0B7890"/>
+                </a:solidFill>
+                <a:latin typeface="Apple SD Gothic Neo" pitchFamily="34" charset="0"/>
+                <a:ea typeface="Apple SD Gothic Neo" pitchFamily="34" charset="-122"/>
+                <a:cs typeface="Apple SD Gothic Neo" pitchFamily="34" charset="-120"/>
+              </a:rPr>
+              <a:t>C-008</a:t>
+            </a:r>
+            <a:endParaRPr lang="en-US" sz="950" dirty="0"/>
+          </a:p>
+        </p:txBody>
+      </p:sp>
+      <p:sp>
+        <p:nvSpPr>
+          <p:cNvPr id="30" name="Text 28"/>
+          <p:cNvSpPr/>
+          <p:nvPr/>
+        </p:nvSpPr>
+        <p:spPr>
+          <a:xfrm>
+            <a:off x="7187184" y="3721608"/>
+            <a:ext cx="4160520" cy="109728"/>
+          </a:xfrm>
+          <a:prstGeom prst="rect">
+            <a:avLst/>
+          </a:prstGeom>
+          <a:noFill/>
+          <a:ln/>
+        </p:spPr>
+        <p:txBody>
+          <a:bodyPr wrap="square" lIns="0" tIns="0" rIns="0" bIns="0" rtlCol="0" anchor="ctr">
+            <a:normAutofit/>
+          </a:bodyPr>
+          <a:lstStyle/>
+          <a:p>
+            <a:pPr indent="0" marL="0">
+              <a:buNone/>
+            </a:pPr>
+            <a:r>
+              <a:rPr lang="en-US" sz="880" dirty="0">
+                <a:solidFill>
+                  <a:srgbClr val="14273A"/>
+                </a:solidFill>
+                <a:latin typeface="Apple SD Gothic Neo" pitchFamily="34" charset="0"/>
+                <a:ea typeface="Apple SD Gothic Neo" pitchFamily="34" charset="-122"/>
+                <a:cs typeface="Apple SD Gothic Neo" pitchFamily="34" charset="-120"/>
+              </a:rPr>
+              <a:t>S-001 · S-002 · S-010</a:t>
+            </a:r>
+            <a:endParaRPr lang="en-US" sz="880" dirty="0"/>
+          </a:p>
+        </p:txBody>
+      </p:sp>
+      <p:sp>
+        <p:nvSpPr>
+          <p:cNvPr id="31" name="Shape 29"/>
+          <p:cNvSpPr/>
+          <p:nvPr/>
+        </p:nvSpPr>
+        <p:spPr>
+          <a:xfrm>
+            <a:off x="6291072" y="4123944"/>
+            <a:ext cx="5285232" cy="475488"/>
+          </a:xfrm>
+          <a:prstGeom prst="roundRect">
+            <a:avLst/>
+          </a:prstGeom>
+          <a:solidFill>
+            <a:srgbClr val="FFFFFF"/>
+          </a:solidFill>
+          <a:ln w="8890">
+            <a:solidFill>
+              <a:srgbClr val="FFFFFF"/>
+            </a:solidFill>
+            <a:prstDash val="solid"/>
+          </a:ln>
+        </p:spPr>
+      </p:sp>
+      <p:sp>
+        <p:nvSpPr>
           <p:cNvPr id="32" name="Text 30"/>
           <p:cNvSpPr/>
           <p:nvPr/>
         </p:nvSpPr>
         <p:spPr>
           <a:xfrm>
-            <a:off x="1920240" y="3182112"/>
-            <a:ext cx="4892040" cy="91440"/>
+            <a:off x="6455664" y="4297680"/>
+            <a:ext cx="594360" cy="109728"/>
           </a:xfrm>
           <a:prstGeom prst="rect">
             <a:avLst/>
@@ -8597,7 +11665,48 @@
               <a:buNone/>
             </a:pPr>
             <a:r>
-              <a:rPr lang="en-US" sz="920" dirty="0">
+              <a:rPr lang="en-US" sz="950" b="1" dirty="0">
+                <a:solidFill>
+                  <a:srgbClr val="0B7890"/>
+                </a:solidFill>
+                <a:latin typeface="Apple SD Gothic Neo" pitchFamily="34" charset="0"/>
+                <a:ea typeface="Apple SD Gothic Neo" pitchFamily="34" charset="-122"/>
+                <a:cs typeface="Apple SD Gothic Neo" pitchFamily="34" charset="-120"/>
+              </a:rPr>
+              <a:t>C-009</a:t>
+            </a:r>
+            <a:endParaRPr lang="en-US" sz="950" dirty="0"/>
+          </a:p>
+        </p:txBody>
+      </p:sp>
+      <p:sp>
+        <p:nvSpPr>
+          <p:cNvPr id="33" name="Text 31"/>
+          <p:cNvSpPr/>
+          <p:nvPr/>
+        </p:nvSpPr>
+        <p:spPr>
+          <a:xfrm>
+            <a:off x="7187184" y="4297680"/>
+            <a:ext cx="4160520" cy="109728"/>
+          </a:xfrm>
+          <a:prstGeom prst="rect">
+            <a:avLst/>
+          </a:prstGeom>
+          <a:noFill/>
+          <a:ln/>
+        </p:spPr>
+        <p:txBody>
+          <a:bodyPr wrap="square" lIns="0" tIns="0" rIns="0" bIns="0" rtlCol="0" anchor="ctr">
+            <a:normAutofit/>
+          </a:bodyPr>
+          <a:lstStyle/>
+          <a:p>
+            <a:pPr indent="0" marL="0">
+              <a:buNone/>
+            </a:pPr>
+            <a:r>
+              <a:rPr lang="en-US" sz="880" dirty="0">
                 <a:solidFill>
                   <a:srgbClr val="14273A"/>
                 </a:solidFill>
@@ -8605,24 +11714,24 @@
                 <a:ea typeface="Apple SD Gothic Neo" pitchFamily="34" charset="-122"/>
                 <a:cs typeface="Apple SD Gothic Neo" pitchFamily="34" charset="-120"/>
               </a:rPr>
-              <a:t>closed Background Check path</a:t>
-            </a:r>
-            <a:endParaRPr lang="en-US" sz="920" dirty="0"/>
-          </a:p>
-        </p:txBody>
-      </p:sp>
-      <p:sp>
-        <p:nvSpPr>
-          <p:cNvPr id="33" name="Shape 31"/>
-          <p:cNvSpPr/>
-          <p:nvPr/>
-        </p:nvSpPr>
-        <p:spPr>
-          <a:xfrm>
-            <a:off x="7223760" y="3054096"/>
-            <a:ext cx="4023360" cy="384048"/>
-          </a:xfrm>
-          <a:prstGeom prst="rect">
+              <a:t>S-001 · S-002 · S-004 · S-010 · S-012</a:t>
+            </a:r>
+            <a:endParaRPr lang="en-US" sz="880" dirty="0"/>
+          </a:p>
+        </p:txBody>
+      </p:sp>
+      <p:sp>
+        <p:nvSpPr>
+          <p:cNvPr id="34" name="Shape 32"/>
+          <p:cNvSpPr/>
+          <p:nvPr/>
+        </p:nvSpPr>
+        <p:spPr>
+          <a:xfrm>
+            <a:off x="6291072" y="4700016"/>
+            <a:ext cx="5285232" cy="475488"/>
+          </a:xfrm>
+          <a:prstGeom prst="roundRect">
             <a:avLst/>
           </a:prstGeom>
           <a:solidFill>
@@ -8638,14 +11747,14 @@
       </p:sp>
       <p:sp>
         <p:nvSpPr>
-          <p:cNvPr id="34" name="Text 32"/>
-          <p:cNvSpPr/>
-          <p:nvPr/>
-        </p:nvSpPr>
-        <p:spPr>
-          <a:xfrm>
-            <a:off x="7315200" y="3182112"/>
-            <a:ext cx="3840480" cy="91440"/>
+          <p:cNvPr id="35" name="Text 33"/>
+          <p:cNvSpPr/>
+          <p:nvPr/>
+        </p:nvSpPr>
+        <p:spPr>
+          <a:xfrm>
+            <a:off x="6455664" y="4873752"/>
+            <a:ext cx="594360" cy="109728"/>
           </a:xfrm>
           <a:prstGeom prst="rect">
             <a:avLst/>
@@ -8663,6 +11772,47 @@
               <a:buNone/>
             </a:pPr>
             <a:r>
+              <a:rPr lang="en-US" sz="950" b="1" dirty="0">
+                <a:solidFill>
+                  <a:srgbClr val="0B7890"/>
+                </a:solidFill>
+                <a:latin typeface="Apple SD Gothic Neo" pitchFamily="34" charset="0"/>
+                <a:ea typeface="Apple SD Gothic Neo" pitchFamily="34" charset="-122"/>
+                <a:cs typeface="Apple SD Gothic Neo" pitchFamily="34" charset="-120"/>
+              </a:rPr>
+              <a:t>C-010</a:t>
+            </a:r>
+            <a:endParaRPr lang="en-US" sz="950" dirty="0"/>
+          </a:p>
+        </p:txBody>
+      </p:sp>
+      <p:sp>
+        <p:nvSpPr>
+          <p:cNvPr id="36" name="Text 34"/>
+          <p:cNvSpPr/>
+          <p:nvPr/>
+        </p:nvSpPr>
+        <p:spPr>
+          <a:xfrm>
+            <a:off x="7187184" y="4873752"/>
+            <a:ext cx="4160520" cy="109728"/>
+          </a:xfrm>
+          <a:prstGeom prst="rect">
+            <a:avLst/>
+          </a:prstGeom>
+          <a:noFill/>
+          <a:ln/>
+        </p:spPr>
+        <p:txBody>
+          <a:bodyPr wrap="square" lIns="0" tIns="0" rIns="0" bIns="0" rtlCol="0" anchor="ctr">
+            <a:normAutofit/>
+          </a:bodyPr>
+          <a:lstStyle/>
+          <a:p>
+            <a:pPr indent="0" marL="0">
+              <a:buNone/>
+            </a:pPr>
+            <a:r>
               <a:rPr lang="en-US" sz="880" dirty="0">
                 <a:solidFill>
                   <a:srgbClr val="14273A"/>
@@ -8671,7 +11821,7 @@
                 <a:ea typeface="Apple SD Gothic Neo" pitchFamily="34" charset="-122"/>
                 <a:cs typeface="Apple SD Gothic Neo" pitchFamily="34" charset="-120"/>
               </a:rPr>
-              <a:t>04–09</a:t>
+              <a:t>S-002 · S-003 · S-007 · S-010 · S-011</a:t>
             </a:r>
             <a:endParaRPr lang="en-US" sz="880" dirty="0"/>
           </a:p>
@@ -8679,24 +11829,24 @@
       </p:sp>
       <p:sp>
         <p:nvSpPr>
-          <p:cNvPr id="35" name="Shape 33"/>
-          <p:cNvSpPr/>
-          <p:nvPr/>
-        </p:nvSpPr>
-        <p:spPr>
-          <a:xfrm>
-            <a:off x="658368" y="3447288"/>
-            <a:ext cx="868680" cy="384048"/>
-          </a:xfrm>
-          <a:prstGeom prst="rect">
+          <p:cNvPr id="37" name="Shape 35"/>
+          <p:cNvSpPr/>
+          <p:nvPr/>
+        </p:nvSpPr>
+        <p:spPr>
+          <a:xfrm>
+            <a:off x="658368" y="5532120"/>
+            <a:ext cx="10835640" cy="566928"/>
+          </a:xfrm>
+          <a:prstGeom prst="roundRect">
             <a:avLst/>
           </a:prstGeom>
           <a:solidFill>
-            <a:srgbClr val="FFFFFF"/>
+            <a:srgbClr val="EAF7EF"/>
           </a:solidFill>
           <a:ln w="8890">
             <a:solidFill>
-              <a:srgbClr val="FFFFFF"/>
+              <a:srgbClr val="EAF7EF"/>
             </a:solidFill>
             <a:prstDash val="solid"/>
           </a:ln>
@@ -8704,65 +11854,24 @@
       </p:sp>
       <p:sp>
         <p:nvSpPr>
-          <p:cNvPr id="36" name="Text 34"/>
-          <p:cNvSpPr/>
-          <p:nvPr/>
-        </p:nvSpPr>
-        <p:spPr>
-          <a:xfrm>
-            <a:off x="749808" y="3575304"/>
-            <a:ext cx="685800" cy="91440"/>
-          </a:xfrm>
-          <a:prstGeom prst="rect">
-            <a:avLst/>
-          </a:prstGeom>
-          <a:noFill/>
-          <a:ln/>
-        </p:spPr>
-        <p:txBody>
-          <a:bodyPr wrap="square" lIns="0" tIns="0" rIns="0" bIns="0" rtlCol="0" anchor="ctr">
-            <a:normAutofit/>
-          </a:bodyPr>
-          <a:lstStyle/>
-          <a:p>
-            <a:pPr indent="0" marL="0">
-              <a:buNone/>
-            </a:pPr>
-            <a:r>
-              <a:rPr lang="en-US" sz="880" b="1" dirty="0">
-                <a:solidFill>
-                  <a:srgbClr val="0B7890"/>
-                </a:solidFill>
-                <a:latin typeface="Apple SD Gothic Neo" pitchFamily="34" charset="0"/>
-                <a:ea typeface="Apple SD Gothic Neo" pitchFamily="34" charset="-122"/>
-                <a:cs typeface="Apple SD Gothic Neo" pitchFamily="34" charset="-120"/>
-              </a:rPr>
-              <a:t>C-005</a:t>
-            </a:r>
-            <a:endParaRPr lang="en-US" sz="880" dirty="0"/>
-          </a:p>
-        </p:txBody>
-      </p:sp>
-      <p:sp>
-        <p:nvSpPr>
-          <p:cNvPr id="37" name="Shape 35"/>
-          <p:cNvSpPr/>
-          <p:nvPr/>
-        </p:nvSpPr>
-        <p:spPr>
-          <a:xfrm>
-            <a:off x="1828800" y="3447288"/>
-            <a:ext cx="5074920" cy="384048"/>
-          </a:xfrm>
-          <a:prstGeom prst="rect">
+          <p:cNvPr id="38" name="Shape 36"/>
+          <p:cNvSpPr/>
+          <p:nvPr/>
+        </p:nvSpPr>
+        <p:spPr>
+          <a:xfrm>
+            <a:off x="822960" y="5696712"/>
+            <a:ext cx="822960" cy="256032"/>
+          </a:xfrm>
+          <a:prstGeom prst="roundRect">
             <a:avLst/>
           </a:prstGeom>
           <a:solidFill>
-            <a:srgbClr val="FFFFFF"/>
+            <a:srgbClr val="14804A"/>
           </a:solidFill>
           <a:ln w="8890">
             <a:solidFill>
-              <a:srgbClr val="FFFFFF"/>
+              <a:srgbClr val="14804A"/>
             </a:solidFill>
             <a:prstDash val="solid"/>
           </a:ln>
@@ -8770,14 +11879,55 @@
       </p:sp>
       <p:sp>
         <p:nvSpPr>
-          <p:cNvPr id="38" name="Text 36"/>
-          <p:cNvSpPr/>
-          <p:nvPr/>
-        </p:nvSpPr>
-        <p:spPr>
-          <a:xfrm>
-            <a:off x="1920240" y="3575304"/>
-            <a:ext cx="4892040" cy="91440"/>
+          <p:cNvPr id="39" name="Text 37"/>
+          <p:cNvSpPr/>
+          <p:nvPr/>
+        </p:nvSpPr>
+        <p:spPr>
+          <a:xfrm>
+            <a:off x="822960" y="5765292"/>
+            <a:ext cx="822960" cy="91440"/>
+          </a:xfrm>
+          <a:prstGeom prst="rect">
+            <a:avLst/>
+          </a:prstGeom>
+          <a:noFill/>
+          <a:ln/>
+        </p:spPr>
+        <p:txBody>
+          <a:bodyPr wrap="square" lIns="0" tIns="0" rIns="0" bIns="0" rtlCol="0" anchor="ctr">
+            <a:normAutofit/>
+          </a:bodyPr>
+          <a:lstStyle/>
+          <a:p>
+            <a:pPr algn="ctr" indent="0" marL="0">
+              <a:buNone/>
+            </a:pPr>
+            <a:r>
+              <a:rPr lang="en-US" sz="820" b="1" dirty="0">
+                <a:solidFill>
+                  <a:srgbClr val="FFFFFF"/>
+                </a:solidFill>
+                <a:latin typeface="Apple SD Gothic Neo" pitchFamily="34" charset="0"/>
+                <a:ea typeface="Apple SD Gothic Neo" pitchFamily="34" charset="-122"/>
+                <a:cs typeface="Apple SD Gothic Neo" pitchFamily="34" charset="-120"/>
+              </a:rPr>
+              <a:t>source audit rule</a:t>
+            </a:r>
+            <a:endParaRPr lang="en-US" sz="820" dirty="0"/>
+          </a:p>
+        </p:txBody>
+      </p:sp>
+      <p:sp>
+        <p:nvSpPr>
+          <p:cNvPr id="40" name="Text 38"/>
+          <p:cNvSpPr/>
+          <p:nvPr/>
+        </p:nvSpPr>
+        <p:spPr>
+          <a:xfrm>
+            <a:off x="1828800" y="5696712"/>
+            <a:ext cx="9482328" cy="365760"/>
           </a:xfrm>
           <a:prstGeom prst="rect">
             <a:avLst/>
@@ -8795,1145 +11945,23 @@
               <a:buNone/>
             </a:pPr>
             <a:r>
-              <a:rPr lang="en-US" sz="920" dirty="0">
-                <a:solidFill>
-                  <a:srgbClr val="14273A"/>
-                </a:solidFill>
-                <a:latin typeface="Apple SD Gothic Neo" pitchFamily="34" charset="0"/>
-                <a:ea typeface="Apple SD Gothic Neo" pitchFamily="34" charset="-122"/>
-                <a:cs typeface="Apple SD Gothic Neo" pitchFamily="34" charset="-120"/>
-              </a:rPr>
-              <a:t>PCS/PCCS collateral path</a:t>
-            </a:r>
-            <a:endParaRPr lang="en-US" sz="920" dirty="0"/>
-          </a:p>
-        </p:txBody>
-      </p:sp>
-      <p:sp>
-        <p:nvSpPr>
-          <p:cNvPr id="39" name="Shape 37"/>
-          <p:cNvSpPr/>
-          <p:nvPr/>
-        </p:nvSpPr>
-        <p:spPr>
-          <a:xfrm>
-            <a:off x="7223760" y="3447288"/>
-            <a:ext cx="4023360" cy="384048"/>
-          </a:xfrm>
-          <a:prstGeom prst="rect">
-            <a:avLst/>
-          </a:prstGeom>
-          <a:solidFill>
-            <a:srgbClr val="FFFFFF"/>
-          </a:solidFill>
-          <a:ln w="8890">
-            <a:solidFill>
-              <a:srgbClr val="FFFFFF"/>
-            </a:solidFill>
-            <a:prstDash val="solid"/>
-          </a:ln>
-        </p:spPr>
-      </p:sp>
-      <p:sp>
-        <p:nvSpPr>
-          <p:cNvPr id="40" name="Text 38"/>
-          <p:cNvSpPr/>
-          <p:nvPr/>
-        </p:nvSpPr>
-        <p:spPr>
-          <a:xfrm>
-            <a:off x="7315200" y="3575304"/>
-            <a:ext cx="3840480" cy="91440"/>
-          </a:xfrm>
-          <a:prstGeom prst="rect">
-            <a:avLst/>
-          </a:prstGeom>
-          <a:noFill/>
-          <a:ln/>
-        </p:spPr>
-        <p:txBody>
-          <a:bodyPr wrap="square" lIns="0" tIns="0" rIns="0" bIns="0" rtlCol="0" anchor="ctr">
-            <a:normAutofit/>
-          </a:bodyPr>
-          <a:lstStyle/>
-          <a:p>
-            <a:pPr indent="0" marL="0">
-              <a:buNone/>
-            </a:pPr>
-            <a:r>
-              <a:rPr lang="en-US" sz="880" dirty="0">
-                <a:solidFill>
-                  <a:srgbClr val="14273A"/>
-                </a:solidFill>
-                <a:latin typeface="Apple SD Gothic Neo" pitchFamily="34" charset="0"/>
-                <a:ea typeface="Apple SD Gothic Neo" pitchFamily="34" charset="-122"/>
-                <a:cs typeface="Apple SD Gothic Neo" pitchFamily="34" charset="-120"/>
-              </a:rPr>
-              <a:t>10</a:t>
-            </a:r>
-            <a:endParaRPr lang="en-US" sz="880" dirty="0"/>
+              <a:rPr lang="en-US" sz="1330" dirty="0">
+                <a:solidFill>
+                  <a:srgbClr val="14804A"/>
+                </a:solidFill>
+                <a:latin typeface="Apple SD Gothic Neo" pitchFamily="34" charset="0"/>
+                <a:ea typeface="Apple SD Gothic Neo" pitchFamily="34" charset="-122"/>
+                <a:cs typeface="Apple SD Gothic Neo" pitchFamily="34" charset="-120"/>
+              </a:rPr>
+              <a:t>근거를 다시 확인할 때는 source marker → claim → reader-visible slide 문장 → canonical Point를 역방향으로 추적한다. full source citation이 필요한 delivery에는 source registry를 canonical Point package에 추가한 뒤 deck을 재생성한다.</a:t>
+            </a:r>
+            <a:endParaRPr lang="en-US" sz="1330" dirty="0"/>
           </a:p>
         </p:txBody>
       </p:sp>
       <p:sp>
         <p:nvSpPr>
           <p:cNvPr id="41" name="Shape 39"/>
-          <p:cNvSpPr/>
-          <p:nvPr/>
-        </p:nvSpPr>
-        <p:spPr>
-          <a:xfrm>
-            <a:off x="658368" y="3840480"/>
-            <a:ext cx="868680" cy="384048"/>
-          </a:xfrm>
-          <a:prstGeom prst="rect">
-            <a:avLst/>
-          </a:prstGeom>
-          <a:solidFill>
-            <a:srgbClr val="EDF2F7"/>
-          </a:solidFill>
-          <a:ln w="8890">
-            <a:solidFill>
-              <a:srgbClr val="EDF2F7"/>
-            </a:solidFill>
-            <a:prstDash val="solid"/>
-          </a:ln>
-        </p:spPr>
-      </p:sp>
-      <p:sp>
-        <p:nvSpPr>
-          <p:cNvPr id="42" name="Text 40"/>
-          <p:cNvSpPr/>
-          <p:nvPr/>
-        </p:nvSpPr>
-        <p:spPr>
-          <a:xfrm>
-            <a:off x="749808" y="3968496"/>
-            <a:ext cx="685800" cy="91440"/>
-          </a:xfrm>
-          <a:prstGeom prst="rect">
-            <a:avLst/>
-          </a:prstGeom>
-          <a:noFill/>
-          <a:ln/>
-        </p:spPr>
-        <p:txBody>
-          <a:bodyPr wrap="square" lIns="0" tIns="0" rIns="0" bIns="0" rtlCol="0" anchor="ctr">
-            <a:normAutofit/>
-          </a:bodyPr>
-          <a:lstStyle/>
-          <a:p>
-            <a:pPr indent="0" marL="0">
-              <a:buNone/>
-            </a:pPr>
-            <a:r>
-              <a:rPr lang="en-US" sz="880" b="1" dirty="0">
-                <a:solidFill>
-                  <a:srgbClr val="0B7890"/>
-                </a:solidFill>
-                <a:latin typeface="Apple SD Gothic Neo" pitchFamily="34" charset="0"/>
-                <a:ea typeface="Apple SD Gothic Neo" pitchFamily="34" charset="-122"/>
-                <a:cs typeface="Apple SD Gothic Neo" pitchFamily="34" charset="-120"/>
-              </a:rPr>
-              <a:t>C-006</a:t>
-            </a:r>
-            <a:endParaRPr lang="en-US" sz="880" dirty="0"/>
-          </a:p>
-        </p:txBody>
-      </p:sp>
-      <p:sp>
-        <p:nvSpPr>
-          <p:cNvPr id="43" name="Shape 41"/>
-          <p:cNvSpPr/>
-          <p:nvPr/>
-        </p:nvSpPr>
-        <p:spPr>
-          <a:xfrm>
-            <a:off x="1828800" y="3840480"/>
-            <a:ext cx="5074920" cy="384048"/>
-          </a:xfrm>
-          <a:prstGeom prst="rect">
-            <a:avLst/>
-          </a:prstGeom>
-          <a:solidFill>
-            <a:srgbClr val="EDF2F7"/>
-          </a:solidFill>
-          <a:ln w="8890">
-            <a:solidFill>
-              <a:srgbClr val="EDF2F7"/>
-            </a:solidFill>
-            <a:prstDash val="solid"/>
-          </a:ln>
-        </p:spPr>
-      </p:sp>
-      <p:sp>
-        <p:nvSpPr>
-          <p:cNvPr id="44" name="Text 42"/>
-          <p:cNvSpPr/>
-          <p:nvPr/>
-        </p:nvSpPr>
-        <p:spPr>
-          <a:xfrm>
-            <a:off x="1920240" y="3968496"/>
-            <a:ext cx="4892040" cy="91440"/>
-          </a:xfrm>
-          <a:prstGeom prst="rect">
-            <a:avLst/>
-          </a:prstGeom>
-          <a:noFill/>
-          <a:ln/>
-        </p:spPr>
-        <p:txBody>
-          <a:bodyPr wrap="square" lIns="0" tIns="0" rIns="0" bIns="0" rtlCol="0" anchor="ctr">
-            <a:normAutofit/>
-          </a:bodyPr>
-          <a:lstStyle/>
-          <a:p>
-            <a:pPr indent="0" marL="0">
-              <a:buNone/>
-            </a:pPr>
-            <a:r>
-              <a:rPr lang="en-US" sz="920" dirty="0">
-                <a:solidFill>
-                  <a:srgbClr val="14273A"/>
-                </a:solidFill>
-                <a:latin typeface="Apple SD Gothic Neo" pitchFamily="34" charset="0"/>
-                <a:ea typeface="Apple SD Gothic Neo" pitchFamily="34" charset="-122"/>
-                <a:cs typeface="Apple SD Gothic Neo" pitchFamily="34" charset="-120"/>
-              </a:rPr>
-              <a:t>K/D/E + Result profile</a:t>
-            </a:r>
-            <a:endParaRPr lang="en-US" sz="920" dirty="0"/>
-          </a:p>
-        </p:txBody>
-      </p:sp>
-      <p:sp>
-        <p:nvSpPr>
-          <p:cNvPr id="45" name="Shape 43"/>
-          <p:cNvSpPr/>
-          <p:nvPr/>
-        </p:nvSpPr>
-        <p:spPr>
-          <a:xfrm>
-            <a:off x="7223760" y="3840480"/>
-            <a:ext cx="4023360" cy="384048"/>
-          </a:xfrm>
-          <a:prstGeom prst="rect">
-            <a:avLst/>
-          </a:prstGeom>
-          <a:solidFill>
-            <a:srgbClr val="EDF2F7"/>
-          </a:solidFill>
-          <a:ln w="8890">
-            <a:solidFill>
-              <a:srgbClr val="EDF2F7"/>
-            </a:solidFill>
-            <a:prstDash val="solid"/>
-          </a:ln>
-        </p:spPr>
-      </p:sp>
-      <p:sp>
-        <p:nvSpPr>
-          <p:cNvPr id="46" name="Text 44"/>
-          <p:cNvSpPr/>
-          <p:nvPr/>
-        </p:nvSpPr>
-        <p:spPr>
-          <a:xfrm>
-            <a:off x="7315200" y="3968496"/>
-            <a:ext cx="3840480" cy="91440"/>
-          </a:xfrm>
-          <a:prstGeom prst="rect">
-            <a:avLst/>
-          </a:prstGeom>
-          <a:noFill/>
-          <a:ln/>
-        </p:spPr>
-        <p:txBody>
-          <a:bodyPr wrap="square" lIns="0" tIns="0" rIns="0" bIns="0" rtlCol="0" anchor="ctr">
-            <a:normAutofit/>
-          </a:bodyPr>
-          <a:lstStyle/>
-          <a:p>
-            <a:pPr indent="0" marL="0">
-              <a:buNone/>
-            </a:pPr>
-            <a:r>
-              <a:rPr lang="en-US" sz="880" dirty="0">
-                <a:solidFill>
-                  <a:srgbClr val="14273A"/>
-                </a:solidFill>
-                <a:latin typeface="Apple SD Gothic Neo" pitchFamily="34" charset="0"/>
-                <a:ea typeface="Apple SD Gothic Neo" pitchFamily="34" charset="-122"/>
-                <a:cs typeface="Apple SD Gothic Neo" pitchFamily="34" charset="-120"/>
-              </a:rPr>
-              <a:t>07–09</a:t>
-            </a:r>
-            <a:endParaRPr lang="en-US" sz="880" dirty="0"/>
-          </a:p>
-        </p:txBody>
-      </p:sp>
-      <p:sp>
-        <p:nvSpPr>
-          <p:cNvPr id="47" name="Shape 45"/>
-          <p:cNvSpPr/>
-          <p:nvPr/>
-        </p:nvSpPr>
-        <p:spPr>
-          <a:xfrm>
-            <a:off x="658368" y="4233672"/>
-            <a:ext cx="868680" cy="384048"/>
-          </a:xfrm>
-          <a:prstGeom prst="rect">
-            <a:avLst/>
-          </a:prstGeom>
-          <a:solidFill>
-            <a:srgbClr val="FFFFFF"/>
-          </a:solidFill>
-          <a:ln w="8890">
-            <a:solidFill>
-              <a:srgbClr val="FFFFFF"/>
-            </a:solidFill>
-            <a:prstDash val="solid"/>
-          </a:ln>
-        </p:spPr>
-      </p:sp>
-      <p:sp>
-        <p:nvSpPr>
-          <p:cNvPr id="48" name="Text 46"/>
-          <p:cNvSpPr/>
-          <p:nvPr/>
-        </p:nvSpPr>
-        <p:spPr>
-          <a:xfrm>
-            <a:off x="749808" y="4361688"/>
-            <a:ext cx="685800" cy="91440"/>
-          </a:xfrm>
-          <a:prstGeom prst="rect">
-            <a:avLst/>
-          </a:prstGeom>
-          <a:noFill/>
-          <a:ln/>
-        </p:spPr>
-        <p:txBody>
-          <a:bodyPr wrap="square" lIns="0" tIns="0" rIns="0" bIns="0" rtlCol="0" anchor="ctr">
-            <a:normAutofit/>
-          </a:bodyPr>
-          <a:lstStyle/>
-          <a:p>
-            <a:pPr indent="0" marL="0">
-              <a:buNone/>
-            </a:pPr>
-            <a:r>
-              <a:rPr lang="en-US" sz="880" b="1" dirty="0">
-                <a:solidFill>
-                  <a:srgbClr val="0B7890"/>
-                </a:solidFill>
-                <a:latin typeface="Apple SD Gothic Neo" pitchFamily="34" charset="0"/>
-                <a:ea typeface="Apple SD Gothic Neo" pitchFamily="34" charset="-122"/>
-                <a:cs typeface="Apple SD Gothic Neo" pitchFamily="34" charset="-120"/>
-              </a:rPr>
-              <a:t>C-007</a:t>
-            </a:r>
-            <a:endParaRPr lang="en-US" sz="880" dirty="0"/>
-          </a:p>
-        </p:txBody>
-      </p:sp>
-      <p:sp>
-        <p:nvSpPr>
-          <p:cNvPr id="49" name="Shape 47"/>
-          <p:cNvSpPr/>
-          <p:nvPr/>
-        </p:nvSpPr>
-        <p:spPr>
-          <a:xfrm>
-            <a:off x="1828800" y="4233672"/>
-            <a:ext cx="5074920" cy="384048"/>
-          </a:xfrm>
-          <a:prstGeom prst="rect">
-            <a:avLst/>
-          </a:prstGeom>
-          <a:solidFill>
-            <a:srgbClr val="FFFFFF"/>
-          </a:solidFill>
-          <a:ln w="8890">
-            <a:solidFill>
-              <a:srgbClr val="FFFFFF"/>
-            </a:solidFill>
-            <a:prstDash val="solid"/>
-          </a:ln>
-        </p:spPr>
-      </p:sp>
-      <p:sp>
-        <p:nvSpPr>
-          <p:cNvPr id="50" name="Text 48"/>
-          <p:cNvSpPr/>
-          <p:nvPr/>
-        </p:nvSpPr>
-        <p:spPr>
-          <a:xfrm>
-            <a:off x="1920240" y="4361688"/>
-            <a:ext cx="4892040" cy="91440"/>
-          </a:xfrm>
-          <a:prstGeom prst="rect">
-            <a:avLst/>
-          </a:prstGeom>
-          <a:noFill/>
-          <a:ln/>
-        </p:spPr>
-        <p:txBody>
-          <a:bodyPr wrap="square" lIns="0" tIns="0" rIns="0" bIns="0" rtlCol="0" anchor="ctr">
-            <a:normAutofit/>
-          </a:bodyPr>
-          <a:lstStyle/>
-          <a:p>
-            <a:pPr indent="0" marL="0">
-              <a:buNone/>
-            </a:pPr>
-            <a:r>
-              <a:rPr lang="en-US" sz="920" dirty="0">
-                <a:solidFill>
-                  <a:srgbClr val="14273A"/>
-                </a:solidFill>
-                <a:latin typeface="Apple SD Gothic Neo" pitchFamily="34" charset="0"/>
-                <a:ea typeface="Apple SD Gothic Neo" pitchFamily="34" charset="-122"/>
-                <a:cs typeface="Apple SD Gothic Neo" pitchFamily="34" charset="-120"/>
-              </a:rPr>
-              <a:t>proof / non-proof boundary</a:t>
-            </a:r>
-            <a:endParaRPr lang="en-US" sz="920" dirty="0"/>
-          </a:p>
-        </p:txBody>
-      </p:sp>
-      <p:sp>
-        <p:nvSpPr>
-          <p:cNvPr id="51" name="Shape 49"/>
-          <p:cNvSpPr/>
-          <p:nvPr/>
-        </p:nvSpPr>
-        <p:spPr>
-          <a:xfrm>
-            <a:off x="7223760" y="4233672"/>
-            <a:ext cx="4023360" cy="384048"/>
-          </a:xfrm>
-          <a:prstGeom prst="rect">
-            <a:avLst/>
-          </a:prstGeom>
-          <a:solidFill>
-            <a:srgbClr val="FFFFFF"/>
-          </a:solidFill>
-          <a:ln w="8890">
-            <a:solidFill>
-              <a:srgbClr val="FFFFFF"/>
-            </a:solidFill>
-            <a:prstDash val="solid"/>
-          </a:ln>
-        </p:spPr>
-      </p:sp>
-      <p:sp>
-        <p:nvSpPr>
-          <p:cNvPr id="52" name="Text 50"/>
-          <p:cNvSpPr/>
-          <p:nvPr/>
-        </p:nvSpPr>
-        <p:spPr>
-          <a:xfrm>
-            <a:off x="7315200" y="4361688"/>
-            <a:ext cx="3840480" cy="91440"/>
-          </a:xfrm>
-          <a:prstGeom prst="rect">
-            <a:avLst/>
-          </a:prstGeom>
-          <a:noFill/>
-          <a:ln/>
-        </p:spPr>
-        <p:txBody>
-          <a:bodyPr wrap="square" lIns="0" tIns="0" rIns="0" bIns="0" rtlCol="0" anchor="ctr">
-            <a:normAutofit/>
-          </a:bodyPr>
-          <a:lstStyle/>
-          <a:p>
-            <a:pPr indent="0" marL="0">
-              <a:buNone/>
-            </a:pPr>
-            <a:r>
-              <a:rPr lang="en-US" sz="880" dirty="0">
-                <a:solidFill>
-                  <a:srgbClr val="14273A"/>
-                </a:solidFill>
-                <a:latin typeface="Apple SD Gothic Neo" pitchFamily="34" charset="0"/>
-                <a:ea typeface="Apple SD Gothic Neo" pitchFamily="34" charset="-122"/>
-                <a:cs typeface="Apple SD Gothic Neo" pitchFamily="34" charset="-120"/>
-              </a:rPr>
-              <a:t>11</a:t>
-            </a:r>
-            <a:endParaRPr lang="en-US" sz="880" dirty="0"/>
-          </a:p>
-        </p:txBody>
-      </p:sp>
-      <p:sp>
-        <p:nvSpPr>
-          <p:cNvPr id="53" name="Shape 51"/>
-          <p:cNvSpPr/>
-          <p:nvPr/>
-        </p:nvSpPr>
-        <p:spPr>
-          <a:xfrm>
-            <a:off x="658368" y="4626864"/>
-            <a:ext cx="868680" cy="384048"/>
-          </a:xfrm>
-          <a:prstGeom prst="rect">
-            <a:avLst/>
-          </a:prstGeom>
-          <a:solidFill>
-            <a:srgbClr val="EDF2F7"/>
-          </a:solidFill>
-          <a:ln w="8890">
-            <a:solidFill>
-              <a:srgbClr val="EDF2F7"/>
-            </a:solidFill>
-            <a:prstDash val="solid"/>
-          </a:ln>
-        </p:spPr>
-      </p:sp>
-      <p:sp>
-        <p:nvSpPr>
-          <p:cNvPr id="54" name="Text 52"/>
-          <p:cNvSpPr/>
-          <p:nvPr/>
-        </p:nvSpPr>
-        <p:spPr>
-          <a:xfrm>
-            <a:off x="749808" y="4754880"/>
-            <a:ext cx="685800" cy="91440"/>
-          </a:xfrm>
-          <a:prstGeom prst="rect">
-            <a:avLst/>
-          </a:prstGeom>
-          <a:noFill/>
-          <a:ln/>
-        </p:spPr>
-        <p:txBody>
-          <a:bodyPr wrap="square" lIns="0" tIns="0" rIns="0" bIns="0" rtlCol="0" anchor="ctr">
-            <a:normAutofit/>
-          </a:bodyPr>
-          <a:lstStyle/>
-          <a:p>
-            <a:pPr indent="0" marL="0">
-              <a:buNone/>
-            </a:pPr>
-            <a:r>
-              <a:rPr lang="en-US" sz="880" b="1" dirty="0">
-                <a:solidFill>
-                  <a:srgbClr val="0B7890"/>
-                </a:solidFill>
-                <a:latin typeface="Apple SD Gothic Neo" pitchFamily="34" charset="0"/>
-                <a:ea typeface="Apple SD Gothic Neo" pitchFamily="34" charset="-122"/>
-                <a:cs typeface="Apple SD Gothic Neo" pitchFamily="34" charset="-120"/>
-              </a:rPr>
-              <a:t>C-008</a:t>
-            </a:r>
-            <a:endParaRPr lang="en-US" sz="880" dirty="0"/>
-          </a:p>
-        </p:txBody>
-      </p:sp>
-      <p:sp>
-        <p:nvSpPr>
-          <p:cNvPr id="55" name="Shape 53"/>
-          <p:cNvSpPr/>
-          <p:nvPr/>
-        </p:nvSpPr>
-        <p:spPr>
-          <a:xfrm>
-            <a:off x="1828800" y="4626864"/>
-            <a:ext cx="5074920" cy="384048"/>
-          </a:xfrm>
-          <a:prstGeom prst="rect">
-            <a:avLst/>
-          </a:prstGeom>
-          <a:solidFill>
-            <a:srgbClr val="EDF2F7"/>
-          </a:solidFill>
-          <a:ln w="8890">
-            <a:solidFill>
-              <a:srgbClr val="EDF2F7"/>
-            </a:solidFill>
-            <a:prstDash val="solid"/>
-          </a:ln>
-        </p:spPr>
-      </p:sp>
-      <p:sp>
-        <p:nvSpPr>
-          <p:cNvPr id="56" name="Text 54"/>
-          <p:cNvSpPr/>
-          <p:nvPr/>
-        </p:nvSpPr>
-        <p:spPr>
-          <a:xfrm>
-            <a:off x="1920240" y="4754880"/>
-            <a:ext cx="4892040" cy="91440"/>
-          </a:xfrm>
-          <a:prstGeom prst="rect">
-            <a:avLst/>
-          </a:prstGeom>
-          <a:noFill/>
-          <a:ln/>
-        </p:spPr>
-        <p:txBody>
-          <a:bodyPr wrap="square" lIns="0" tIns="0" rIns="0" bIns="0" rtlCol="0" anchor="ctr">
-            <a:normAutofit/>
-          </a:bodyPr>
-          <a:lstStyle/>
-          <a:p>
-            <a:pPr indent="0" marL="0">
-              <a:buNone/>
-            </a:pPr>
-            <a:r>
-              <a:rPr lang="en-US" sz="920" dirty="0">
-                <a:solidFill>
-                  <a:srgbClr val="14273A"/>
-                </a:solidFill>
-                <a:latin typeface="Apple SD Gothic Neo" pitchFamily="34" charset="0"/>
-                <a:ea typeface="Apple SD Gothic Neo" pitchFamily="34" charset="-122"/>
-                <a:cs typeface="Apple SD Gothic Neo" pitchFamily="34" charset="-120"/>
-              </a:rPr>
-              <a:t>Intel-rats strengths / corrections</a:t>
-            </a:r>
-            <a:endParaRPr lang="en-US" sz="920" dirty="0"/>
-          </a:p>
-        </p:txBody>
-      </p:sp>
-      <p:sp>
-        <p:nvSpPr>
-          <p:cNvPr id="57" name="Shape 55"/>
-          <p:cNvSpPr/>
-          <p:nvPr/>
-        </p:nvSpPr>
-        <p:spPr>
-          <a:xfrm>
-            <a:off x="7223760" y="4626864"/>
-            <a:ext cx="4023360" cy="384048"/>
-          </a:xfrm>
-          <a:prstGeom prst="rect">
-            <a:avLst/>
-          </a:prstGeom>
-          <a:solidFill>
-            <a:srgbClr val="EDF2F7"/>
-          </a:solidFill>
-          <a:ln w="8890">
-            <a:solidFill>
-              <a:srgbClr val="EDF2F7"/>
-            </a:solidFill>
-            <a:prstDash val="solid"/>
-          </a:ln>
-        </p:spPr>
-      </p:sp>
-      <p:sp>
-        <p:nvSpPr>
-          <p:cNvPr id="58" name="Text 56"/>
-          <p:cNvSpPr/>
-          <p:nvPr/>
-        </p:nvSpPr>
-        <p:spPr>
-          <a:xfrm>
-            <a:off x="7315200" y="4754880"/>
-            <a:ext cx="3840480" cy="91440"/>
-          </a:xfrm>
-          <a:prstGeom prst="rect">
-            <a:avLst/>
-          </a:prstGeom>
-          <a:noFill/>
-          <a:ln/>
-        </p:spPr>
-        <p:txBody>
-          <a:bodyPr wrap="square" lIns="0" tIns="0" rIns="0" bIns="0" rtlCol="0" anchor="ctr">
-            <a:normAutofit/>
-          </a:bodyPr>
-          <a:lstStyle/>
-          <a:p>
-            <a:pPr indent="0" marL="0">
-              <a:buNone/>
-            </a:pPr>
-            <a:r>
-              <a:rPr lang="en-US" sz="880" dirty="0">
-                <a:solidFill>
-                  <a:srgbClr val="14273A"/>
-                </a:solidFill>
-                <a:latin typeface="Apple SD Gothic Neo" pitchFamily="34" charset="0"/>
-                <a:ea typeface="Apple SD Gothic Neo" pitchFamily="34" charset="-122"/>
-                <a:cs typeface="Apple SD Gothic Neo" pitchFamily="34" charset="-120"/>
-              </a:rPr>
-              <a:t>12</a:t>
-            </a:r>
-            <a:endParaRPr lang="en-US" sz="880" dirty="0"/>
-          </a:p>
-        </p:txBody>
-      </p:sp>
-      <p:sp>
-        <p:nvSpPr>
-          <p:cNvPr id="59" name="Shape 57"/>
-          <p:cNvSpPr/>
-          <p:nvPr/>
-        </p:nvSpPr>
-        <p:spPr>
-          <a:xfrm>
-            <a:off x="658368" y="5020056"/>
-            <a:ext cx="868680" cy="384048"/>
-          </a:xfrm>
-          <a:prstGeom prst="rect">
-            <a:avLst/>
-          </a:prstGeom>
-          <a:solidFill>
-            <a:srgbClr val="FFFFFF"/>
-          </a:solidFill>
-          <a:ln w="8890">
-            <a:solidFill>
-              <a:srgbClr val="FFFFFF"/>
-            </a:solidFill>
-            <a:prstDash val="solid"/>
-          </a:ln>
-        </p:spPr>
-      </p:sp>
-      <p:sp>
-        <p:nvSpPr>
-          <p:cNvPr id="60" name="Text 58"/>
-          <p:cNvSpPr/>
-          <p:nvPr/>
-        </p:nvSpPr>
-        <p:spPr>
-          <a:xfrm>
-            <a:off x="749808" y="5148072"/>
-            <a:ext cx="685800" cy="91440"/>
-          </a:xfrm>
-          <a:prstGeom prst="rect">
-            <a:avLst/>
-          </a:prstGeom>
-          <a:noFill/>
-          <a:ln/>
-        </p:spPr>
-        <p:txBody>
-          <a:bodyPr wrap="square" lIns="0" tIns="0" rIns="0" bIns="0" rtlCol="0" anchor="ctr">
-            <a:normAutofit/>
-          </a:bodyPr>
-          <a:lstStyle/>
-          <a:p>
-            <a:pPr indent="0" marL="0">
-              <a:buNone/>
-            </a:pPr>
-            <a:r>
-              <a:rPr lang="en-US" sz="880" b="1" dirty="0">
-                <a:solidFill>
-                  <a:srgbClr val="0B7890"/>
-                </a:solidFill>
-                <a:latin typeface="Apple SD Gothic Neo" pitchFamily="34" charset="0"/>
-                <a:ea typeface="Apple SD Gothic Neo" pitchFamily="34" charset="-122"/>
-                <a:cs typeface="Apple SD Gothic Neo" pitchFamily="34" charset="-120"/>
-              </a:rPr>
-              <a:t>C-009</a:t>
-            </a:r>
-            <a:endParaRPr lang="en-US" sz="880" dirty="0"/>
-          </a:p>
-        </p:txBody>
-      </p:sp>
-      <p:sp>
-        <p:nvSpPr>
-          <p:cNvPr id="61" name="Shape 59"/>
-          <p:cNvSpPr/>
-          <p:nvPr/>
-        </p:nvSpPr>
-        <p:spPr>
-          <a:xfrm>
-            <a:off x="1828800" y="5020056"/>
-            <a:ext cx="5074920" cy="384048"/>
-          </a:xfrm>
-          <a:prstGeom prst="rect">
-            <a:avLst/>
-          </a:prstGeom>
-          <a:solidFill>
-            <a:srgbClr val="FFFFFF"/>
-          </a:solidFill>
-          <a:ln w="8890">
-            <a:solidFill>
-              <a:srgbClr val="FFFFFF"/>
-            </a:solidFill>
-            <a:prstDash val="solid"/>
-          </a:ln>
-        </p:spPr>
-      </p:sp>
-      <p:sp>
-        <p:nvSpPr>
-          <p:cNvPr id="62" name="Text 60"/>
-          <p:cNvSpPr/>
-          <p:nvPr/>
-        </p:nvSpPr>
-        <p:spPr>
-          <a:xfrm>
-            <a:off x="1920240" y="5148072"/>
-            <a:ext cx="4892040" cy="91440"/>
-          </a:xfrm>
-          <a:prstGeom prst="rect">
-            <a:avLst/>
-          </a:prstGeom>
-          <a:noFill/>
-          <a:ln/>
-        </p:spPr>
-        <p:txBody>
-          <a:bodyPr wrap="square" lIns="0" tIns="0" rIns="0" bIns="0" rtlCol="0" anchor="ctr">
-            <a:normAutofit/>
-          </a:bodyPr>
-          <a:lstStyle/>
-          <a:p>
-            <a:pPr indent="0" marL="0">
-              <a:buNone/>
-            </a:pPr>
-            <a:r>
-              <a:rPr lang="en-US" sz="920" dirty="0">
-                <a:solidFill>
-                  <a:srgbClr val="14273A"/>
-                </a:solidFill>
-                <a:latin typeface="Apple SD Gothic Neo" pitchFamily="34" charset="0"/>
-                <a:ea typeface="Apple SD Gothic Neo" pitchFamily="34" charset="-122"/>
-                <a:cs typeface="Apple SD Gothic Neo" pitchFamily="34" charset="-120"/>
-              </a:rPr>
-              <a:t>SGX vs TDX scope</a:t>
-            </a:r>
-            <a:endParaRPr lang="en-US" sz="920" dirty="0"/>
-          </a:p>
-        </p:txBody>
-      </p:sp>
-      <p:sp>
-        <p:nvSpPr>
-          <p:cNvPr id="63" name="Shape 61"/>
-          <p:cNvSpPr/>
-          <p:nvPr/>
-        </p:nvSpPr>
-        <p:spPr>
-          <a:xfrm>
-            <a:off x="7223760" y="5020056"/>
-            <a:ext cx="4023360" cy="384048"/>
-          </a:xfrm>
-          <a:prstGeom prst="rect">
-            <a:avLst/>
-          </a:prstGeom>
-          <a:solidFill>
-            <a:srgbClr val="FFFFFF"/>
-          </a:solidFill>
-          <a:ln w="8890">
-            <a:solidFill>
-              <a:srgbClr val="FFFFFF"/>
-            </a:solidFill>
-            <a:prstDash val="solid"/>
-          </a:ln>
-        </p:spPr>
-      </p:sp>
-      <p:sp>
-        <p:nvSpPr>
-          <p:cNvPr id="64" name="Text 62"/>
-          <p:cNvSpPr/>
-          <p:nvPr/>
-        </p:nvSpPr>
-        <p:spPr>
-          <a:xfrm>
-            <a:off x="7315200" y="5148072"/>
-            <a:ext cx="3840480" cy="91440"/>
-          </a:xfrm>
-          <a:prstGeom prst="rect">
-            <a:avLst/>
-          </a:prstGeom>
-          <a:noFill/>
-          <a:ln/>
-        </p:spPr>
-        <p:txBody>
-          <a:bodyPr wrap="square" lIns="0" tIns="0" rIns="0" bIns="0" rtlCol="0" anchor="ctr">
-            <a:normAutofit/>
-          </a:bodyPr>
-          <a:lstStyle/>
-          <a:p>
-            <a:pPr indent="0" marL="0">
-              <a:buNone/>
-            </a:pPr>
-            <a:r>
-              <a:rPr lang="en-US" sz="880" dirty="0">
-                <a:solidFill>
-                  <a:srgbClr val="14273A"/>
-                </a:solidFill>
-                <a:latin typeface="Apple SD Gothic Neo" pitchFamily="34" charset="0"/>
-                <a:ea typeface="Apple SD Gothic Neo" pitchFamily="34" charset="-122"/>
-                <a:cs typeface="Apple SD Gothic Neo" pitchFamily="34" charset="-120"/>
-              </a:rPr>
-              <a:t>13</a:t>
-            </a:r>
-            <a:endParaRPr lang="en-US" sz="880" dirty="0"/>
-          </a:p>
-        </p:txBody>
-      </p:sp>
-      <p:sp>
-        <p:nvSpPr>
-          <p:cNvPr id="65" name="Shape 63"/>
-          <p:cNvSpPr/>
-          <p:nvPr/>
-        </p:nvSpPr>
-        <p:spPr>
-          <a:xfrm>
-            <a:off x="658368" y="5413248"/>
-            <a:ext cx="868680" cy="384048"/>
-          </a:xfrm>
-          <a:prstGeom prst="rect">
-            <a:avLst/>
-          </a:prstGeom>
-          <a:solidFill>
-            <a:srgbClr val="EDF2F7"/>
-          </a:solidFill>
-          <a:ln w="8890">
-            <a:solidFill>
-              <a:srgbClr val="EDF2F7"/>
-            </a:solidFill>
-            <a:prstDash val="solid"/>
-          </a:ln>
-        </p:spPr>
-      </p:sp>
-      <p:sp>
-        <p:nvSpPr>
-          <p:cNvPr id="66" name="Text 64"/>
-          <p:cNvSpPr/>
-          <p:nvPr/>
-        </p:nvSpPr>
-        <p:spPr>
-          <a:xfrm>
-            <a:off x="749808" y="5541264"/>
-            <a:ext cx="685800" cy="91440"/>
-          </a:xfrm>
-          <a:prstGeom prst="rect">
-            <a:avLst/>
-          </a:prstGeom>
-          <a:noFill/>
-          <a:ln/>
-        </p:spPr>
-        <p:txBody>
-          <a:bodyPr wrap="square" lIns="0" tIns="0" rIns="0" bIns="0" rtlCol="0" anchor="ctr">
-            <a:normAutofit/>
-          </a:bodyPr>
-          <a:lstStyle/>
-          <a:p>
-            <a:pPr indent="0" marL="0">
-              <a:buNone/>
-            </a:pPr>
-            <a:r>
-              <a:rPr lang="en-US" sz="880" b="1" dirty="0">
-                <a:solidFill>
-                  <a:srgbClr val="0B7890"/>
-                </a:solidFill>
-                <a:latin typeface="Apple SD Gothic Neo" pitchFamily="34" charset="0"/>
-                <a:ea typeface="Apple SD Gothic Neo" pitchFamily="34" charset="-122"/>
-                <a:cs typeface="Apple SD Gothic Neo" pitchFamily="34" charset="-120"/>
-              </a:rPr>
-              <a:t>C-010</a:t>
-            </a:r>
-            <a:endParaRPr lang="en-US" sz="880" dirty="0"/>
-          </a:p>
-        </p:txBody>
-      </p:sp>
-      <p:sp>
-        <p:nvSpPr>
-          <p:cNvPr id="67" name="Shape 65"/>
-          <p:cNvSpPr/>
-          <p:nvPr/>
-        </p:nvSpPr>
-        <p:spPr>
-          <a:xfrm>
-            <a:off x="1828800" y="5413248"/>
-            <a:ext cx="5074920" cy="384048"/>
-          </a:xfrm>
-          <a:prstGeom prst="rect">
-            <a:avLst/>
-          </a:prstGeom>
-          <a:solidFill>
-            <a:srgbClr val="EDF2F7"/>
-          </a:solidFill>
-          <a:ln w="8890">
-            <a:solidFill>
-              <a:srgbClr val="EDF2F7"/>
-            </a:solidFill>
-            <a:prstDash val="solid"/>
-          </a:ln>
-        </p:spPr>
-      </p:sp>
-      <p:sp>
-        <p:nvSpPr>
-          <p:cNvPr id="68" name="Text 66"/>
-          <p:cNvSpPr/>
-          <p:nvPr/>
-        </p:nvSpPr>
-        <p:spPr>
-          <a:xfrm>
-            <a:off x="1920240" y="5541264"/>
-            <a:ext cx="4892040" cy="91440"/>
-          </a:xfrm>
-          <a:prstGeom prst="rect">
-            <a:avLst/>
-          </a:prstGeom>
-          <a:noFill/>
-          <a:ln/>
-        </p:spPr>
-        <p:txBody>
-          <a:bodyPr wrap="square" lIns="0" tIns="0" rIns="0" bIns="0" rtlCol="0" anchor="ctr">
-            <a:normAutofit/>
-          </a:bodyPr>
-          <a:lstStyle/>
-          <a:p>
-            <a:pPr indent="0" marL="0">
-              <a:buNone/>
-            </a:pPr>
-            <a:r>
-              <a:rPr lang="en-US" sz="920" dirty="0">
-                <a:solidFill>
-                  <a:srgbClr val="14273A"/>
-                </a:solidFill>
-                <a:latin typeface="Apple SD Gothic Neo" pitchFamily="34" charset="0"/>
-                <a:ea typeface="Apple SD Gothic Neo" pitchFamily="34" charset="-122"/>
-                <a:cs typeface="Apple SD Gothic Neo" pitchFamily="34" charset="-120"/>
-              </a:rPr>
-              <a:t>owners and pilot</a:t>
-            </a:r>
-            <a:endParaRPr lang="en-US" sz="920" dirty="0"/>
-          </a:p>
-        </p:txBody>
-      </p:sp>
-      <p:sp>
-        <p:nvSpPr>
-          <p:cNvPr id="69" name="Shape 67"/>
-          <p:cNvSpPr/>
-          <p:nvPr/>
-        </p:nvSpPr>
-        <p:spPr>
-          <a:xfrm>
-            <a:off x="7223760" y="5413248"/>
-            <a:ext cx="4023360" cy="384048"/>
-          </a:xfrm>
-          <a:prstGeom prst="rect">
-            <a:avLst/>
-          </a:prstGeom>
-          <a:solidFill>
-            <a:srgbClr val="EDF2F7"/>
-          </a:solidFill>
-          <a:ln w="8890">
-            <a:solidFill>
-              <a:srgbClr val="EDF2F7"/>
-            </a:solidFill>
-            <a:prstDash val="solid"/>
-          </a:ln>
-        </p:spPr>
-      </p:sp>
-      <p:sp>
-        <p:nvSpPr>
-          <p:cNvPr id="70" name="Text 68"/>
-          <p:cNvSpPr/>
-          <p:nvPr/>
-        </p:nvSpPr>
-        <p:spPr>
-          <a:xfrm>
-            <a:off x="7315200" y="5541264"/>
-            <a:ext cx="3840480" cy="91440"/>
-          </a:xfrm>
-          <a:prstGeom prst="rect">
-            <a:avLst/>
-          </a:prstGeom>
-          <a:noFill/>
-          <a:ln/>
-        </p:spPr>
-        <p:txBody>
-          <a:bodyPr wrap="square" lIns="0" tIns="0" rIns="0" bIns="0" rtlCol="0" anchor="ctr">
-            <a:normAutofit/>
-          </a:bodyPr>
-          <a:lstStyle/>
-          <a:p>
-            <a:pPr indent="0" marL="0">
-              <a:buNone/>
-            </a:pPr>
-            <a:r>
-              <a:rPr lang="en-US" sz="880" dirty="0">
-                <a:solidFill>
-                  <a:srgbClr val="14273A"/>
-                </a:solidFill>
-                <a:latin typeface="Apple SD Gothic Neo" pitchFamily="34" charset="0"/>
-                <a:ea typeface="Apple SD Gothic Neo" pitchFamily="34" charset="-122"/>
-                <a:cs typeface="Apple SD Gothic Neo" pitchFamily="34" charset="-120"/>
-              </a:rPr>
-              <a:t>14</a:t>
-            </a:r>
-            <a:endParaRPr lang="en-US" sz="880" dirty="0"/>
-          </a:p>
-        </p:txBody>
-      </p:sp>
-      <p:sp>
-        <p:nvSpPr>
-          <p:cNvPr id="71" name="Shape 69"/>
-          <p:cNvSpPr/>
-          <p:nvPr/>
-        </p:nvSpPr>
-        <p:spPr>
-          <a:xfrm>
-            <a:off x="658368" y="5971032"/>
-            <a:ext cx="11045952" cy="228600"/>
-          </a:xfrm>
-          <a:prstGeom prst="roundRect">
-            <a:avLst/>
-          </a:prstGeom>
-          <a:solidFill>
-            <a:srgbClr val="FFF7E6"/>
-          </a:solidFill>
-          <a:ln w="8890">
-            <a:solidFill>
-              <a:srgbClr val="FFF7E6"/>
-            </a:solidFill>
-            <a:prstDash val="solid"/>
-          </a:ln>
-        </p:spPr>
-      </p:sp>
-      <p:sp>
-        <p:nvSpPr>
-          <p:cNvPr id="72" name="Text 70"/>
-          <p:cNvSpPr/>
-          <p:nvPr/>
-        </p:nvSpPr>
-        <p:spPr>
-          <a:xfrm>
-            <a:off x="868680" y="6044184"/>
-            <a:ext cx="10607040" cy="91440"/>
-          </a:xfrm>
-          <a:prstGeom prst="rect">
-            <a:avLst/>
-          </a:prstGeom>
-          <a:noFill/>
-          <a:ln/>
-        </p:spPr>
-        <p:txBody>
-          <a:bodyPr wrap="square" lIns="0" tIns="0" rIns="0" bIns="0" rtlCol="0" anchor="ctr">
-            <a:normAutofit/>
-          </a:bodyPr>
-          <a:lstStyle/>
-          <a:p>
-            <a:pPr algn="ctr" indent="0" marL="0">
-              <a:buNone/>
-            </a:pPr>
-            <a:r>
-              <a:rPr lang="en-US" sz="780" b="1" dirty="0">
-                <a:solidFill>
-                  <a:srgbClr val="9A6500"/>
-                </a:solidFill>
-                <a:latin typeface="Apple SD Gothic Neo" pitchFamily="34" charset="0"/>
-                <a:ea typeface="Apple SD Gothic Neo" pitchFamily="34" charset="-122"/>
-                <a:cs typeface="Apple SD Gothic Neo" pitchFamily="34" charset="-120"/>
-              </a:rPr>
-              <a:t>Exact object-level location, qualifiers, proof limits, implications, sources, and all N/E/B/X IDs: final/structural-coverage-map.json + final/prose-trace.json</a:t>
-            </a:r>
-            <a:endParaRPr lang="en-US" sz="780" dirty="0"/>
-          </a:p>
-        </p:txBody>
-      </p:sp>
-      <p:sp>
-        <p:nvSpPr>
-          <p:cNvPr id="73" name="Shape 71"/>
           <p:cNvSpPr/>
           <p:nvPr/>
         </p:nvSpPr>
@@ -9956,7 +11984,7 @@
       </p:sp>
       <p:sp>
         <p:nvSpPr>
-          <p:cNvPr id="74" name="Text 72"/>
+          <p:cNvPr id="42" name="Text 40"/>
           <p:cNvSpPr/>
           <p:nvPr/>
         </p:nvSpPr>
@@ -9989,7 +12017,7 @@
                 <a:ea typeface="Apple SD Gothic Neo" pitchFamily="34" charset="-122"/>
                 <a:cs typeface="Apple SD Gothic Neo" pitchFamily="34" charset="-120"/>
               </a:rPr>
-              <a:t>Canonical Point hash and complete coverage/prose trace.</a:t>
+              <a:t>source_map · provenance · no invented bibliography</a:t>
             </a:r>
             <a:endParaRPr lang="en-US" sz="780" dirty="0"/>
           </a:p>
@@ -9997,7 +12025,7 @@
       </p:sp>
       <p:sp>
         <p:nvSpPr>
-          <p:cNvPr id="75" name="Text 73"/>
+          <p:cNvPr id="43" name="Text 41"/>
           <p:cNvSpPr/>
           <p:nvPr/>
         </p:nvSpPr>
@@ -10030,7 +12058,7 @@
                 <a:ea typeface="Apple SD Gothic Neo" pitchFamily="34" charset="-122"/>
                 <a:cs typeface="Apple SD Gothic Neo" pitchFamily="34" charset="-120"/>
               </a:rPr>
-              <a:t>Sources: RFC 9334 · Intel DCAP / TDX documentation</a:t>
+              <a:t>Source markers: 〔S-…〕 · Appendix 16</a:t>
             </a:r>
             <a:endParaRPr lang="en-US" sz="780" dirty="0"/>
           </a:p>
@@ -10199,8 +12227,8 @@
         </p:nvSpPr>
         <p:spPr>
           <a:xfrm>
-            <a:off x="512064" y="1463040"/>
-            <a:ext cx="3401568" cy="1645920"/>
+            <a:off x="475488" y="1325880"/>
+            <a:ext cx="2633472" cy="1691640"/>
           </a:xfrm>
           <a:prstGeom prst="roundRect">
             <a:avLst/>
@@ -10224,7 +12252,7 @@
         </p:nvSpPr>
         <p:spPr>
           <a:xfrm>
-            <a:off x="676656" y="1627632"/>
+            <a:off x="640080" y="1490472"/>
             <a:ext cx="1152144" cy="256032"/>
           </a:xfrm>
           <a:prstGeom prst="roundRect">
@@ -10249,7 +12277,7 @@
         </p:nvSpPr>
         <p:spPr>
           <a:xfrm>
-            <a:off x="676656" y="1696212"/>
+            <a:off x="640080" y="1559052"/>
             <a:ext cx="1152144" cy="91440"/>
           </a:xfrm>
           <a:prstGeom prst="rect">
@@ -10290,8 +12318,8 @@
         </p:nvSpPr>
         <p:spPr>
           <a:xfrm>
-            <a:off x="694944" y="2039112"/>
-            <a:ext cx="3035808" cy="256032"/>
+            <a:off x="658368" y="1901952"/>
+            <a:ext cx="2267712" cy="256032"/>
           </a:xfrm>
           <a:prstGeom prst="rect">
             <a:avLst/>
@@ -10331,8 +12359,8 @@
         </p:nvSpPr>
         <p:spPr>
           <a:xfrm>
-            <a:off x="694944" y="2432304"/>
-            <a:ext cx="3035808" cy="557784"/>
+            <a:off x="658368" y="2295144"/>
+            <a:ext cx="2267712" cy="603504"/>
           </a:xfrm>
           <a:prstGeom prst="rect">
             <a:avLst/>
@@ -10372,8 +12400,8 @@
         </p:nvSpPr>
         <p:spPr>
           <a:xfrm>
-            <a:off x="4315968" y="1463040"/>
-            <a:ext cx="3401568" cy="1645920"/>
+            <a:off x="3374136" y="1325880"/>
+            <a:ext cx="2633472" cy="1691640"/>
           </a:xfrm>
           <a:prstGeom prst="roundRect">
             <a:avLst/>
@@ -10397,7 +12425,7 @@
         </p:nvSpPr>
         <p:spPr>
           <a:xfrm>
-            <a:off x="4480560" y="1627632"/>
+            <a:off x="3538728" y="1490472"/>
             <a:ext cx="1152144" cy="256032"/>
           </a:xfrm>
           <a:prstGeom prst="roundRect">
@@ -10422,7 +12450,7 @@
         </p:nvSpPr>
         <p:spPr>
           <a:xfrm>
-            <a:off x="4480560" y="1696212"/>
+            <a:off x="3538728" y="1559052"/>
             <a:ext cx="1152144" cy="91440"/>
           </a:xfrm>
           <a:prstGeom prst="rect">
@@ -10449,7 +12477,7 @@
                 <a:ea typeface="Apple SD Gothic Neo" pitchFamily="34" charset="-122"/>
                 <a:cs typeface="Apple SD Gothic Neo" pitchFamily="34" charset="-120"/>
               </a:rPr>
-              <a:t>QGS</a:t>
+              <a:t>QGS daemon</a:t>
             </a:r>
             <a:endParaRPr lang="en-US" sz="820" dirty="0"/>
           </a:p>
@@ -10463,8 +12491,8 @@
         </p:nvSpPr>
         <p:spPr>
           <a:xfrm>
-            <a:off x="4498848" y="2039112"/>
-            <a:ext cx="3035808" cy="256032"/>
+            <a:off x="3557016" y="1901952"/>
+            <a:ext cx="2267712" cy="256032"/>
           </a:xfrm>
           <a:prstGeom prst="rect">
             <a:avLst/>
@@ -10490,7 +12518,7 @@
                 <a:ea typeface="Apple SD Gothic Neo" pitchFamily="34" charset="-122"/>
                 <a:cs typeface="Apple SD Gothic Neo" pitchFamily="34" charset="-120"/>
               </a:rPr>
-              <a:t>host-side transport</a:t>
+              <a:t>untrusted host transport</a:t>
             </a:r>
             <a:endParaRPr lang="en-US" sz="1530" dirty="0"/>
           </a:p>
@@ -10504,8 +12532,8 @@
         </p:nvSpPr>
         <p:spPr>
           <a:xfrm>
-            <a:off x="4498848" y="2432304"/>
-            <a:ext cx="3035808" cy="557784"/>
+            <a:off x="3557016" y="2295144"/>
+            <a:ext cx="2267712" cy="603504"/>
           </a:xfrm>
           <a:prstGeom prst="rect">
             <a:avLst/>
@@ -10545,8 +12573,8 @@
         </p:nvSpPr>
         <p:spPr>
           <a:xfrm>
-            <a:off x="8119872" y="1463040"/>
-            <a:ext cx="3401568" cy="1645920"/>
+            <a:off x="6272784" y="1325880"/>
+            <a:ext cx="2633472" cy="1691640"/>
           </a:xfrm>
           <a:prstGeom prst="roundRect">
             <a:avLst/>
@@ -10570,7 +12598,7 @@
         </p:nvSpPr>
         <p:spPr>
           <a:xfrm>
-            <a:off x="8284464" y="1627632"/>
+            <a:off x="6437376" y="1490472"/>
             <a:ext cx="1152144" cy="256032"/>
           </a:xfrm>
           <a:prstGeom prst="roundRect">
@@ -10595,7 +12623,7 @@
         </p:nvSpPr>
         <p:spPr>
           <a:xfrm>
-            <a:off x="8284464" y="1696212"/>
+            <a:off x="6437376" y="1559052"/>
             <a:ext cx="1152144" cy="91440"/>
           </a:xfrm>
           <a:prstGeom prst="rect">
@@ -10636,8 +12664,8 @@
         </p:nvSpPr>
         <p:spPr>
           <a:xfrm>
-            <a:off x="8302752" y="2039112"/>
-            <a:ext cx="3035808" cy="256032"/>
+            <a:off x="6455664" y="1901952"/>
+            <a:ext cx="2267712" cy="256032"/>
           </a:xfrm>
           <a:prstGeom prst="rect">
             <a:avLst/>
@@ -10677,8 +12705,8 @@
         </p:nvSpPr>
         <p:spPr>
           <a:xfrm>
-            <a:off x="8302752" y="2432304"/>
-            <a:ext cx="3035808" cy="557784"/>
+            <a:off x="6455664" y="2295144"/>
+            <a:ext cx="2267712" cy="603504"/>
           </a:xfrm>
           <a:prstGeom prst="rect">
             <a:avLst/>
@@ -10718,8 +12746,8 @@
         </p:nvSpPr>
         <p:spPr>
           <a:xfrm>
-            <a:off x="512064" y="3547872"/>
-            <a:ext cx="3401568" cy="1645920"/>
+            <a:off x="9171432" y="1325880"/>
+            <a:ext cx="2633472" cy="1691640"/>
           </a:xfrm>
           <a:prstGeom prst="roundRect">
             <a:avLst/>
@@ -10743,7 +12771,7 @@
         </p:nvSpPr>
         <p:spPr>
           <a:xfrm>
-            <a:off x="676656" y="3712464"/>
+            <a:off x="9336024" y="1490472"/>
             <a:ext cx="1152144" cy="256032"/>
           </a:xfrm>
           <a:prstGeom prst="roundRect">
@@ -10768,7 +12796,7 @@
         </p:nvSpPr>
         <p:spPr>
           <a:xfrm>
-            <a:off x="676656" y="3781044"/>
+            <a:off x="9336024" y="1559052"/>
             <a:ext cx="1152144" cy="91440"/>
           </a:xfrm>
           <a:prstGeom prst="rect">
@@ -10809,8 +12837,8 @@
         </p:nvSpPr>
         <p:spPr>
           <a:xfrm>
-            <a:off x="694944" y="4123944"/>
-            <a:ext cx="3035808" cy="256032"/>
+            <a:off x="9354312" y="1901952"/>
+            <a:ext cx="2267712" cy="256032"/>
           </a:xfrm>
           <a:prstGeom prst="rect">
             <a:avLst/>
@@ -10850,8 +12878,8 @@
         </p:nvSpPr>
         <p:spPr>
           <a:xfrm>
-            <a:off x="694944" y="4517136"/>
-            <a:ext cx="3035808" cy="557784"/>
+            <a:off x="9354312" y="2295144"/>
+            <a:ext cx="2267712" cy="603504"/>
           </a:xfrm>
           <a:prstGeom prst="rect">
             <a:avLst/>
@@ -10877,7 +12905,7 @@
                 <a:ea typeface="Apple SD Gothic Neo" pitchFamily="34" charset="-122"/>
                 <a:cs typeface="Apple SD Gothic Neo" pitchFamily="34" charset="-120"/>
               </a:rPr>
-              <a:t>nonce를 보관하고 Evidence를 검증·평가해 Result를 서명한다.</a:t>
+              <a:t>nonce를 내부 보관하고 Evidence를 평가해 Result를 서명한다.</a:t>
             </a:r>
             <a:endParaRPr lang="en-US" sz="1230" dirty="0"/>
           </a:p>
@@ -10891,8 +12919,8 @@
         </p:nvSpPr>
         <p:spPr>
           <a:xfrm>
-            <a:off x="4315968" y="3547872"/>
-            <a:ext cx="3401568" cy="1645920"/>
+            <a:off x="621792" y="3401568"/>
+            <a:ext cx="3401568" cy="1664208"/>
           </a:xfrm>
           <a:prstGeom prst="roundRect">
             <a:avLst/>
@@ -10916,7 +12944,7 @@
         </p:nvSpPr>
         <p:spPr>
           <a:xfrm>
-            <a:off x="4480560" y="3712464"/>
+            <a:off x="786384" y="3566160"/>
             <a:ext cx="1152144" cy="256032"/>
           </a:xfrm>
           <a:prstGeom prst="roundRect">
@@ -10941,7 +12969,7 @@
         </p:nvSpPr>
         <p:spPr>
           <a:xfrm>
-            <a:off x="4480560" y="3781044"/>
+            <a:off x="786384" y="3634740"/>
             <a:ext cx="1152144" cy="91440"/>
           </a:xfrm>
           <a:prstGeom prst="rect">
@@ -10982,7 +13010,7 @@
         </p:nvSpPr>
         <p:spPr>
           <a:xfrm>
-            <a:off x="4498848" y="4123944"/>
+            <a:off x="804672" y="3977640"/>
             <a:ext cx="3035808" cy="256032"/>
           </a:xfrm>
           <a:prstGeom prst="rect">
@@ -11023,8 +13051,8 @@
         </p:nvSpPr>
         <p:spPr>
           <a:xfrm>
-            <a:off x="4498848" y="4517136"/>
-            <a:ext cx="3035808" cy="557784"/>
+            <a:off x="804672" y="4370832"/>
+            <a:ext cx="3035808" cy="576072"/>
           </a:xfrm>
           <a:prstGeom prst="rect">
             <a:avLst/>
@@ -11050,7 +13078,7 @@
                 <a:ea typeface="Apple SD Gothic Neo" pitchFamily="34" charset="-122"/>
                 <a:cs typeface="Apple SD Gothic Neo" pitchFamily="34" charset="-120"/>
               </a:rPr>
-              <a:t>Result를 확인하고 secret release policy를 집행한다.</a:t>
+              <a:t>Result를 확인하고 release policy를 집행한다.</a:t>
             </a:r>
             <a:endParaRPr lang="en-US" sz="1230" dirty="0"/>
           </a:p>
@@ -11064,8 +13092,8 @@
         </p:nvSpPr>
         <p:spPr>
           <a:xfrm>
-            <a:off x="8119872" y="3547872"/>
-            <a:ext cx="3401568" cy="1645920"/>
+            <a:off x="4416552" y="3401568"/>
+            <a:ext cx="3401568" cy="1664208"/>
           </a:xfrm>
           <a:prstGeom prst="roundRect">
             <a:avLst/>
@@ -11089,7 +13117,7 @@
         </p:nvSpPr>
         <p:spPr>
           <a:xfrm>
-            <a:off x="8284464" y="3712464"/>
+            <a:off x="4581144" y="3566160"/>
             <a:ext cx="1152144" cy="256032"/>
           </a:xfrm>
           <a:prstGeom prst="roundRect">
@@ -11114,7 +13142,7 @@
         </p:nvSpPr>
         <p:spPr>
           <a:xfrm>
-            <a:off x="8284464" y="3781044"/>
+            <a:off x="4581144" y="3634740"/>
             <a:ext cx="1152144" cy="91440"/>
           </a:xfrm>
           <a:prstGeom prst="rect">
@@ -11141,7 +13169,7 @@
                 <a:ea typeface="Apple SD Gothic Neo" pitchFamily="34" charset="-122"/>
                 <a:cs typeface="Apple SD Gothic Neo" pitchFamily="34" charset="-120"/>
               </a:rPr>
-              <a:t>PCS/PCCS</a:t>
+              <a:t>Intel PCS</a:t>
             </a:r>
             <a:endParaRPr lang="en-US" sz="820" dirty="0"/>
           </a:p>
@@ -11155,7 +13183,7 @@
         </p:nvSpPr>
         <p:spPr>
           <a:xfrm>
-            <a:off x="8302752" y="4123944"/>
+            <a:off x="4599432" y="3977640"/>
             <a:ext cx="3035808" cy="256032"/>
           </a:xfrm>
           <a:prstGeom prst="rect">
@@ -11182,7 +13210,7 @@
                 <a:ea typeface="Apple SD Gothic Neo" pitchFamily="34" charset="-122"/>
                 <a:cs typeface="Apple SD Gothic Neo" pitchFamily="34" charset="-120"/>
               </a:rPr>
-              <a:t>authority / cache</a:t>
+              <a:t>서명된 collateral의 권위 원천</a:t>
             </a:r>
             <a:endParaRPr lang="en-US" sz="1530" dirty="0"/>
           </a:p>
@@ -11196,8 +13224,8 @@
         </p:nvSpPr>
         <p:spPr>
           <a:xfrm>
-            <a:off x="8302752" y="4517136"/>
-            <a:ext cx="3035808" cy="557784"/>
+            <a:off x="4599432" y="4370832"/>
+            <a:ext cx="3035808" cy="576072"/>
           </a:xfrm>
           <a:prstGeom prst="rect">
             <a:avLst/>
@@ -11223,7 +13251,7 @@
                 <a:ea typeface="Apple SD Gothic Neo" pitchFamily="34" charset="-122"/>
                 <a:cs typeface="Apple SD Gothic Neo" pitchFamily="34" charset="-120"/>
               </a:rPr>
-              <a:t>PCS 서명은 검증하고 PCCS cache 자체는 권위로 믿지 않는다.</a:t>
+              <a:t>PCK·CRL·QE identity·TCB info의 signed origin이다.</a:t>
             </a:r>
             <a:endParaRPr lang="en-US" sz="1230" dirty="0"/>
           </a:p>
@@ -11237,8 +13265,247 @@
         </p:nvSpPr>
         <p:spPr>
           <a:xfrm>
-            <a:off x="658368" y="5532120"/>
-            <a:ext cx="10835640" cy="566928"/>
+            <a:off x="8211312" y="3401568"/>
+            <a:ext cx="3401568" cy="1664208"/>
+          </a:xfrm>
+          <a:prstGeom prst="roundRect">
+            <a:avLst/>
+          </a:prstGeom>
+          <a:solidFill>
+            <a:srgbClr val="FFFFFF"/>
+          </a:solidFill>
+          <a:ln w="8890">
+            <a:solidFill>
+              <a:srgbClr val="FFFFFF"/>
+            </a:solidFill>
+            <a:prstDash val="solid"/>
+          </a:ln>
+        </p:spPr>
+      </p:sp>
+      <p:sp>
+        <p:nvSpPr>
+          <p:cNvPr id="36" name="Shape 34"/>
+          <p:cNvSpPr/>
+          <p:nvPr/>
+        </p:nvSpPr>
+        <p:spPr>
+          <a:xfrm>
+            <a:off x="8375904" y="3566160"/>
+            <a:ext cx="1152144" cy="256032"/>
+          </a:xfrm>
+          <a:prstGeom prst="roundRect">
+            <a:avLst/>
+          </a:prstGeom>
+          <a:solidFill>
+            <a:srgbClr val="526B84"/>
+          </a:solidFill>
+          <a:ln w="8890">
+            <a:solidFill>
+              <a:srgbClr val="526B84"/>
+            </a:solidFill>
+            <a:prstDash val="solid"/>
+          </a:ln>
+        </p:spPr>
+      </p:sp>
+      <p:sp>
+        <p:nvSpPr>
+          <p:cNvPr id="37" name="Text 35"/>
+          <p:cNvSpPr/>
+          <p:nvPr/>
+        </p:nvSpPr>
+        <p:spPr>
+          <a:xfrm>
+            <a:off x="8375904" y="3634740"/>
+            <a:ext cx="1152144" cy="91440"/>
+          </a:xfrm>
+          <a:prstGeom prst="rect">
+            <a:avLst/>
+          </a:prstGeom>
+          <a:noFill/>
+          <a:ln/>
+        </p:spPr>
+        <p:txBody>
+          <a:bodyPr wrap="square" lIns="0" tIns="0" rIns="0" bIns="0" rtlCol="0" anchor="ctr">
+            <a:normAutofit/>
+          </a:bodyPr>
+          <a:lstStyle/>
+          <a:p>
+            <a:pPr algn="ctr" indent="0" marL="0">
+              <a:buNone/>
+            </a:pPr>
+            <a:r>
+              <a:rPr lang="en-US" sz="820" b="1" dirty="0">
+                <a:solidFill>
+                  <a:srgbClr val="FFFFFF"/>
+                </a:solidFill>
+                <a:latin typeface="Apple SD Gothic Neo" pitchFamily="34" charset="0"/>
+                <a:ea typeface="Apple SD Gothic Neo" pitchFamily="34" charset="-122"/>
+                <a:cs typeface="Apple SD Gothic Neo" pitchFamily="34" charset="-120"/>
+              </a:rPr>
+              <a:t>PCCS</a:t>
+            </a:r>
+            <a:endParaRPr lang="en-US" sz="820" dirty="0"/>
+          </a:p>
+        </p:txBody>
+      </p:sp>
+      <p:sp>
+        <p:nvSpPr>
+          <p:cNvPr id="38" name="Text 36"/>
+          <p:cNvSpPr/>
+          <p:nvPr/>
+        </p:nvSpPr>
+        <p:spPr>
+          <a:xfrm>
+            <a:off x="8394192" y="3977640"/>
+            <a:ext cx="3035808" cy="256032"/>
+          </a:xfrm>
+          <a:prstGeom prst="rect">
+            <a:avLst/>
+          </a:prstGeom>
+          <a:noFill/>
+          <a:ln/>
+        </p:spPr>
+        <p:txBody>
+          <a:bodyPr wrap="square" lIns="0" tIns="0" rIns="0" bIns="0" rtlCol="0" anchor="ctr">
+            <a:normAutofit/>
+          </a:bodyPr>
+          <a:lstStyle/>
+          <a:p>
+            <a:pPr indent="0" marL="0">
+              <a:buNone/>
+            </a:pPr>
+            <a:r>
+              <a:rPr lang="en-US" sz="1530" b="1" dirty="0">
+                <a:solidFill>
+                  <a:srgbClr val="14273A"/>
+                </a:solidFill>
+                <a:latin typeface="Apple SD Gothic Neo" pitchFamily="34" charset="0"/>
+                <a:ea typeface="Apple SD Gothic Neo" pitchFamily="34" charset="-122"/>
+                <a:cs typeface="Apple SD Gothic Neo" pitchFamily="34" charset="-120"/>
+              </a:rPr>
+              <a:t>collateral cache / transport</a:t>
+            </a:r>
+            <a:endParaRPr lang="en-US" sz="1530" dirty="0"/>
+          </a:p>
+        </p:txBody>
+      </p:sp>
+      <p:sp>
+        <p:nvSpPr>
+          <p:cNvPr id="39" name="Text 37"/>
+          <p:cNvSpPr/>
+          <p:nvPr/>
+        </p:nvSpPr>
+        <p:spPr>
+          <a:xfrm>
+            <a:off x="8394192" y="4370832"/>
+            <a:ext cx="3035808" cy="576072"/>
+          </a:xfrm>
+          <a:prstGeom prst="rect">
+            <a:avLst/>
+          </a:prstGeom>
+          <a:noFill/>
+          <a:ln/>
+        </p:spPr>
+        <p:txBody>
+          <a:bodyPr wrap="square" lIns="0" tIns="0" rIns="0" bIns="0" rtlCol="0" anchor="ctr">
+            <a:normAutofit/>
+          </a:bodyPr>
+          <a:lstStyle/>
+          <a:p>
+            <a:pPr indent="0" marL="0">
+              <a:buNone/>
+            </a:pPr>
+            <a:r>
+              <a:rPr lang="en-US" sz="1230" dirty="0">
+                <a:solidFill>
+                  <a:srgbClr val="14273A"/>
+                </a:solidFill>
+                <a:latin typeface="Apple SD Gothic Neo" pitchFamily="34" charset="0"/>
+                <a:ea typeface="Apple SD Gothic Neo" pitchFamily="34" charset="-122"/>
+                <a:cs typeface="Apple SD Gothic Neo" pitchFamily="34" charset="-120"/>
+              </a:rPr>
+              <a:t>PCS의 signed bytes를 운반하지만 자체 권위는 없다.</a:t>
+            </a:r>
+            <a:endParaRPr lang="en-US" sz="1230" dirty="0"/>
+          </a:p>
+        </p:txBody>
+      </p:sp>
+      <p:sp>
+        <p:nvSpPr>
+          <p:cNvPr id="40" name="Shape 38"/>
+          <p:cNvSpPr/>
+          <p:nvPr/>
+        </p:nvSpPr>
+        <p:spPr>
+          <a:xfrm>
+            <a:off x="7744968" y="4315968"/>
+            <a:ext cx="402336" cy="0"/>
+          </a:xfrm>
+          <a:prstGeom prst="line">
+            <a:avLst/>
+          </a:prstGeom>
+          <a:noFill/>
+          <a:ln w="22860">
+            <a:solidFill>
+              <a:srgbClr val="9A6500"/>
+            </a:solidFill>
+            <a:prstDash val="solid"/>
+            <a:headEnd type="none"/>
+            <a:tailEnd type="triangle"/>
+          </a:ln>
+        </p:spPr>
+      </p:sp>
+      <p:sp>
+        <p:nvSpPr>
+          <p:cNvPr id="41" name="Text 39"/>
+          <p:cNvSpPr/>
+          <p:nvPr/>
+        </p:nvSpPr>
+        <p:spPr>
+          <a:xfrm>
+            <a:off x="7571232" y="4078224"/>
+            <a:ext cx="786384" cy="109728"/>
+          </a:xfrm>
+          <a:prstGeom prst="rect">
+            <a:avLst/>
+          </a:prstGeom>
+          <a:noFill/>
+          <a:ln/>
+        </p:spPr>
+        <p:txBody>
+          <a:bodyPr wrap="square" lIns="0" tIns="0" rIns="0" bIns="0" rtlCol="0" anchor="ctr">
+            <a:normAutofit/>
+          </a:bodyPr>
+          <a:lstStyle/>
+          <a:p>
+            <a:pPr algn="ctr" indent="0" marL="0">
+              <a:buNone/>
+            </a:pPr>
+            <a:r>
+              <a:rPr lang="en-US" sz="830" b="1" dirty="0">
+                <a:solidFill>
+                  <a:srgbClr val="9A6500"/>
+                </a:solidFill>
+                <a:latin typeface="Apple SD Gothic Neo" pitchFamily="34" charset="0"/>
+                <a:ea typeface="Apple SD Gothic Neo" pitchFamily="34" charset="-122"/>
+                <a:cs typeface="Apple SD Gothic Neo" pitchFamily="34" charset="-120"/>
+              </a:rPr>
+              <a:t>signed collateral</a:t>
+            </a:r>
+            <a:endParaRPr lang="en-US" sz="830" dirty="0"/>
+          </a:p>
+        </p:txBody>
+      </p:sp>
+      <p:sp>
+        <p:nvSpPr>
+          <p:cNvPr id="42" name="Shape 40"/>
+          <p:cNvSpPr/>
+          <p:nvPr/>
+        </p:nvSpPr>
+        <p:spPr>
+          <a:xfrm>
+            <a:off x="658368" y="5376672"/>
+            <a:ext cx="10835640" cy="694944"/>
           </a:xfrm>
           <a:prstGeom prst="roundRect">
             <a:avLst/>
@@ -11256,13 +13523,13 @@
       </p:sp>
       <p:sp>
         <p:nvSpPr>
-          <p:cNvPr id="36" name="Shape 34"/>
-          <p:cNvSpPr/>
-          <p:nvPr/>
-        </p:nvSpPr>
-        <p:spPr>
-          <a:xfrm>
-            <a:off x="822960" y="5696712"/>
+          <p:cNvPr id="43" name="Shape 41"/>
+          <p:cNvSpPr/>
+          <p:nvPr/>
+        </p:nvSpPr>
+        <p:spPr>
+          <a:xfrm>
+            <a:off x="822960" y="5541264"/>
             <a:ext cx="822960" cy="256032"/>
           </a:xfrm>
           <a:prstGeom prst="roundRect">
@@ -11281,13 +13548,13 @@
       </p:sp>
       <p:sp>
         <p:nvSpPr>
-          <p:cNvPr id="37" name="Text 35"/>
-          <p:cNvSpPr/>
-          <p:nvPr/>
-        </p:nvSpPr>
-        <p:spPr>
-          <a:xfrm>
-            <a:off x="822960" y="5765292"/>
+          <p:cNvPr id="44" name="Text 42"/>
+          <p:cNvSpPr/>
+          <p:nvPr/>
+        </p:nvSpPr>
+        <p:spPr>
+          <a:xfrm>
+            <a:off x="822960" y="5609844"/>
             <a:ext cx="822960" cy="91440"/>
           </a:xfrm>
           <a:prstGeom prst="rect">
@@ -11322,14 +13589,14 @@
       </p:sp>
       <p:sp>
         <p:nvSpPr>
-          <p:cNvPr id="38" name="Text 36"/>
-          <p:cNvSpPr/>
-          <p:nvPr/>
-        </p:nvSpPr>
-        <p:spPr>
-          <a:xfrm>
-            <a:off x="1828800" y="5696712"/>
-            <a:ext cx="9482328" cy="365760"/>
+          <p:cNvPr id="45" name="Text 43"/>
+          <p:cNvSpPr/>
+          <p:nvPr/>
+        </p:nvSpPr>
+        <p:spPr>
+          <a:xfrm>
+            <a:off x="1828800" y="5541264"/>
+            <a:ext cx="9482328" cy="493776"/>
           </a:xfrm>
           <a:prstGeom prst="rect">
             <a:avLst/>
@@ -11355,7 +13622,7 @@
                 <a:ea typeface="Apple SD Gothic Neo" pitchFamily="34" charset="-122"/>
                 <a:cs typeface="Apple SD Gothic Neo" pitchFamily="34" charset="-120"/>
               </a:rPr>
-              <a:t>QGS가 Quote generation을 조율해도 signer는 TDQE다. Verifier가 Result를 서명해도 secret을 공개하는 owner는 RP/KMS다.</a:t>
+              <a:t>QGS가 Quote generation을 조율해도 signer는 TDQE다. PCS는 signed collateral의 권위 원천이고 PCCS는 cache/transport다. Verifier가 Result를 서명해도 secret을 공개하는 owner는 RP/KMS다.</a:t>
             </a:r>
             <a:endParaRPr lang="en-US" sz="1330" dirty="0"/>
           </a:p>
@@ -11363,7 +13630,7 @@
       </p:sp>
       <p:sp>
         <p:nvSpPr>
-          <p:cNvPr id="39" name="Shape 37"/>
+          <p:cNvPr id="46" name="Shape 44"/>
           <p:cNvSpPr/>
           <p:nvPr/>
         </p:nvSpPr>
@@ -11386,7 +13653,7 @@
       </p:sp>
       <p:sp>
         <p:nvSpPr>
-          <p:cNvPr id="40" name="Text 38"/>
+          <p:cNvPr id="47" name="Text 45"/>
           <p:cNvSpPr/>
           <p:nvPr/>
         </p:nvSpPr>
@@ -11419,7 +13686,7 @@
                 <a:ea typeface="Apple SD Gothic Neo" pitchFamily="34" charset="-122"/>
                 <a:cs typeface="Apple SD Gothic Neo" pitchFamily="34" charset="-120"/>
               </a:rPr>
-              <a:t>C-002 · N-002–N-008 · B-002/B-003/B-006</a:t>
+              <a:t>C-002 · N-002–N-008 · B-002/B-003/B-006 · 〔S-002,S-003,S-005〕</a:t>
             </a:r>
             <a:endParaRPr lang="en-US" sz="780" dirty="0"/>
           </a:p>
@@ -11427,7 +13694,7 @@
       </p:sp>
       <p:sp>
         <p:nvSpPr>
-          <p:cNvPr id="41" name="Text 39"/>
+          <p:cNvPr id="48" name="Text 46"/>
           <p:cNvSpPr/>
           <p:nvPr/>
         </p:nvSpPr>
@@ -11460,7 +13727,7 @@
                 <a:ea typeface="Apple SD Gothic Neo" pitchFamily="34" charset="-122"/>
                 <a:cs typeface="Apple SD Gothic Neo" pitchFamily="34" charset="-120"/>
               </a:rPr>
-              <a:t>Sources: RFC 9334 · Intel DCAP / TDX documentation</a:t>
+              <a:t>Source markers: 〔S-…〕 · Appendix 16</a:t>
             </a:r>
             <a:endParaRPr lang="en-US" sz="780" dirty="0"/>
           </a:p>
@@ -11629,8 +13896,8 @@
         </p:nvSpPr>
         <p:spPr>
           <a:xfrm>
-            <a:off x="658368" y="1874520"/>
-            <a:ext cx="3401568" cy="2514600"/>
+            <a:off x="658368" y="1783080"/>
+            <a:ext cx="3401568" cy="2651760"/>
           </a:xfrm>
           <a:prstGeom prst="roundRect">
             <a:avLst/>
@@ -11654,7 +13921,7 @@
         </p:nvSpPr>
         <p:spPr>
           <a:xfrm>
-            <a:off x="841248" y="2084832"/>
+            <a:off x="841248" y="1993392"/>
             <a:ext cx="3035808" cy="256032"/>
           </a:xfrm>
           <a:prstGeom prst="rect">
@@ -11695,8 +13962,8 @@
         </p:nvSpPr>
         <p:spPr>
           <a:xfrm>
-            <a:off x="841248" y="2478024"/>
-            <a:ext cx="3035808" cy="1792224"/>
+            <a:off x="841248" y="2386584"/>
+            <a:ext cx="3035808" cy="1929384"/>
           </a:xfrm>
           <a:prstGeom prst="rect">
             <a:avLst/>
@@ -11736,8 +14003,8 @@
         </p:nvSpPr>
         <p:spPr>
           <a:xfrm>
-            <a:off x="4462272" y="1874520"/>
-            <a:ext cx="3401568" cy="2514600"/>
+            <a:off x="4462272" y="1783080"/>
+            <a:ext cx="3401568" cy="2651760"/>
           </a:xfrm>
           <a:prstGeom prst="roundRect">
             <a:avLst/>
@@ -11761,7 +14028,7 @@
         </p:nvSpPr>
         <p:spPr>
           <a:xfrm>
-            <a:off x="4645152" y="2084832"/>
+            <a:off x="4645152" y="1993392"/>
             <a:ext cx="3035808" cy="256032"/>
           </a:xfrm>
           <a:prstGeom prst="rect">
@@ -11802,8 +14069,8 @@
         </p:nvSpPr>
         <p:spPr>
           <a:xfrm>
-            <a:off x="4645152" y="2478024"/>
-            <a:ext cx="3035808" cy="1792224"/>
+            <a:off x="4645152" y="2386584"/>
+            <a:ext cx="3035808" cy="1929384"/>
           </a:xfrm>
           <a:prstGeom prst="rect">
             <a:avLst/>
@@ -11829,7 +14096,7 @@
                 <a:ea typeface="Apple SD Gothic Neo" pitchFamily="34" charset="-122"/>
                 <a:cs typeface="Apple SD Gothic Neo" pitchFamily="34" charset="-120"/>
               </a:rPr>
-              <a:t>CPU/TDX Module · TDQE/PCK chain · PCS signatures · Verifier policy/key · RP/KMS policy/time</a:t>
+              <a:t>CPU/TDX Module·TDQE/PCK chain·PCS signatures·Verifier policy/key·RP/KMS policy/time·선택한 암호 구현·TD 안의 임시 private key custody</a:t>
             </a:r>
             <a:endParaRPr lang="en-US" sz="1230" dirty="0"/>
           </a:p>
@@ -11843,8 +14110,8 @@
         </p:nvSpPr>
         <p:spPr>
           <a:xfrm>
-            <a:off x="8266176" y="1874520"/>
-            <a:ext cx="3401568" cy="2514600"/>
+            <a:off x="8266176" y="1783080"/>
+            <a:ext cx="3401568" cy="2651760"/>
           </a:xfrm>
           <a:prstGeom prst="roundRect">
             <a:avLst/>
@@ -11868,7 +14135,7 @@
         </p:nvSpPr>
         <p:spPr>
           <a:xfrm>
-            <a:off x="8449056" y="2084832"/>
+            <a:off x="8449056" y="1993392"/>
             <a:ext cx="3035808" cy="256032"/>
           </a:xfrm>
           <a:prstGeom prst="rect">
@@ -11909,8 +14176,8 @@
         </p:nvSpPr>
         <p:spPr>
           <a:xfrm>
-            <a:off x="8449056" y="2478024"/>
-            <a:ext cx="3035808" cy="1792224"/>
+            <a:off x="8449056" y="2386584"/>
+            <a:ext cx="3035808" cy="1929384"/>
           </a:xfrm>
           <a:prstGeom prst="rect">
             <a:avLst/>
@@ -11950,8 +14217,8 @@
         </p:nvSpPr>
         <p:spPr>
           <a:xfrm>
-            <a:off x="658368" y="5074920"/>
-            <a:ext cx="10835640" cy="566928"/>
+            <a:off x="658368" y="4892040"/>
+            <a:ext cx="10835640" cy="786384"/>
           </a:xfrm>
           <a:prstGeom prst="roundRect">
             <a:avLst/>
@@ -11975,7 +14242,7 @@
         </p:nvSpPr>
         <p:spPr>
           <a:xfrm>
-            <a:off x="822960" y="5239512"/>
+            <a:off x="822960" y="5056632"/>
             <a:ext cx="822960" cy="256032"/>
           </a:xfrm>
           <a:prstGeom prst="roundRect">
@@ -12000,7 +14267,7 @@
         </p:nvSpPr>
         <p:spPr>
           <a:xfrm>
-            <a:off x="822960" y="5308092"/>
+            <a:off x="822960" y="5125212"/>
             <a:ext cx="822960" cy="91440"/>
           </a:xfrm>
           <a:prstGeom prst="rect">
@@ -12041,8 +14308,8 @@
         </p:nvSpPr>
         <p:spPr>
           <a:xfrm>
-            <a:off x="1828800" y="5239512"/>
-            <a:ext cx="9482328" cy="365760"/>
+            <a:off x="1828800" y="5056632"/>
+            <a:ext cx="9482328" cy="585216"/>
           </a:xfrm>
           <a:prstGeom prst="rect">
             <a:avLst/>
@@ -12068,7 +14335,7 @@
                 <a:ea typeface="Apple SD Gothic Neo" pitchFamily="34" charset="-122"/>
                 <a:cs typeface="Apple SD Gothic Neo" pitchFamily="34" charset="-120"/>
               </a:rPr>
-              <a:t>untrusted path가 Quote를 재전송하거나 바꿔도, Verifier는 retained nonce·request·key binding을 다시 비교한다. 비교에 실패하거나 입력이 오래되면 policy는 fail closed 또는 명시된 제한 정책으로 처리한다.</a:t>
+              <a:t>untrusted path가 Quote를 재전송하거나 바꿔도 Verifier가 retained nonce·request·key binding을 다시 비교한다. 비교 실패, stale Evidence, 또는 검증 경로 장애에서는 secret release를 NO KEY로 종료한다. degraded mode가 필요하면 자산 공개가 없는 별도 정책을 미리 정한다.</a:t>
             </a:r>
             <a:endParaRPr lang="en-US" sz="1330" dirty="0"/>
           </a:p>
@@ -12132,7 +14399,7 @@
                 <a:ea typeface="Apple SD Gothic Neo" pitchFamily="34" charset="-122"/>
                 <a:cs typeface="Apple SD Gothic Neo" pitchFamily="34" charset="-120"/>
               </a:rPr>
-              <a:t>C-003 · B-001 · threat_model · availability limit</a:t>
+              <a:t>C-003 · B-001 · threat model · trusted crypto/key custody · 〔S-002,S-003,S-005,S-009〕</a:t>
             </a:r>
             <a:endParaRPr lang="en-US" sz="780" dirty="0"/>
           </a:p>
@@ -12173,7 +14440,7 @@
                 <a:ea typeface="Apple SD Gothic Neo" pitchFamily="34" charset="-122"/>
                 <a:cs typeface="Apple SD Gothic Neo" pitchFamily="34" charset="-120"/>
               </a:rPr>
-              <a:t>Sources: RFC 9334 · Intel DCAP / TDX documentation</a:t>
+              <a:t>Source markers: 〔S-…〕 · Appendix 16</a:t>
             </a:r>
             <a:endParaRPr lang="en-US" sz="780" dirty="0"/>
           </a:p>
@@ -12700,8 +14967,8 @@
         </p:nvSpPr>
         <p:spPr>
           <a:xfrm>
-            <a:off x="1993392" y="3017520"/>
-            <a:ext cx="2423160" cy="128016"/>
+            <a:off x="2788920" y="3017520"/>
+            <a:ext cx="868680" cy="128016"/>
           </a:xfrm>
           <a:prstGeom prst="rect">
             <a:avLst/>
@@ -12727,7 +14994,7 @@
                 <a:ea typeface="Apple SD Gothic Neo" pitchFamily="34" charset="-122"/>
                 <a:cs typeface="Apple SD Gothic Neo" pitchFamily="34" charset="-120"/>
               </a:rPr>
-              <a:t>nonce + retained expected context</a:t>
+              <a:t>nonce</a:t>
             </a:r>
             <a:endParaRPr lang="en-US" sz="1050" dirty="0"/>
           </a:p>
@@ -12741,7 +15008,7 @@
         </p:nvSpPr>
         <p:spPr>
           <a:xfrm>
-            <a:off x="1719072" y="3950208"/>
+            <a:off x="1719072" y="3886200"/>
             <a:ext cx="6025896" cy="0"/>
           </a:xfrm>
           <a:prstGeom prst="line">
@@ -12766,8 +15033,8 @@
         </p:nvSpPr>
         <p:spPr>
           <a:xfrm>
-            <a:off x="2852928" y="3721608"/>
-            <a:ext cx="3749040" cy="128016"/>
+            <a:off x="2743200" y="3657600"/>
+            <a:ext cx="3977640" cy="128016"/>
           </a:xfrm>
           <a:prstGeom prst="rect">
             <a:avLst/>
@@ -12785,7 +15052,7 @@
               <a:buNone/>
             </a:pPr>
             <a:r>
-              <a:rPr lang="en-US" sz="1040" b="1" dirty="0">
+              <a:rPr lang="en-US" sz="1010" b="1" dirty="0">
                 <a:solidFill>
                   <a:srgbClr val="1C64D1"/>
                 </a:solidFill>
@@ -12793,9 +15060,9 @@
                 <a:ea typeface="Apple SD Gothic Neo" pitchFamily="34" charset="-122"/>
                 <a:cs typeface="Apple SD Gothic Neo" pitchFamily="34" charset="-120"/>
               </a:rPr>
-              <a:t>nonce + request context + digest-suite request</a:t>
-            </a:r>
-            <a:endParaRPr lang="en-US" sz="1040" dirty="0"/>
+              <a:t>nonce + request context + digest-suite / key-binding request</a:t>
+            </a:r>
+            <a:endParaRPr lang="en-US" sz="1010" dirty="0"/>
           </a:p>
         </p:txBody>
       </p:sp>
@@ -12807,8 +15074,91 @@
         </p:nvSpPr>
         <p:spPr>
           <a:xfrm>
-            <a:off x="658368" y="5230368"/>
-            <a:ext cx="10835640" cy="566928"/>
+            <a:off x="3730752" y="4160520"/>
+            <a:ext cx="1993392" cy="530352"/>
+          </a:xfrm>
+          <a:prstGeom prst="roundRect">
+            <a:avLst/>
+          </a:prstGeom>
+          <a:solidFill>
+            <a:srgbClr val="E8F5FA"/>
+          </a:solidFill>
+          <a:ln w="8890">
+            <a:solidFill>
+              <a:srgbClr val="0B7890"/>
+            </a:solidFill>
+            <a:prstDash val="solid"/>
+          </a:ln>
+        </p:spPr>
+      </p:sp>
+      <p:sp>
+        <p:nvSpPr>
+          <p:cNvPr id="21" name="Text 19"/>
+          <p:cNvSpPr/>
+          <p:nvPr/>
+        </p:nvSpPr>
+        <p:spPr>
+          <a:xfrm>
+            <a:off x="3831336" y="4306824"/>
+            <a:ext cx="1792224" cy="228600"/>
+          </a:xfrm>
+          <a:prstGeom prst="rect">
+            <a:avLst/>
+          </a:prstGeom>
+          <a:noFill/>
+          <a:ln/>
+        </p:spPr>
+        <p:txBody>
+          <a:bodyPr wrap="square" lIns="0" tIns="0" rIns="0" bIns="0" rtlCol="0" anchor="ctr">
+            <a:normAutofit/>
+          </a:bodyPr>
+          <a:lstStyle/>
+          <a:p>
+            <a:pPr algn="ctr" indent="0" marL="0">
+              <a:buNone/>
+            </a:pPr>
+            <a:r>
+              <a:rPr lang="en-US" sz="740" b="1" dirty="0">
+                <a:solidFill>
+                  <a:srgbClr val="0B7890"/>
+                </a:solidFill>
+                <a:latin typeface="Apple SD Gothic Neo" pitchFamily="34" charset="0"/>
+                <a:ea typeface="Apple SD Gothic Neo" pitchFamily="34" charset="-122"/>
+                <a:cs typeface="Apple SD Gothic Neo" pitchFamily="34" charset="-120"/>
+              </a:rPr>
+              <a:t>Verifier 내부 one-time context</a:t>
+            </a:r>
+            <a:endParaRPr lang="en-US" sz="740" dirty="0"/>
+          </a:p>
+          <a:p>
+            <a:pPr algn="ctr" indent="0" marL="0">
+              <a:buNone/>
+            </a:pPr>
+            <a:r>
+              <a:rPr lang="en-US" sz="740" b="1" dirty="0">
+                <a:solidFill>
+                  <a:srgbClr val="0B7890"/>
+                </a:solidFill>
+                <a:latin typeface="Apple SD Gothic Neo" pitchFamily="34" charset="0"/>
+                <a:ea typeface="Apple SD Gothic Neo" pitchFamily="34" charset="-122"/>
+                <a:cs typeface="Apple SD Gothic Neo" pitchFamily="34" charset="-120"/>
+              </a:rPr>
+              <a:t>nonce · request ID · subject · audience · K/D suite</a:t>
+            </a:r>
+            <a:endParaRPr lang="en-US" sz="740" dirty="0"/>
+          </a:p>
+        </p:txBody>
+      </p:sp>
+      <p:sp>
+        <p:nvSpPr>
+          <p:cNvPr id="22" name="Shape 20"/>
+          <p:cNvSpPr/>
+          <p:nvPr/>
+        </p:nvSpPr>
+        <p:spPr>
+          <a:xfrm>
+            <a:off x="658368" y="4919472"/>
+            <a:ext cx="10835640" cy="841248"/>
           </a:xfrm>
           <a:prstGeom prst="roundRect">
             <a:avLst/>
@@ -12826,13 +15176,13 @@
       </p:sp>
       <p:sp>
         <p:nvSpPr>
-          <p:cNvPr id="21" name="Shape 19"/>
-          <p:cNvSpPr/>
-          <p:nvPr/>
-        </p:nvSpPr>
-        <p:spPr>
-          <a:xfrm>
-            <a:off x="822960" y="5394960"/>
+          <p:cNvPr id="23" name="Shape 21"/>
+          <p:cNvSpPr/>
+          <p:nvPr/>
+        </p:nvSpPr>
+        <p:spPr>
+          <a:xfrm>
+            <a:off x="822960" y="5084064"/>
             <a:ext cx="822960" cy="256032"/>
           </a:xfrm>
           <a:prstGeom prst="roundRect">
@@ -12851,13 +15201,13 @@
       </p:sp>
       <p:sp>
         <p:nvSpPr>
-          <p:cNvPr id="22" name="Text 20"/>
-          <p:cNvSpPr/>
-          <p:nvPr/>
-        </p:nvSpPr>
-        <p:spPr>
-          <a:xfrm>
-            <a:off x="822960" y="5463540"/>
+          <p:cNvPr id="24" name="Text 22"/>
+          <p:cNvSpPr/>
+          <p:nvPr/>
+        </p:nvSpPr>
+        <p:spPr>
+          <a:xfrm>
+            <a:off x="822960" y="5152644"/>
             <a:ext cx="822960" cy="91440"/>
           </a:xfrm>
           <a:prstGeom prst="rect">
@@ -12892,14 +15242,14 @@
       </p:sp>
       <p:sp>
         <p:nvSpPr>
-          <p:cNvPr id="23" name="Text 21"/>
-          <p:cNvSpPr/>
-          <p:nvPr/>
-        </p:nvSpPr>
-        <p:spPr>
-          <a:xfrm>
-            <a:off x="1828800" y="5394960"/>
-            <a:ext cx="9482328" cy="365760"/>
+          <p:cNvPr id="25" name="Text 23"/>
+          <p:cNvSpPr/>
+          <p:nvPr/>
+        </p:nvSpPr>
+        <p:spPr>
+          <a:xfrm>
+            <a:off x="1828800" y="5084064"/>
+            <a:ext cx="9482328" cy="640080"/>
           </a:xfrm>
           <a:prstGeom prst="rect">
             <a:avLst/>
@@ -12925,7 +15275,7 @@
                 <a:ea typeface="Apple SD Gothic Neo" pitchFamily="34" charset="-122"/>
                 <a:cs typeface="Apple SD Gothic Neo" pitchFamily="34" charset="-120"/>
               </a:rPr>
-              <a:t>Verifier가 nonce를 만들고 terminal state까지 보관한다. TD는 그 nonce와 request context를 D에 묶고, Verifier는 나중에 같은 값을 재계산해 이 Evidence가 다른 요청에서 온 것이 아닌지 확인한다.</a:t>
+              <a:t>Verifier는 nonce와 full expected context를 내부 상태로 terminal event까지 보관한다. TD는 nonce·request ID·subject·audience·K를 D에 묶고, Verifier는 key bytes로 같은 D를 재계산한다. 재시도는 기존 record를 닫고 새 nonce로 시작한다.</a:t>
             </a:r>
             <a:endParaRPr lang="en-US" sz="1330" dirty="0"/>
           </a:p>
@@ -12933,7 +15283,7 @@
       </p:sp>
       <p:sp>
         <p:nvSpPr>
-          <p:cNvPr id="24" name="Shape 22"/>
+          <p:cNvPr id="26" name="Shape 24"/>
           <p:cNvSpPr/>
           <p:nvPr/>
         </p:nvSpPr>
@@ -12956,7 +15306,7 @@
       </p:sp>
       <p:sp>
         <p:nvSpPr>
-          <p:cNvPr id="25" name="Text 23"/>
+          <p:cNvPr id="27" name="Text 25"/>
           <p:cNvSpPr/>
           <p:nvPr/>
         </p:nvSpPr>
@@ -12989,7 +15339,7 @@
                 <a:ea typeface="Apple SD Gothic Neo" pitchFamily="34" charset="-122"/>
                 <a:cs typeface="Apple SD Gothic Neo" pitchFamily="34" charset="-120"/>
               </a:rPr>
-              <a:t>C-004 · E-003/E-004/E-005 · X-001/X-002 · request state</a:t>
+              <a:t>C-004 · E-003/E-004/E-005 · X-001/X-002/X-003 · retained state · 〔S-002,S-003,S-004〕</a:t>
             </a:r>
             <a:endParaRPr lang="en-US" sz="780" dirty="0"/>
           </a:p>
@@ -12997,7 +15347,7 @@
       </p:sp>
       <p:sp>
         <p:nvSpPr>
-          <p:cNvPr id="26" name="Text 24"/>
+          <p:cNvPr id="28" name="Text 26"/>
           <p:cNvSpPr/>
           <p:nvPr/>
         </p:nvSpPr>
@@ -13030,7 +15380,7 @@
                 <a:ea typeface="Apple SD Gothic Neo" pitchFamily="34" charset="-122"/>
                 <a:cs typeface="Apple SD Gothic Neo" pitchFamily="34" charset="-120"/>
               </a:rPr>
-              <a:t>Sources: RFC 9334 · Intel DCAP / TDX documentation</a:t>
+              <a:t>Source markers: 〔S-…〕 · Appendix 16</a:t>
             </a:r>
             <a:endParaRPr lang="en-US" sz="780" dirty="0"/>
           </a:p>
@@ -13199,7 +15549,7 @@
         </p:nvSpPr>
         <p:spPr>
           <a:xfrm>
-            <a:off x="594360" y="1371600"/>
+            <a:off x="594360" y="1664208"/>
             <a:ext cx="1874520" cy="530352"/>
           </a:xfrm>
           <a:prstGeom prst="roundRect">
@@ -13224,7 +15574,7 @@
         </p:nvSpPr>
         <p:spPr>
           <a:xfrm>
-            <a:off x="594360" y="1554480"/>
+            <a:off x="594360" y="1847088"/>
             <a:ext cx="1874520" cy="128016"/>
           </a:xfrm>
           <a:prstGeom prst="rect">
@@ -13265,8 +15615,8 @@
         </p:nvSpPr>
         <p:spPr>
           <a:xfrm>
-            <a:off x="1527048" y="1965960"/>
-            <a:ext cx="0" cy="3154680"/>
+            <a:off x="1527048" y="2258568"/>
+            <a:ext cx="0" cy="2862072"/>
           </a:xfrm>
           <a:prstGeom prst="line">
             <a:avLst/>
@@ -13288,7 +15638,7 @@
         </p:nvSpPr>
         <p:spPr>
           <a:xfrm>
-            <a:off x="3108960" y="1371600"/>
+            <a:off x="3108960" y="1664208"/>
             <a:ext cx="1874520" cy="530352"/>
           </a:xfrm>
           <a:prstGeom prst="roundRect">
@@ -13313,7 +15663,7 @@
         </p:nvSpPr>
         <p:spPr>
           <a:xfrm>
-            <a:off x="3108960" y="1554480"/>
+            <a:off x="3108960" y="1847088"/>
             <a:ext cx="1874520" cy="128016"/>
           </a:xfrm>
           <a:prstGeom prst="rect">
@@ -13354,8 +15704,8 @@
         </p:nvSpPr>
         <p:spPr>
           <a:xfrm>
-            <a:off x="4041648" y="1965960"/>
-            <a:ext cx="0" cy="3154680"/>
+            <a:off x="4041648" y="2258568"/>
+            <a:ext cx="0" cy="2862072"/>
           </a:xfrm>
           <a:prstGeom prst="line">
             <a:avLst/>
@@ -13377,7 +15727,7 @@
         </p:nvSpPr>
         <p:spPr>
           <a:xfrm>
-            <a:off x="5623560" y="1371600"/>
+            <a:off x="5623560" y="1664208"/>
             <a:ext cx="1874520" cy="530352"/>
           </a:xfrm>
           <a:prstGeom prst="roundRect">
@@ -13402,7 +15752,7 @@
         </p:nvSpPr>
         <p:spPr>
           <a:xfrm>
-            <a:off x="5623560" y="1554480"/>
+            <a:off x="5623560" y="1847088"/>
             <a:ext cx="1874520" cy="128016"/>
           </a:xfrm>
           <a:prstGeom prst="rect">
@@ -13443,8 +15793,8 @@
         </p:nvSpPr>
         <p:spPr>
           <a:xfrm>
-            <a:off x="6556248" y="1965960"/>
-            <a:ext cx="0" cy="3154680"/>
+            <a:off x="6556248" y="2258568"/>
+            <a:ext cx="0" cy="2862072"/>
           </a:xfrm>
           <a:prstGeom prst="line">
             <a:avLst/>
@@ -13466,7 +15816,7 @@
         </p:nvSpPr>
         <p:spPr>
           <a:xfrm>
-            <a:off x="8138160" y="1371600"/>
+            <a:off x="8138160" y="1664208"/>
             <a:ext cx="1874520" cy="530352"/>
           </a:xfrm>
           <a:prstGeom prst="roundRect">
@@ -13491,7 +15841,7 @@
         </p:nvSpPr>
         <p:spPr>
           <a:xfrm>
-            <a:off x="8138160" y="1554480"/>
+            <a:off x="8138160" y="1847088"/>
             <a:ext cx="1874520" cy="128016"/>
           </a:xfrm>
           <a:prstGeom prst="rect">
@@ -13532,8 +15882,8 @@
         </p:nvSpPr>
         <p:spPr>
           <a:xfrm>
-            <a:off x="9070848" y="1965960"/>
-            <a:ext cx="0" cy="3154680"/>
+            <a:off x="9070848" y="2258568"/>
+            <a:ext cx="0" cy="2862072"/>
           </a:xfrm>
           <a:prstGeom prst="line">
             <a:avLst/>
@@ -13550,6 +15900,112 @@
       <p:sp>
         <p:nvSpPr>
           <p:cNvPr id="17" name="Shape 15"/>
+          <p:cNvSpPr/>
+          <p:nvPr/>
+        </p:nvSpPr>
+        <p:spPr>
+          <a:xfrm>
+            <a:off x="4279392" y="1170432"/>
+            <a:ext cx="2048256" cy="475488"/>
+          </a:xfrm>
+          <a:prstGeom prst="roundRect">
+            <a:avLst/>
+          </a:prstGeom>
+          <a:solidFill>
+            <a:srgbClr val="FFF0EF"/>
+          </a:solidFill>
+          <a:ln w="8890">
+            <a:solidFill>
+              <a:srgbClr val="FFF0EF"/>
+            </a:solidFill>
+            <a:prstDash val="solid"/>
+          </a:ln>
+        </p:spPr>
+      </p:sp>
+      <p:sp>
+        <p:nvSpPr>
+          <p:cNvPr id="18" name="Text 16"/>
+          <p:cNvSpPr/>
+          <p:nvPr/>
+        </p:nvSpPr>
+        <p:spPr>
+          <a:xfrm>
+            <a:off x="4407408" y="1243584"/>
+            <a:ext cx="1792224" cy="256032"/>
+          </a:xfrm>
+          <a:prstGeom prst="rect">
+            <a:avLst/>
+          </a:prstGeom>
+          <a:noFill/>
+          <a:ln/>
+        </p:spPr>
+        <p:txBody>
+          <a:bodyPr wrap="square" lIns="0" tIns="0" rIns="0" bIns="0" rtlCol="0" anchor="ctr">
+            <a:normAutofit/>
+          </a:bodyPr>
+          <a:lstStyle/>
+          <a:p>
+            <a:pPr algn="ctr" indent="0" marL="0">
+              <a:buNone/>
+            </a:pPr>
+            <a:r>
+              <a:rPr lang="en-US" sz="860" b="1" dirty="0">
+                <a:solidFill>
+                  <a:srgbClr val="B42318"/>
+                </a:solidFill>
+                <a:latin typeface="Apple SD Gothic Neo" pitchFamily="34" charset="0"/>
+                <a:ea typeface="Apple SD Gothic Neo" pitchFamily="34" charset="-122"/>
+                <a:cs typeface="Apple SD Gothic Neo" pitchFamily="34" charset="-120"/>
+              </a:rPr>
+              <a:t>B-002</a:t>
+            </a:r>
+            <a:endParaRPr lang="en-US" sz="860" dirty="0"/>
+          </a:p>
+          <a:p>
+            <a:pPr algn="ctr" indent="0" marL="0">
+              <a:buNone/>
+            </a:pPr>
+            <a:r>
+              <a:rPr lang="en-US" sz="860" b="1" dirty="0">
+                <a:solidFill>
+                  <a:srgbClr val="B42318"/>
+                </a:solidFill>
+                <a:latin typeface="Apple SD Gothic Neo" pitchFamily="34" charset="0"/>
+                <a:ea typeface="Apple SD Gothic Neo" pitchFamily="34" charset="-122"/>
+                <a:cs typeface="Apple SD Gothic Neo" pitchFamily="34" charset="-120"/>
+              </a:rPr>
+              <a:t>untrusted QGS ↔ enclave signer</a:t>
+            </a:r>
+            <a:endParaRPr lang="en-US" sz="860" dirty="0"/>
+          </a:p>
+        </p:txBody>
+      </p:sp>
+      <p:sp>
+        <p:nvSpPr>
+          <p:cNvPr id="19" name="Shape 17"/>
+          <p:cNvSpPr/>
+          <p:nvPr/>
+        </p:nvSpPr>
+        <p:spPr>
+          <a:xfrm>
+            <a:off x="5303520" y="1645920"/>
+            <a:ext cx="0" cy="3602736"/>
+          </a:xfrm>
+          <a:prstGeom prst="line">
+            <a:avLst/>
+          </a:prstGeom>
+          <a:noFill/>
+          <a:ln w="17780">
+            <a:solidFill>
+              <a:srgbClr val="B42318"/>
+            </a:solidFill>
+            <a:prstDash val="solid"/>
+          </a:ln>
+        </p:spPr>
+      </p:sp>
+      <p:sp>
+        <p:nvSpPr>
+          <p:cNvPr id="20" name="Shape 18"/>
           <p:cNvSpPr/>
           <p:nvPr/>
         </p:nvSpPr>
@@ -13574,7 +16030,7 @@
       </p:sp>
       <p:sp>
         <p:nvSpPr>
-          <p:cNvPr id="18" name="Text 16"/>
+          <p:cNvPr id="21" name="Text 19"/>
           <p:cNvSpPr/>
           <p:nvPr/>
         </p:nvSpPr>
@@ -13615,7 +16071,7 @@
       </p:sp>
       <p:sp>
         <p:nvSpPr>
-          <p:cNvPr id="19" name="Shape 17"/>
+          <p:cNvPr id="22" name="Shape 20"/>
           <p:cNvSpPr/>
           <p:nvPr/>
         </p:nvSpPr>
@@ -13640,7 +16096,7 @@
       </p:sp>
       <p:sp>
         <p:nvSpPr>
-          <p:cNvPr id="20" name="Text 18"/>
+          <p:cNvPr id="23" name="Text 21"/>
           <p:cNvSpPr/>
           <p:nvPr/>
         </p:nvSpPr>
@@ -13681,7 +16137,7 @@
       </p:sp>
       <p:sp>
         <p:nvSpPr>
-          <p:cNvPr id="21" name="Shape 19"/>
+          <p:cNvPr id="24" name="Shape 22"/>
           <p:cNvSpPr/>
           <p:nvPr/>
         </p:nvSpPr>
@@ -13706,7 +16162,7 @@
       </p:sp>
       <p:sp>
         <p:nvSpPr>
-          <p:cNvPr id="22" name="Text 20"/>
+          <p:cNvPr id="25" name="Text 23"/>
           <p:cNvSpPr/>
           <p:nvPr/>
         </p:nvSpPr>
@@ -13747,7 +16203,7 @@
       </p:sp>
       <p:sp>
         <p:nvSpPr>
-          <p:cNvPr id="23" name="Shape 21"/>
+          <p:cNvPr id="26" name="Shape 24"/>
           <p:cNvSpPr/>
           <p:nvPr/>
         </p:nvSpPr>
@@ -13772,7 +16228,7 @@
       </p:sp>
       <p:sp>
         <p:nvSpPr>
-          <p:cNvPr id="24" name="Text 22"/>
+          <p:cNvPr id="27" name="Text 25"/>
           <p:cNvSpPr/>
           <p:nvPr/>
         </p:nvSpPr>
@@ -13813,7 +16269,7 @@
       </p:sp>
       <p:sp>
         <p:nvSpPr>
-          <p:cNvPr id="25" name="Shape 23"/>
+          <p:cNvPr id="28" name="Shape 26"/>
           <p:cNvSpPr/>
           <p:nvPr/>
         </p:nvSpPr>
@@ -13838,7 +16294,7 @@
       </p:sp>
       <p:sp>
         <p:nvSpPr>
-          <p:cNvPr id="26" name="Text 24"/>
+          <p:cNvPr id="29" name="Text 27"/>
           <p:cNvSpPr/>
           <p:nvPr/>
         </p:nvSpPr>
@@ -13879,7 +16335,7 @@
       </p:sp>
       <p:sp>
         <p:nvSpPr>
-          <p:cNvPr id="27" name="Shape 25"/>
+          <p:cNvPr id="30" name="Shape 28"/>
           <p:cNvSpPr/>
           <p:nvPr/>
         </p:nvSpPr>
@@ -13904,7 +16360,7 @@
       </p:sp>
       <p:sp>
         <p:nvSpPr>
-          <p:cNvPr id="28" name="Shape 26"/>
+          <p:cNvPr id="31" name="Shape 29"/>
           <p:cNvSpPr/>
           <p:nvPr/>
         </p:nvSpPr>
@@ -13929,7 +16385,7 @@
       </p:sp>
       <p:sp>
         <p:nvSpPr>
-          <p:cNvPr id="29" name="Text 27"/>
+          <p:cNvPr id="32" name="Text 30"/>
           <p:cNvSpPr/>
           <p:nvPr/>
         </p:nvSpPr>
@@ -13970,7 +16426,7 @@
       </p:sp>
       <p:sp>
         <p:nvSpPr>
-          <p:cNvPr id="30" name="Text 28"/>
+          <p:cNvPr id="33" name="Text 31"/>
           <p:cNvSpPr/>
           <p:nvPr/>
         </p:nvSpPr>
@@ -14011,7 +16467,7 @@
       </p:sp>
       <p:sp>
         <p:nvSpPr>
-          <p:cNvPr id="31" name="Shape 29"/>
+          <p:cNvPr id="34" name="Shape 32"/>
           <p:cNvSpPr/>
           <p:nvPr/>
         </p:nvSpPr>
@@ -14034,7 +16490,7 @@
       </p:sp>
       <p:sp>
         <p:nvSpPr>
-          <p:cNvPr id="32" name="Text 30"/>
+          <p:cNvPr id="35" name="Text 33"/>
           <p:cNvSpPr/>
           <p:nvPr/>
         </p:nvSpPr>
@@ -14075,7 +16531,7 @@
       </p:sp>
       <p:sp>
         <p:nvSpPr>
-          <p:cNvPr id="33" name="Text 31"/>
+          <p:cNvPr id="36" name="Text 34"/>
           <p:cNvSpPr/>
           <p:nvPr/>
         </p:nvSpPr>
@@ -14108,7 +16564,7 @@
                 <a:ea typeface="Apple SD Gothic Neo" pitchFamily="34" charset="-122"/>
                 <a:cs typeface="Apple SD Gothic Neo" pitchFamily="34" charset="-120"/>
               </a:rPr>
-              <a:t>Sources: RFC 9334 · Intel DCAP / TDX documentation</a:t>
+              <a:t>Source markers: 〔S-…〕 · Appendix 16</a:t>
             </a:r>
             <a:endParaRPr lang="en-US" sz="780" dirty="0"/>
           </a:p>
@@ -14181,7 +16637,7 @@
                 <a:ea typeface="Apple SD Gothic Neo" pitchFamily="34" charset="-122"/>
                 <a:cs typeface="Apple SD Gothic Neo" pitchFamily="34" charset="-120"/>
               </a:rPr>
-              <a:t>TD가 만든 Quote와 key bytes는 RP/KMS를 거쳐 Verifier의 appraisal로 들어간다</a:t>
+              <a:t>TDQE가 서명해 TD로 반환된 Quote와 key bytes는 RP/KMS를 거쳐 Verifier의 appraisal로 들어간다</a:t>
             </a:r>
             <a:endParaRPr lang="en-US" sz="2900" dirty="0"/>
           </a:p>
@@ -15030,8 +17486,8 @@
         </p:nvSpPr>
         <p:spPr>
           <a:xfrm>
-            <a:off x="658368" y="5120640"/>
-            <a:ext cx="10835640" cy="566928"/>
+            <a:off x="658368" y="5001768"/>
+            <a:ext cx="10835640" cy="713232"/>
           </a:xfrm>
           <a:prstGeom prst="roundRect">
             <a:avLst/>
@@ -15055,7 +17511,7 @@
         </p:nvSpPr>
         <p:spPr>
           <a:xfrm>
-            <a:off x="822960" y="5285232"/>
+            <a:off x="822960" y="5166360"/>
             <a:ext cx="822960" cy="256032"/>
           </a:xfrm>
           <a:prstGeom prst="roundRect">
@@ -15080,7 +17536,7 @@
         </p:nvSpPr>
         <p:spPr>
           <a:xfrm>
-            <a:off x="822960" y="5353812"/>
+            <a:off x="822960" y="5234940"/>
             <a:ext cx="822960" cy="91440"/>
           </a:xfrm>
           <a:prstGeom prst="rect">
@@ -15107,7 +17563,7 @@
                 <a:ea typeface="Apple SD Gothic Neo" pitchFamily="34" charset="-122"/>
                 <a:cs typeface="Apple SD Gothic Neo" pitchFamily="34" charset="-120"/>
               </a:rPr>
-              <a:t>E-012 → E-013</a:t>
+              <a:t>E-010→E-013</a:t>
             </a:r>
             <a:endParaRPr lang="en-US" sz="820" dirty="0"/>
           </a:p>
@@ -15121,8 +17577,8 @@
         </p:nvSpPr>
         <p:spPr>
           <a:xfrm>
-            <a:off x="1828800" y="5285232"/>
-            <a:ext cx="9482328" cy="365760"/>
+            <a:off x="1828800" y="5166360"/>
+            <a:ext cx="9482328" cy="512064"/>
           </a:xfrm>
           <a:prstGeom prst="rect">
             <a:avLst/>
@@ -15148,7 +17604,7 @@
                 <a:ea typeface="Apple SD Gothic Neo" pitchFamily="34" charset="-122"/>
                 <a:cs typeface="Apple SD Gothic Neo" pitchFamily="34" charset="-120"/>
               </a:rPr>
-              <a:t>RP/KMS가 TD에서 받은 exact Quote, canonical key bytes, identical request context를 Verifier에 전달한다. Verifier는 보관한 expected context와 비교해 Evidence가 이 request와 이 key를 위한 것인지 판단한다.</a:t>
+              <a:t>TDQE가 TD Quote를 생성·서명해 QGS를 거쳐 TD로 돌려준다. TD는 canonical key bytes와 identical request context를 붙여 RP/KMS에 보내고, RP/KMS가 이를 Verifier에 전달한다. Verifier는 retained expected context와 비교해 Evidence가 이 request와 이 key를 위한 것인지 판단한다.</a:t>
             </a:r>
             <a:endParaRPr lang="en-US" sz="1330" dirty="0"/>
           </a:p>
@@ -15212,7 +17668,7 @@
                 <a:ea typeface="Apple SD Gothic Neo" pitchFamily="34" charset="-122"/>
                 <a:cs typeface="Apple SD Gothic Neo" pitchFamily="34" charset="-120"/>
               </a:rPr>
-              <a:t>C-004 · E-012/E-013 · X-002/X-003/X-004 · B-004</a:t>
+              <a:t>C-004 · E-010–E-013 · X-002/X-003/X-004 · B-004 · 〔S-002,S-003,S-004〕</a:t>
             </a:r>
             <a:endParaRPr lang="en-US" sz="780" dirty="0"/>
           </a:p>
@@ -15253,7 +17709,7 @@
                 <a:ea typeface="Apple SD Gothic Neo" pitchFamily="34" charset="-122"/>
                 <a:cs typeface="Apple SD Gothic Neo" pitchFamily="34" charset="-120"/>
               </a:rPr>
-              <a:t>Sources: RFC 9334 · Intel DCAP / TDX documentation</a:t>
+              <a:t>Source markers: 〔S-…〕 · Appendix 16</a:t>
             </a:r>
             <a:endParaRPr lang="en-US" sz="780" dirty="0"/>
           </a:p>
@@ -15367,7 +17823,7 @@
                 <a:ea typeface="Apple SD Gothic Neo" pitchFamily="34" charset="-122"/>
                 <a:cs typeface="Apple SD Gothic Neo" pitchFamily="34" charset="-120"/>
               </a:rPr>
-              <a:t>이 식은 RFC wire format이 아니라 deployment가 hash·encoding·field order를 확정해야 하는 symbolic profile이다.</a:t>
+              <a:t>아래 식은 symbolic invariant다. 배포 전에는 모든 byte-level choice를 profile로 고정해야 하며, 이 자체가 RFC wire format은 아니다.</a:t>
             </a:r>
             <a:endParaRPr lang="en-US" sz="1430" dirty="0"/>
           </a:p>
@@ -15422,8 +17878,206 @@
         </p:nvSpPr>
         <p:spPr>
           <a:xfrm>
-            <a:off x="576072" y="1691640"/>
-            <a:ext cx="3383280" cy="3154680"/>
+            <a:off x="658368" y="1298448"/>
+            <a:ext cx="10881360" cy="256032"/>
+          </a:xfrm>
+          <a:prstGeom prst="roundRect">
+            <a:avLst/>
+          </a:prstGeom>
+          <a:solidFill>
+            <a:srgbClr val="E8F5FA"/>
+          </a:solidFill>
+          <a:ln w="8890">
+            <a:solidFill>
+              <a:srgbClr val="E8F5FA"/>
+            </a:solidFill>
+            <a:prstDash val="solid"/>
+          </a:ln>
+        </p:spPr>
+      </p:sp>
+      <p:sp>
+        <p:nvSpPr>
+          <p:cNvPr id="6" name="Text 4"/>
+          <p:cNvSpPr/>
+          <p:nvPr/>
+        </p:nvSpPr>
+        <p:spPr>
+          <a:xfrm>
+            <a:off x="868680" y="1380744"/>
+            <a:ext cx="10469880" cy="91440"/>
+          </a:xfrm>
+          <a:prstGeom prst="rect">
+            <a:avLst/>
+          </a:prstGeom>
+          <a:noFill/>
+          <a:ln/>
+        </p:spPr>
+        <p:txBody>
+          <a:bodyPr wrap="square" lIns="0" tIns="0" rIns="0" bIns="0" rtlCol="0" anchor="ctr">
+            <a:normAutofit/>
+          </a:bodyPr>
+          <a:lstStyle/>
+          <a:p>
+            <a:pPr algn="ctr" indent="0" marL="0">
+              <a:buNone/>
+            </a:pPr>
+            <a:r>
+              <a:rPr lang="en-US" sz="820" b="1" dirty="0">
+                <a:solidFill>
+                  <a:srgbClr val="14804A"/>
+                </a:solidFill>
+                <a:latin typeface="Apple SD Gothic Neo" pitchFamily="34" charset="0"/>
+                <a:ea typeface="Apple SD Gothic Neo" pitchFamily="34" charset="-122"/>
+                <a:cs typeface="Apple SD Gothic Neo" pitchFamily="34" charset="-120"/>
+              </a:rPr>
+              <a:t>K = Hash("tdx-ra/key/v1" || key_algorithm || canonical_key_bytes)</a:t>
+            </a:r>
+            <a:endParaRPr lang="en-US" sz="820" dirty="0"/>
+          </a:p>
+        </p:txBody>
+      </p:sp>
+      <p:sp>
+        <p:nvSpPr>
+          <p:cNvPr id="7" name="Shape 5"/>
+          <p:cNvSpPr/>
+          <p:nvPr/>
+        </p:nvSpPr>
+        <p:spPr>
+          <a:xfrm>
+            <a:off x="658368" y="1609344"/>
+            <a:ext cx="10881360" cy="256032"/>
+          </a:xfrm>
+          <a:prstGeom prst="roundRect">
+            <a:avLst/>
+          </a:prstGeom>
+          <a:solidFill>
+            <a:srgbClr val="F3EEFF"/>
+          </a:solidFill>
+          <a:ln w="8890">
+            <a:solidFill>
+              <a:srgbClr val="F3EEFF"/>
+            </a:solidFill>
+            <a:prstDash val="solid"/>
+          </a:ln>
+        </p:spPr>
+      </p:sp>
+      <p:sp>
+        <p:nvSpPr>
+          <p:cNvPr id="8" name="Text 6"/>
+          <p:cNvSpPr/>
+          <p:nvPr/>
+        </p:nvSpPr>
+        <p:spPr>
+          <a:xfrm>
+            <a:off x="868680" y="1691640"/>
+            <a:ext cx="10469880" cy="91440"/>
+          </a:xfrm>
+          <a:prstGeom prst="rect">
+            <a:avLst/>
+          </a:prstGeom>
+          <a:noFill/>
+          <a:ln/>
+        </p:spPr>
+        <p:txBody>
+          <a:bodyPr wrap="square" lIns="0" tIns="0" rIns="0" bIns="0" rtlCol="0" anchor="ctr">
+            <a:normAutofit/>
+          </a:bodyPr>
+          <a:lstStyle/>
+          <a:p>
+            <a:pPr algn="ctr" indent="0" marL="0">
+              <a:buNone/>
+            </a:pPr>
+            <a:r>
+              <a:rPr lang="en-US" sz="820" b="1" dirty="0">
+                <a:solidFill>
+                  <a:srgbClr val="7044C8"/>
+                </a:solidFill>
+                <a:latin typeface="Apple SD Gothic Neo" pitchFamily="34" charset="0"/>
+                <a:ea typeface="Apple SD Gothic Neo" pitchFamily="34" charset="-122"/>
+                <a:cs typeface="Apple SD Gothic Neo" pitchFamily="34" charset="-120"/>
+              </a:rPr>
+              <a:t>D = Hash("tdx-ra/context/v1" || canonical_encode(nonce, request_id, subject, audience, K))</a:t>
+            </a:r>
+            <a:endParaRPr lang="en-US" sz="820" dirty="0"/>
+          </a:p>
+        </p:txBody>
+      </p:sp>
+      <p:sp>
+        <p:nvSpPr>
+          <p:cNvPr id="9" name="Shape 7"/>
+          <p:cNvSpPr/>
+          <p:nvPr/>
+        </p:nvSpPr>
+        <p:spPr>
+          <a:xfrm>
+            <a:off x="658368" y="1920240"/>
+            <a:ext cx="10881360" cy="256032"/>
+          </a:xfrm>
+          <a:prstGeom prst="roundRect">
+            <a:avLst/>
+          </a:prstGeom>
+          <a:solidFill>
+            <a:srgbClr val="E8F5FA"/>
+          </a:solidFill>
+          <a:ln w="8890">
+            <a:solidFill>
+              <a:srgbClr val="E8F5FA"/>
+            </a:solidFill>
+            <a:prstDash val="solid"/>
+          </a:ln>
+        </p:spPr>
+      </p:sp>
+      <p:sp>
+        <p:nvSpPr>
+          <p:cNvPr id="10" name="Text 8"/>
+          <p:cNvSpPr/>
+          <p:nvPr/>
+        </p:nvSpPr>
+        <p:spPr>
+          <a:xfrm>
+            <a:off x="868680" y="2002536"/>
+            <a:ext cx="10469880" cy="91440"/>
+          </a:xfrm>
+          <a:prstGeom prst="rect">
+            <a:avLst/>
+          </a:prstGeom>
+          <a:noFill/>
+          <a:ln/>
+        </p:spPr>
+        <p:txBody>
+          <a:bodyPr wrap="square" lIns="0" tIns="0" rIns="0" bIns="0" rtlCol="0" anchor="ctr">
+            <a:normAutofit/>
+          </a:bodyPr>
+          <a:lstStyle/>
+          <a:p>
+            <a:pPr algn="ctr" indent="0" marL="0">
+              <a:buNone/>
+            </a:pPr>
+            <a:r>
+              <a:rPr lang="en-US" sz="820" b="1" dirty="0">
+                <a:solidFill>
+                  <a:srgbClr val="0B7890"/>
+                </a:solidFill>
+                <a:latin typeface="Apple SD Gothic Neo" pitchFamily="34" charset="0"/>
+                <a:ea typeface="Apple SD Gothic Neo" pitchFamily="34" charset="-122"/>
+                <a:cs typeface="Apple SD Gothic Neo" pitchFamily="34" charset="-120"/>
+              </a:rPr>
+              <a:t>E = Hash("tdx-ra/evidence/v1" || exact_TD_Quote_octets)</a:t>
+            </a:r>
+            <a:endParaRPr lang="en-US" sz="820" dirty="0"/>
+          </a:p>
+        </p:txBody>
+      </p:sp>
+      <p:sp>
+        <p:nvSpPr>
+          <p:cNvPr id="11" name="Shape 9"/>
+          <p:cNvSpPr/>
+          <p:nvPr/>
+        </p:nvSpPr>
+        <p:spPr>
+          <a:xfrm>
+            <a:off x="576072" y="2359152"/>
+            <a:ext cx="3383280" cy="2103120"/>
           </a:xfrm>
           <a:prstGeom prst="roundRect">
             <a:avLst/>
@@ -15441,13 +18095,13 @@
       </p:sp>
       <p:sp>
         <p:nvSpPr>
-          <p:cNvPr id="6" name="Shape 4"/>
-          <p:cNvSpPr/>
-          <p:nvPr/>
-        </p:nvSpPr>
-        <p:spPr>
-          <a:xfrm>
-            <a:off x="740664" y="1856232"/>
+          <p:cNvPr id="12" name="Shape 10"/>
+          <p:cNvSpPr/>
+          <p:nvPr/>
+        </p:nvSpPr>
+        <p:spPr>
+          <a:xfrm>
+            <a:off x="740664" y="2523744"/>
             <a:ext cx="1152144" cy="256032"/>
           </a:xfrm>
           <a:prstGeom prst="roundRect">
@@ -15466,13 +18120,13 @@
       </p:sp>
       <p:sp>
         <p:nvSpPr>
-          <p:cNvPr id="7" name="Text 5"/>
-          <p:cNvSpPr/>
-          <p:nvPr/>
-        </p:nvSpPr>
-        <p:spPr>
-          <a:xfrm>
-            <a:off x="740664" y="1924812"/>
+          <p:cNvPr id="13" name="Text 11"/>
+          <p:cNvSpPr/>
+          <p:nvPr/>
+        </p:nvSpPr>
+        <p:spPr>
+          <a:xfrm>
+            <a:off x="740664" y="2592324"/>
             <a:ext cx="1152144" cy="91440"/>
           </a:xfrm>
           <a:prstGeom prst="rect">
@@ -15507,13 +18161,13 @@
       </p:sp>
       <p:sp>
         <p:nvSpPr>
-          <p:cNvPr id="8" name="Text 6"/>
-          <p:cNvSpPr/>
-          <p:nvPr/>
-        </p:nvSpPr>
-        <p:spPr>
-          <a:xfrm>
-            <a:off x="758952" y="2267712"/>
+          <p:cNvPr id="14" name="Text 12"/>
+          <p:cNvSpPr/>
+          <p:nvPr/>
+        </p:nvSpPr>
+        <p:spPr>
+          <a:xfrm>
+            <a:off x="758952" y="2935224"/>
             <a:ext cx="3017520" cy="256032"/>
           </a:xfrm>
           <a:prstGeom prst="rect">
@@ -15540,7 +18194,7 @@
                 <a:ea typeface="Apple SD Gothic Neo" pitchFamily="34" charset="-122"/>
                 <a:cs typeface="Apple SD Gothic Neo" pitchFamily="34" charset="-120"/>
               </a:rPr>
-              <a:t>canonical public-key bytes의 digest</a:t>
+              <a:t>승인할 공개키의 digest</a:t>
             </a:r>
             <a:endParaRPr lang="en-US" sz="1530" dirty="0"/>
           </a:p>
@@ -15548,14 +18202,14 @@
       </p:sp>
       <p:sp>
         <p:nvSpPr>
-          <p:cNvPr id="9" name="Text 7"/>
-          <p:cNvSpPr/>
-          <p:nvPr/>
-        </p:nvSpPr>
-        <p:spPr>
-          <a:xfrm>
-            <a:off x="758952" y="2660904"/>
-            <a:ext cx="3017520" cy="2066544"/>
+          <p:cNvPr id="15" name="Text 13"/>
+          <p:cNvSpPr/>
+          <p:nvPr/>
+        </p:nvSpPr>
+        <p:spPr>
+          <a:xfrm>
+            <a:off x="758952" y="3328416"/>
+            <a:ext cx="3017520" cy="1014984"/>
           </a:xfrm>
           <a:prstGeom prst="rect">
             <a:avLst/>
@@ -15581,7 +18235,7 @@
                 <a:ea typeface="Apple SD Gothic Neo" pitchFamily="34" charset="-122"/>
                 <a:cs typeface="Apple SD Gothic Neo" pitchFamily="34" charset="-120"/>
               </a:rPr>
-              <a:t>어느 public key가 나중에 secret을 받을 수 있는지 묶는다.</a:t>
+              <a:t>protocol-canonical public-key bytes와 key algorithm을 묶어, 어느 키가 나중에 secret을 받을 수 있는지 정한다.</a:t>
             </a:r>
             <a:endParaRPr lang="en-US" sz="1230" dirty="0"/>
           </a:p>
@@ -15589,14 +18243,14 @@
       </p:sp>
       <p:sp>
         <p:nvSpPr>
-          <p:cNvPr id="10" name="Shape 8"/>
-          <p:cNvSpPr/>
-          <p:nvPr/>
-        </p:nvSpPr>
-        <p:spPr>
-          <a:xfrm>
-            <a:off x="4370832" y="1691640"/>
-            <a:ext cx="3383280" cy="3154680"/>
+          <p:cNvPr id="16" name="Shape 14"/>
+          <p:cNvSpPr/>
+          <p:nvPr/>
+        </p:nvSpPr>
+        <p:spPr>
+          <a:xfrm>
+            <a:off x="4370832" y="2359152"/>
+            <a:ext cx="3383280" cy="2103120"/>
           </a:xfrm>
           <a:prstGeom prst="roundRect">
             <a:avLst/>
@@ -15614,13 +18268,13 @@
       </p:sp>
       <p:sp>
         <p:nvSpPr>
-          <p:cNvPr id="11" name="Shape 9"/>
-          <p:cNvSpPr/>
-          <p:nvPr/>
-        </p:nvSpPr>
-        <p:spPr>
-          <a:xfrm>
-            <a:off x="4535424" y="1856232"/>
+          <p:cNvPr id="17" name="Shape 15"/>
+          <p:cNvSpPr/>
+          <p:nvPr/>
+        </p:nvSpPr>
+        <p:spPr>
+          <a:xfrm>
+            <a:off x="4535424" y="2523744"/>
             <a:ext cx="1152144" cy="256032"/>
           </a:xfrm>
           <a:prstGeom prst="roundRect">
@@ -15639,13 +18293,13 @@
       </p:sp>
       <p:sp>
         <p:nvSpPr>
-          <p:cNvPr id="12" name="Text 10"/>
-          <p:cNvSpPr/>
-          <p:nvPr/>
-        </p:nvSpPr>
-        <p:spPr>
-          <a:xfrm>
-            <a:off x="4535424" y="1924812"/>
+          <p:cNvPr id="18" name="Text 16"/>
+          <p:cNvSpPr/>
+          <p:nvPr/>
+        </p:nvSpPr>
+        <p:spPr>
+          <a:xfrm>
+            <a:off x="4535424" y="2592324"/>
             <a:ext cx="1152144" cy="91440"/>
           </a:xfrm>
           <a:prstGeom prst="rect">
@@ -15680,13 +18334,13 @@
       </p:sp>
       <p:sp>
         <p:nvSpPr>
-          <p:cNvPr id="13" name="Text 11"/>
-          <p:cNvSpPr/>
-          <p:nvPr/>
-        </p:nvSpPr>
-        <p:spPr>
-          <a:xfrm>
-            <a:off x="4553712" y="2267712"/>
+          <p:cNvPr id="19" name="Text 17"/>
+          <p:cNvSpPr/>
+          <p:nvPr/>
+        </p:nvSpPr>
+        <p:spPr>
+          <a:xfrm>
+            <a:off x="4553712" y="2935224"/>
             <a:ext cx="3017520" cy="256032"/>
           </a:xfrm>
           <a:prstGeom prst="rect">
@@ -15713,7 +18367,7 @@
                 <a:ea typeface="Apple SD Gothic Neo" pitchFamily="34" charset="-122"/>
                 <a:cs typeface="Apple SD Gothic Neo" pitchFamily="34" charset="-120"/>
               </a:rPr>
-              <a:t>nonce + request + subject + audience + K의 digest</a:t>
+              <a:t>요청 문맥과 K의 digest</a:t>
             </a:r>
             <a:endParaRPr lang="en-US" sz="1530" dirty="0"/>
           </a:p>
@@ -15721,14 +18375,14 @@
       </p:sp>
       <p:sp>
         <p:nvSpPr>
-          <p:cNvPr id="14" name="Text 12"/>
-          <p:cNvSpPr/>
-          <p:nvPr/>
-        </p:nvSpPr>
-        <p:spPr>
-          <a:xfrm>
-            <a:off x="4553712" y="2660904"/>
-            <a:ext cx="3017520" cy="2066544"/>
+          <p:cNvPr id="20" name="Text 18"/>
+          <p:cNvSpPr/>
+          <p:nvPr/>
+        </p:nvSpPr>
+        <p:spPr>
+          <a:xfrm>
+            <a:off x="4553712" y="3328416"/>
+            <a:ext cx="3017520" cy="1014984"/>
           </a:xfrm>
           <a:prstGeom prst="rect">
             <a:avLst/>
@@ -15754,7 +18408,7 @@
                 <a:ea typeface="Apple SD Gothic Neo" pitchFamily="34" charset="-122"/>
                 <a:cs typeface="Apple SD Gothic Neo" pitchFamily="34" charset="-120"/>
               </a:rPr>
-              <a:t>TD가 REPORTDATA에 넣어 request context와 key를 TDREPORT에 묶는다.</a:t>
+              <a:t>nonce·request ID·subject·audience·K를 묶어 fixed 64-byte REPORTDATA mapping에 넣는다.</a:t>
             </a:r>
             <a:endParaRPr lang="en-US" sz="1230" dirty="0"/>
           </a:p>
@@ -15762,14 +18416,14 @@
       </p:sp>
       <p:sp>
         <p:nvSpPr>
-          <p:cNvPr id="15" name="Shape 13"/>
-          <p:cNvSpPr/>
-          <p:nvPr/>
-        </p:nvSpPr>
-        <p:spPr>
-          <a:xfrm>
-            <a:off x="8165592" y="1691640"/>
-            <a:ext cx="3383280" cy="3154680"/>
+          <p:cNvPr id="21" name="Shape 19"/>
+          <p:cNvSpPr/>
+          <p:nvPr/>
+        </p:nvSpPr>
+        <p:spPr>
+          <a:xfrm>
+            <a:off x="8165592" y="2359152"/>
+            <a:ext cx="3383280" cy="2103120"/>
           </a:xfrm>
           <a:prstGeom prst="roundRect">
             <a:avLst/>
@@ -15787,13 +18441,13 @@
       </p:sp>
       <p:sp>
         <p:nvSpPr>
-          <p:cNvPr id="16" name="Shape 14"/>
-          <p:cNvSpPr/>
-          <p:nvPr/>
-        </p:nvSpPr>
-        <p:spPr>
-          <a:xfrm>
-            <a:off x="8330184" y="1856232"/>
+          <p:cNvPr id="22" name="Shape 20"/>
+          <p:cNvSpPr/>
+          <p:nvPr/>
+        </p:nvSpPr>
+        <p:spPr>
+          <a:xfrm>
+            <a:off x="8330184" y="2523744"/>
             <a:ext cx="1152144" cy="256032"/>
           </a:xfrm>
           <a:prstGeom prst="roundRect">
@@ -15812,13 +18466,13 @@
       </p:sp>
       <p:sp>
         <p:nvSpPr>
-          <p:cNvPr id="17" name="Text 15"/>
-          <p:cNvSpPr/>
-          <p:nvPr/>
-        </p:nvSpPr>
-        <p:spPr>
-          <a:xfrm>
-            <a:off x="8330184" y="1924812"/>
+          <p:cNvPr id="23" name="Text 21"/>
+          <p:cNvSpPr/>
+          <p:nvPr/>
+        </p:nvSpPr>
+        <p:spPr>
+          <a:xfrm>
+            <a:off x="8330184" y="2592324"/>
             <a:ext cx="1152144" cy="91440"/>
           </a:xfrm>
           <a:prstGeom prst="rect">
@@ -15853,13 +18507,13 @@
       </p:sp>
       <p:sp>
         <p:nvSpPr>
-          <p:cNvPr id="18" name="Text 16"/>
-          <p:cNvSpPr/>
-          <p:nvPr/>
-        </p:nvSpPr>
-        <p:spPr>
-          <a:xfrm>
-            <a:off x="8348472" y="2267712"/>
+          <p:cNvPr id="24" name="Text 22"/>
+          <p:cNvSpPr/>
+          <p:nvPr/>
+        </p:nvSpPr>
+        <p:spPr>
+          <a:xfrm>
+            <a:off x="8348472" y="2935224"/>
             <a:ext cx="3017520" cy="256032"/>
           </a:xfrm>
           <a:prstGeom prst="rect">
@@ -15886,7 +18540,7 @@
                 <a:ea typeface="Apple SD Gothic Neo" pitchFamily="34" charset="-122"/>
                 <a:cs typeface="Apple SD Gothic Neo" pitchFamily="34" charset="-120"/>
               </a:rPr>
-              <a:t>exact TD Quote octets의 digest</a:t>
+              <a:t>정확한 Quote 원문의 digest</a:t>
             </a:r>
             <a:endParaRPr lang="en-US" sz="1530" dirty="0"/>
           </a:p>
@@ -15894,14 +18548,14 @@
       </p:sp>
       <p:sp>
         <p:nvSpPr>
-          <p:cNvPr id="19" name="Text 17"/>
-          <p:cNvSpPr/>
-          <p:nvPr/>
-        </p:nvSpPr>
-        <p:spPr>
-          <a:xfrm>
-            <a:off x="8348472" y="2660904"/>
-            <a:ext cx="3017520" cy="2066544"/>
+          <p:cNvPr id="25" name="Text 23"/>
+          <p:cNvSpPr/>
+          <p:nvPr/>
+        </p:nvSpPr>
+        <p:spPr>
+          <a:xfrm>
+            <a:off x="8348472" y="3328416"/>
+            <a:ext cx="3017520" cy="1014984"/>
           </a:xfrm>
           <a:prstGeom prst="rect">
             <a:avLst/>
@@ -15927,7 +18581,7 @@
                 <a:ea typeface="Apple SD Gothic Neo" pitchFamily="34" charset="-122"/>
                 <a:cs typeface="Apple SD Gothic Neo" pitchFamily="34" charset="-120"/>
               </a:rPr>
-              <a:t>Result가 어떤 Quote Evidence를 평가한 결과인지 RP/KMS가 확인하게 한다.</a:t>
+              <a:t>Result가 어떤 transported Quote Evidence를 평가한 결과인지 RP/KMS가 확인하게 한다.</a:t>
             </a:r>
             <a:endParaRPr lang="en-US" sz="1230" dirty="0"/>
           </a:p>
@@ -15935,14 +18589,14 @@
       </p:sp>
       <p:sp>
         <p:nvSpPr>
-          <p:cNvPr id="20" name="Shape 18"/>
-          <p:cNvSpPr/>
-          <p:nvPr/>
-        </p:nvSpPr>
-        <p:spPr>
-          <a:xfrm>
-            <a:off x="658368" y="5321808"/>
-            <a:ext cx="10835640" cy="566928"/>
+          <p:cNvPr id="26" name="Shape 24"/>
+          <p:cNvSpPr/>
+          <p:nvPr/>
+        </p:nvSpPr>
+        <p:spPr>
+          <a:xfrm>
+            <a:off x="658368" y="4773168"/>
+            <a:ext cx="10835640" cy="960120"/>
           </a:xfrm>
           <a:prstGeom prst="roundRect">
             <a:avLst/>
@@ -15960,13 +18614,13 @@
       </p:sp>
       <p:sp>
         <p:nvSpPr>
-          <p:cNvPr id="21" name="Shape 19"/>
-          <p:cNvSpPr/>
-          <p:nvPr/>
-        </p:nvSpPr>
-        <p:spPr>
-          <a:xfrm>
-            <a:off x="822960" y="5486400"/>
+          <p:cNvPr id="27" name="Shape 25"/>
+          <p:cNvSpPr/>
+          <p:nvPr/>
+        </p:nvSpPr>
+        <p:spPr>
+          <a:xfrm>
+            <a:off x="822960" y="4937760"/>
             <a:ext cx="822960" cy="256032"/>
           </a:xfrm>
           <a:prstGeom prst="roundRect">
@@ -15985,13 +18639,13 @@
       </p:sp>
       <p:sp>
         <p:nvSpPr>
-          <p:cNvPr id="22" name="Text 20"/>
-          <p:cNvSpPr/>
-          <p:nvPr/>
-        </p:nvSpPr>
-        <p:spPr>
-          <a:xfrm>
-            <a:off x="822960" y="5554980"/>
+          <p:cNvPr id="28" name="Text 26"/>
+          <p:cNvSpPr/>
+          <p:nvPr/>
+        </p:nvSpPr>
+        <p:spPr>
+          <a:xfrm>
+            <a:off x="822960" y="5006340"/>
             <a:ext cx="822960" cy="91440"/>
           </a:xfrm>
           <a:prstGeom prst="rect">
@@ -16018,7 +18672,7 @@
                 <a:ea typeface="Apple SD Gothic Neo" pitchFamily="34" charset="-122"/>
                 <a:cs typeface="Apple SD Gothic Neo" pitchFamily="34" charset="-120"/>
               </a:rPr>
-              <a:t>비교 규칙</a:t>
+              <a:t>비교 규칙·한정자</a:t>
             </a:r>
             <a:endParaRPr lang="en-US" sz="820" dirty="0"/>
           </a:p>
@@ -16026,14 +18680,14 @@
       </p:sp>
       <p:sp>
         <p:nvSpPr>
-          <p:cNvPr id="23" name="Text 21"/>
-          <p:cNvSpPr/>
-          <p:nvPr/>
-        </p:nvSpPr>
-        <p:spPr>
-          <a:xfrm>
-            <a:off x="1828800" y="5486400"/>
-            <a:ext cx="9482328" cy="365760"/>
+          <p:cNvPr id="29" name="Text 27"/>
+          <p:cNvSpPr/>
+          <p:nvPr/>
+        </p:nvSpPr>
+        <p:spPr>
+          <a:xfrm>
+            <a:off x="1828800" y="4937760"/>
+            <a:ext cx="9482328" cy="758952"/>
           </a:xfrm>
           <a:prstGeom prst="rect">
             <a:avLst/>
@@ -16059,7 +18713,7 @@
                 <a:ea typeface="Apple SD Gothic Neo" pitchFamily="34" charset="-122"/>
                 <a:cs typeface="Apple SD Gothic Neo" pitchFamily="34" charset="-120"/>
               </a:rPr>
-              <a:t>Verifier는 retained nonce와 받은 context·key bytes로 K와 D를 재계산해 REPORTDATA와 비교하고, exact Quote bytes로 E를 계산한다. 이 비교가 맞아야 Result의 verdict와 approved K가 같은 request/Evidence를 가리킨다.</a:t>
+              <a:t>Verifier는 retained nonce와 받은 context·key bytes로 K와 D를 재계산해 REPORTDATA와 비교하고, exact Quote bytes로 E를 계산한다. 배포 profile은 hash/output length, 허용 key algorithm·canonical encoding, field order·length delimiting, domain tag/version, D의 64-byte REPORTDATA mapping을 확정해야 한다.</a:t>
             </a:r>
             <a:endParaRPr lang="en-US" sz="1330" dirty="0"/>
           </a:p>
@@ -16067,7 +18721,7 @@
       </p:sp>
       <p:sp>
         <p:nvSpPr>
-          <p:cNvPr id="24" name="Shape 22"/>
+          <p:cNvPr id="30" name="Shape 28"/>
           <p:cNvSpPr/>
           <p:nvPr/>
         </p:nvSpPr>
@@ -16090,7 +18744,7 @@
       </p:sp>
       <p:sp>
         <p:nvSpPr>
-          <p:cNvPr id="25" name="Text 23"/>
+          <p:cNvPr id="31" name="Text 29"/>
           <p:cNvSpPr/>
           <p:nvPr/>
         </p:nvSpPr>
@@ -16123,7 +18777,7 @@
                 <a:ea typeface="Apple SD Gothic Neo" pitchFamily="34" charset="-122"/>
                 <a:cs typeface="Apple SD Gothic Neo" pitchFamily="34" charset="-120"/>
               </a:rPr>
-              <a:t>C-006 · E-006/E-012/E-013/E-015 · X-003/X-004 · symbolic profile</a:t>
+              <a:t>C-006 · E-006/E-012/E-013/E-015 · X-003/X-004 · symbolic profile · 〔S-002,S-004,S-005,S-011〕</a:t>
             </a:r>
             <a:endParaRPr lang="en-US" sz="780" dirty="0"/>
           </a:p>
@@ -16131,7 +18785,7 @@
       </p:sp>
       <p:sp>
         <p:nvSpPr>
-          <p:cNvPr id="26" name="Text 24"/>
+          <p:cNvPr id="32" name="Text 30"/>
           <p:cNvSpPr/>
           <p:nvPr/>
         </p:nvSpPr>
@@ -16164,7 +18818,7 @@
                 <a:ea typeface="Apple SD Gothic Neo" pitchFamily="34" charset="-122"/>
                 <a:cs typeface="Apple SD Gothic Neo" pitchFamily="34" charset="-120"/>
               </a:rPr>
-              <a:t>Sources: RFC 9334 · Intel DCAP / TDX documentation</a:t>
+              <a:t>Source markers: 〔S-…〕 · Appendix 16</a:t>
             </a:r>
             <a:endParaRPr lang="en-US" sz="780" dirty="0"/>
           </a:p>
@@ -16278,7 +18932,7 @@
                 <a:ea typeface="Apple SD Gothic Neo" pitchFamily="34" charset="-122"/>
                 <a:cs typeface="Apple SD Gothic Neo" pitchFamily="34" charset="-120"/>
               </a:rPr>
-              <a:t>Result에는 verdict뿐 아니라 request·policy version·E·allow-only K가 들어가 RP/KMS가 무엇을 승인하는지 다시 확인할 수 있어야 한다.</a:t>
+              <a:t>Result에는 profile·digest suite·평가 정책·E와 allow-only K가 들어가 RP/KMS가 무엇을 승인하는지 다시 확인할 수 있어야 한다.</a:t>
             </a:r>
             <a:endParaRPr lang="en-US" sz="1430" dirty="0"/>
           </a:p>
@@ -16492,7 +19146,7 @@
                 <a:ea typeface="Apple SD Gothic Neo" pitchFamily="34" charset="-122"/>
                 <a:cs typeface="Apple SD Gothic Neo" pitchFamily="34" charset="-120"/>
               </a:rPr>
-              <a:t>Verifier는 signature·chain·status·freshness, K/D/E, reference value와 appraisal policy를 확인한다. terminal appraisal은 allow·deny·expiry 중 하나로 한 번만 소비된다.</a:t>
+              <a:t>signature·chain·status·freshness, K/D/E, reference value와 appraisal policy를 확인한다. issued → allow_consumed | deny_consumed | expired 원자 전이가 성공한 뒤에만 terminal Result를 발행한다.</a:t>
             </a:r>
             <a:endParaRPr lang="en-US" sz="1230" dirty="0"/>
           </a:p>
@@ -16665,7 +19319,7 @@
                 <a:ea typeface="Apple SD Gothic Neo" pitchFamily="34" charset="-122"/>
                 <a:cs typeface="Apple SD Gothic Neo" pitchFamily="34" charset="-120"/>
               </a:rPr>
-              <a:t>verdict, issuer, subject, audience, request ID, issued_at/expiry, profile/policy version, E와 allow-only approved K를 signed 한다.</a:t>
+              <a:t>profile_version, digest_suite_id, verdict, issuer, subject, audience, request_id, issued_at, expiry, appraisal_policy_id/version, E를 서명하고 allow일 때만 K를 넣는다.</a:t>
             </a:r>
             <a:endParaRPr lang="en-US" sz="1230" dirty="0"/>
           </a:p>
@@ -16838,7 +19492,7 @@
                 <a:ea typeface="Apple SD Gothic Neo" pitchFamily="34" charset="-122"/>
                 <a:cs typeface="Apple SD Gothic Neo" pitchFamily="34" charset="-120"/>
               </a:rPr>
-              <a:t>authorized issuer, verdict, policy version, subject/audience/request, clock skew, E, K를 확인한다. 하나라도 다르면 release하지 않는다.</a:t>
+              <a:t>signature·authorized issuer·verdict·accepted profile/policy version·subject/audience/request·clock skew·E·allow-only K를 확인한다. 하나라도 다르면 release하지 않는다.</a:t>
             </a:r>
             <a:endParaRPr lang="en-US" sz="1230" dirty="0"/>
           </a:p>
@@ -16902,8 +19556,8 @@
         </p:nvSpPr>
         <p:spPr>
           <a:xfrm>
-            <a:off x="658368" y="5349240"/>
-            <a:ext cx="10835640" cy="566928"/>
+            <a:off x="658368" y="5248656"/>
+            <a:ext cx="10835640" cy="694944"/>
           </a:xfrm>
           <a:prstGeom prst="roundRect">
             <a:avLst/>
@@ -16927,7 +19581,7 @@
         </p:nvSpPr>
         <p:spPr>
           <a:xfrm>
-            <a:off x="822960" y="5513832"/>
+            <a:off x="822960" y="5413248"/>
             <a:ext cx="822960" cy="256032"/>
           </a:xfrm>
           <a:prstGeom prst="roundRect">
@@ -16952,7 +19606,7 @@
         </p:nvSpPr>
         <p:spPr>
           <a:xfrm>
-            <a:off x="822960" y="5582412"/>
+            <a:off x="822960" y="5481828"/>
             <a:ext cx="822960" cy="91440"/>
           </a:xfrm>
           <a:prstGeom prst="rect">
@@ -16993,8 +19647,8 @@
         </p:nvSpPr>
         <p:spPr>
           <a:xfrm>
-            <a:off x="1828800" y="5513832"/>
-            <a:ext cx="9482328" cy="365760"/>
+            <a:off x="1828800" y="5413248"/>
+            <a:ext cx="9482328" cy="493776"/>
           </a:xfrm>
           <a:prstGeom prst="rect">
             <a:avLst/>
@@ -17020,7 +19674,7 @@
                 <a:ea typeface="Apple SD Gothic Neo" pitchFamily="34" charset="-122"/>
                 <a:cs typeface="Apple SD Gothic Neo" pitchFamily="34" charset="-120"/>
               </a:rPr>
-              <a:t>Verifier가 signed Result를 RP/KMS에 보낸다. RP/KMS는 Result signature와 policy/time/E/K를 확인하지만, 그 확인 자체를 secret release로 취급하지 않고 다음 PoP·state transition 단계까지 진행한다.</a:t>
+              <a:t>Verifier가 signed Result를 RP/KMS에 보낸다. RP/KMS가 Result signature·accepted profile/policy·time·E/K를 확인해도 그 자체는 secret release가 아니며, 다음 키 소유 증명(PoP)과 replay-state 전이가 별도로 성공해야 한다.</a:t>
             </a:r>
             <a:endParaRPr lang="en-US" sz="1330" dirty="0"/>
           </a:p>
@@ -17084,7 +19738,7 @@
                 <a:ea typeface="Apple SD Gothic Neo" pitchFamily="34" charset="-122"/>
                 <a:cs typeface="Apple SD Gothic Neo" pitchFamily="34" charset="-120"/>
               </a:rPr>
-              <a:t>C-004/C-006 · E-015 · B-005/B-006 · Result profile</a:t>
+              <a:t>C-004/C-006 · E-015 · B-005/B-006 · Result profile · 〔S-002,S-003,S-004,S-005〕</a:t>
             </a:r>
             <a:endParaRPr lang="en-US" sz="780" dirty="0"/>
           </a:p>
@@ -17125,7 +19779,7 @@
                 <a:ea typeface="Apple SD Gothic Neo" pitchFamily="34" charset="-122"/>
                 <a:cs typeface="Apple SD Gothic Neo" pitchFamily="34" charset="-120"/>
               </a:rPr>
-              <a:t>Sources: RFC 9334 · Intel DCAP / TDX documentation</a:t>
+              <a:t>Source markers: 〔S-…〕 · Appendix 16</a:t>
             </a:r>
             <a:endParaRPr lang="en-US" sz="780" dirty="0"/>
           </a:p>
@@ -17198,7 +19852,7 @@
                 <a:ea typeface="Apple SD Gothic Neo" pitchFamily="34" charset="-122"/>
                 <a:cs typeface="Apple SD Gothic Neo" pitchFamily="34" charset="-120"/>
               </a:rPr>
-              <a:t>비밀 공개는 PoP와 일회용 state가 통과한 뒤 한 번만 수행한다</a:t>
+              <a:t>비밀 공개는 키 소유 증명(PoP)과 일회용 state가 통과한 뒤 한 번만 수행한다</a:t>
             </a:r>
             <a:endParaRPr lang="en-US" sz="2900" dirty="0"/>
           </a:p>
@@ -17453,7 +20107,7 @@
                 <a:ea typeface="Apple SD Gothic Neo" pitchFamily="34" charset="-122"/>
                 <a:cs typeface="Apple SD Gothic Neo" pitchFamily="34" charset="-120"/>
               </a:rPr>
-              <a:t>RP/KMS가 approved K에 대한 challenge를 TD에 보내고, TD는 임시 private key로 서명한 response를 돌려준다.</a:t>
+              <a:t>키 소유 증명(PoP)은 RP/KMS가 approved K에 대한 challenge를 TD에 보내고, TD가 임시 private key로 서명한 response를 돌려주는 검사다.</a:t>
             </a:r>
             <a:endParaRPr lang="en-US" sz="1230" dirty="0"/>
           </a:p>
@@ -17799,7 +20453,7 @@
                 <a:ea typeface="Apple SD Gothic Neo" pitchFamily="34" charset="-122"/>
                 <a:cs typeface="Apple SD Gothic Neo" pitchFamily="34" charset="-120"/>
               </a:rPr>
-              <a:t>PoP와 atomic transition이 모두 성공한 allow path에서만 RP/KMS가 secret을 전달한다. 실패·replay·expiry는 NO KEY다.</a:t>
+              <a:t>PoP와 atomic transition이 모두 성공한 allow path에서만 RP/KMS가 secret을 전달한다. Result 검증과 secret 전달은 서로 다른 행동이다.</a:t>
             </a:r>
             <a:endParaRPr lang="en-US" sz="1230" dirty="0"/>
           </a:p>
@@ -17863,8 +20517,74 @@
         </p:nvSpPr>
         <p:spPr>
           <a:xfrm>
-            <a:off x="658368" y="5285232"/>
-            <a:ext cx="10835640" cy="566928"/>
+            <a:off x="658368" y="5074920"/>
+            <a:ext cx="5285232" cy="658368"/>
+          </a:xfrm>
+          <a:prstGeom prst="roundRect">
+            <a:avLst/>
+          </a:prstGeom>
+          <a:solidFill>
+            <a:srgbClr val="EAF7EF"/>
+          </a:solidFill>
+          <a:ln w="8890">
+            <a:solidFill>
+              <a:srgbClr val="EAF7EF"/>
+            </a:solidFill>
+            <a:prstDash val="solid"/>
+          </a:ln>
+        </p:spPr>
+      </p:sp>
+      <p:sp>
+        <p:nvSpPr>
+          <p:cNvPr id="23" name="Text 21"/>
+          <p:cNvSpPr/>
+          <p:nvPr/>
+        </p:nvSpPr>
+        <p:spPr>
+          <a:xfrm>
+            <a:off x="896112" y="5294376"/>
+            <a:ext cx="4773168" cy="164592"/>
+          </a:xfrm>
+          <a:prstGeom prst="rect">
+            <a:avLst/>
+          </a:prstGeom>
+          <a:noFill/>
+          <a:ln/>
+        </p:spPr>
+        <p:txBody>
+          <a:bodyPr wrap="square" lIns="0" tIns="0" rIns="0" bIns="0" rtlCol="0" anchor="ctr">
+            <a:normAutofit/>
+          </a:bodyPr>
+          <a:lstStyle/>
+          <a:p>
+            <a:pPr algn="ctr" indent="0" marL="0">
+              <a:buNone/>
+            </a:pPr>
+            <a:r>
+              <a:rPr lang="en-US" sz="1030" b="1" dirty="0">
+                <a:solidFill>
+                  <a:srgbClr val="14804A"/>
+                </a:solidFill>
+                <a:latin typeface="Apple SD Gothic Neo" pitchFamily="34" charset="0"/>
+                <a:ea typeface="Apple SD Gothic Neo" pitchFamily="34" charset="-122"/>
+                <a:cs typeface="Apple SD Gothic Neo" pitchFamily="34" charset="-120"/>
+              </a:rPr>
+              <a:t>ALLOW branch: Result/time/E/K + PoP + unused→release_committed 성공 → same approved-K channel → secret</a:t>
+            </a:r>
+            <a:endParaRPr lang="en-US" sz="1030" dirty="0"/>
+          </a:p>
+        </p:txBody>
+      </p:sp>
+      <p:sp>
+        <p:nvSpPr>
+          <p:cNvPr id="24" name="Shape 22"/>
+          <p:cNvSpPr/>
+          <p:nvPr/>
+        </p:nvSpPr>
+        <p:spPr>
+          <a:xfrm>
+            <a:off x="6236208" y="5074920"/>
+            <a:ext cx="5285232" cy="658368"/>
           </a:xfrm>
           <a:prstGeom prst="roundRect">
             <a:avLst/>
@@ -17882,39 +20602,14 @@
       </p:sp>
       <p:sp>
         <p:nvSpPr>
-          <p:cNvPr id="23" name="Shape 21"/>
-          <p:cNvSpPr/>
-          <p:nvPr/>
-        </p:nvSpPr>
-        <p:spPr>
-          <a:xfrm>
-            <a:off x="822960" y="5449824"/>
-            <a:ext cx="822960" cy="256032"/>
-          </a:xfrm>
-          <a:prstGeom prst="roundRect">
-            <a:avLst/>
-          </a:prstGeom>
-          <a:solidFill>
-            <a:srgbClr val="B42318"/>
-          </a:solidFill>
-          <a:ln w="8890">
-            <a:solidFill>
-              <a:srgbClr val="B42318"/>
-            </a:solidFill>
-            <a:prstDash val="solid"/>
-          </a:ln>
-        </p:spPr>
-      </p:sp>
-      <p:sp>
-        <p:nvSpPr>
-          <p:cNvPr id="24" name="Text 22"/>
-          <p:cNvSpPr/>
-          <p:nvPr/>
-        </p:nvSpPr>
-        <p:spPr>
-          <a:xfrm>
-            <a:off x="822960" y="5518404"/>
-            <a:ext cx="822960" cy="91440"/>
+          <p:cNvPr id="25" name="Text 23"/>
+          <p:cNvSpPr/>
+          <p:nvPr/>
+        </p:nvSpPr>
+        <p:spPr>
+          <a:xfrm>
+            <a:off x="6473952" y="5294376"/>
+            <a:ext cx="4773168" cy="164592"/>
           </a:xfrm>
           <a:prstGeom prst="rect">
             <a:avLst/>
@@ -17932,48 +20627,7 @@
               <a:buNone/>
             </a:pPr>
             <a:r>
-              <a:rPr lang="en-US" sz="820" b="1" dirty="0">
-                <a:solidFill>
-                  <a:srgbClr val="FFFFFF"/>
-                </a:solidFill>
-                <a:latin typeface="Apple SD Gothic Neo" pitchFamily="34" charset="0"/>
-                <a:ea typeface="Apple SD Gothic Neo" pitchFamily="34" charset="-122"/>
-                <a:cs typeface="Apple SD Gothic Neo" pitchFamily="34" charset="-120"/>
-              </a:rPr>
-              <a:t>allow / no-key</a:t>
-            </a:r>
-            <a:endParaRPr lang="en-US" sz="820" dirty="0"/>
-          </a:p>
-        </p:txBody>
-      </p:sp>
-      <p:sp>
-        <p:nvSpPr>
-          <p:cNvPr id="25" name="Text 23"/>
-          <p:cNvSpPr/>
-          <p:nvPr/>
-        </p:nvSpPr>
-        <p:spPr>
-          <a:xfrm>
-            <a:off x="1828800" y="5449824"/>
-            <a:ext cx="9482328" cy="365760"/>
-          </a:xfrm>
-          <a:prstGeom prst="rect">
-            <a:avLst/>
-          </a:prstGeom>
-          <a:noFill/>
-          <a:ln/>
-        </p:spPr>
-        <p:txBody>
-          <a:bodyPr wrap="square" lIns="0" tIns="0" rIns="0" bIns="0" rtlCol="0" anchor="ctr">
-            <a:normAutofit/>
-          </a:bodyPr>
-          <a:lstStyle/>
-          <a:p>
-            <a:pPr indent="0" marL="0">
-              <a:buNone/>
-            </a:pPr>
-            <a:r>
-              <a:rPr lang="en-US" sz="1330" dirty="0">
+              <a:rPr lang="en-US" sz="1030" b="1" dirty="0">
                 <a:solidFill>
                   <a:srgbClr val="B42318"/>
                 </a:solidFill>
@@ -17981,9 +20635,9 @@
                 <a:ea typeface="Apple SD Gothic Neo" pitchFamily="34" charset="-122"/>
                 <a:cs typeface="Apple SD Gothic Neo" pitchFamily="34" charset="-120"/>
               </a:rPr>
-              <a:t>RP/KMS가 Result를 확인한 뒤 TD와 PoP challenge/response를 교환한다. key possession과 one-time state transition이 모두 성공한 경우에만 RP/KMS가 E-018의 same approved K channel로 secret을 공개한다.</a:t>
-            </a:r>
-            <a:endParaRPr lang="en-US" sz="1330" dirty="0"/>
+              <a:t>NO KEY branch: deny | expiry | replay | invalid Result/collateral | failed PoP | terminal error</a:t>
+            </a:r>
+            <a:endParaRPr lang="en-US" sz="1030" dirty="0"/>
           </a:p>
         </p:txBody>
       </p:sp>
@@ -18045,7 +20699,7 @@
                 <a:ea typeface="Apple SD Gothic Neo" pitchFamily="34" charset="-122"/>
                 <a:cs typeface="Apple SD Gothic Neo" pitchFamily="34" charset="-120"/>
               </a:rPr>
-              <a:t>C-004/C-006 · E-016/E-017/E-018 · X-003 · B-006</a:t>
+              <a:t>C-004/C-006 · E-016/E-017/E-018 · X-003 · B-006 · 〔S-002,S-003,S-004,S-005〕</a:t>
             </a:r>
             <a:endParaRPr lang="en-US" sz="780" dirty="0"/>
           </a:p>
@@ -18086,7 +20740,7 @@
                 <a:ea typeface="Apple SD Gothic Neo" pitchFamily="34" charset="-122"/>
                 <a:cs typeface="Apple SD Gothic Neo" pitchFamily="34" charset="-120"/>
               </a:rPr>
-              <a:t>Sources: RFC 9334 · Intel DCAP / TDX documentation</a:t>
+              <a:t>Source markers: 〔S-…〕 · Appendix 16</a:t>
             </a:r>
             <a:endParaRPr lang="en-US" sz="780" dirty="0"/>
           </a:p>
